--- a/documentation/AeroBook_Presentation.pptx
+++ b/documentation/AeroBook_Presentation.pptx
@@ -10,9 +10,10 @@
     <p:sldId id="258" r:id="rId4"/>
     <p:sldId id="259" r:id="rId5"/>
     <p:sldId id="260" r:id="rId6"/>
+    <p:sldId id="261" r:id="rId7"/>
   </p:sldIdLst>
   <p:notesMasterIdLst>
-    <p:notesMasterId r:id="rId7"/>
+    <p:notesMasterId r:id="rId8"/>
   </p:notesMasterIdLst>
   <p:sldSz cx="9144000" cy="5143500"/>
   <p:notesSz cx="5143500" cy="9144000"/>
@@ -882,6 +883,94 @@
             <a:fld id="{F7021451-1387-4CA6-816F-3879F97B5CBC}" type="slidenum">
               <a:rPr lang="en-US"/>
               <a:t>5</a:t>
+            </a:fld>
+            <a:endParaRPr lang="en-US"/>
+          </a:p>
+        </p:txBody>
+      </p:sp>
+    </p:spTree>
+    <p:extLst>
+      <p:ext uri="{BB962C8B-B14F-4D97-AF65-F5344CB8AC3E}">
+        <p14:creationId xmlns:p14="http://schemas.microsoft.com/office/powerpoint/2010/main" val="1024086991"/>
+      </p:ext>
+    </p:extLst>
+  </p:cSld>
+  <p:clrMapOvr>
+    <a:masterClrMapping/>
+  </p:clrMapOvr>
+</p:notes>
+</file>
+
+<file path=ppt/notesSlides/notesSlide6.xml><?xml version="1.0" encoding="utf-8"?>
+<p:notes xmlns:a="http://schemas.openxmlformats.org/drawingml/2006/main" xmlns:r="http://schemas.openxmlformats.org/officeDocument/2006/relationships" xmlns:p="http://schemas.openxmlformats.org/presentationml/2006/main">
+  <p:cSld>
+    <p:spTree>
+      <p:nvGrpSpPr>
+        <p:cNvPr id="1" name=""/>
+        <p:cNvGrpSpPr/>
+        <p:nvPr/>
+      </p:nvGrpSpPr>
+      <p:grpSpPr>
+        <a:xfrm>
+          <a:off x="0" y="0"/>
+          <a:ext cx="0" cy="0"/>
+          <a:chOff x="0" y="0"/>
+          <a:chExt cx="0" cy="0"/>
+        </a:xfrm>
+      </p:grpSpPr>
+      <p:sp>
+        <p:nvSpPr>
+          <p:cNvPr id="2" name="Slide Image Placeholder 1"/>
+          <p:cNvSpPr>
+            <a:spLocks noGrp="1" noRot="1" noChangeAspect="1"/>
+          </p:cNvSpPr>
+          <p:nvPr>
+            <p:ph type="sldImg"/>
+          </p:nvPr>
+        </p:nvSpPr>
+        <p:spPr/>
+      </p:sp>
+      <p:sp>
+        <p:nvSpPr>
+          <p:cNvPr id="3" name="Notes Placeholder 2"/>
+          <p:cNvSpPr>
+            <a:spLocks noGrp="1"/>
+          </p:cNvSpPr>
+          <p:nvPr>
+            <p:ph type="body" idx="1"/>
+          </p:nvPr>
+        </p:nvSpPr>
+        <p:spPr/>
+        <p:txBody>
+          <a:bodyPr/>
+          <a:lstStyle/>
+          <a:p>
+            <a:r>
+              <a:rPr lang="en-US" dirty="0"/>
+              <a:t/>
+            </a:r>
+            <a:endParaRPr lang="en-US" dirty="0"/>
+          </a:p>
+        </p:txBody>
+      </p:sp>
+      <p:sp>
+        <p:nvSpPr>
+          <p:cNvPr id="4" name="Slide Number Placeholder 3"/>
+          <p:cNvSpPr>
+            <a:spLocks noGrp="1"/>
+          </p:cNvSpPr>
+          <p:nvPr>
+            <p:ph type="sldNum" sz="quarter" idx="10"/>
+          </p:nvPr>
+        </p:nvSpPr>
+        <p:spPr/>
+        <p:txBody>
+          <a:bodyPr/>
+          <a:lstStyle/>
+          <a:p>
+            <a:fld id="{F7021451-1387-4CA6-816F-3879F97B5CBC}" type="slidenum">
+              <a:rPr lang="en-US"/>
+              <a:t>6</a:t>
             </a:fld>
             <a:endParaRPr lang="en-US"/>
           </a:p>
@@ -1265,7 +1354,7 @@
         <p:spPr>
           <a:xfrm>
             <a:off x="731520" y="548640"/>
-            <a:ext cx="2926080" cy="347472"/>
+            <a:ext cx="2560320" cy="347472"/>
           </a:xfrm>
           <a:prstGeom prst="roundRect">
             <a:avLst>
@@ -1275,7 +1364,7 @@
           <a:solidFill>
             <a:srgbClr val="18181B"/>
           </a:solidFill>
-          <a:ln w="15240">
+          <a:ln w="12700">
             <a:solidFill>
               <a:srgbClr val="FFFFFF"/>
             </a:solidFill>
@@ -1292,7 +1381,7 @@
         <p:spPr>
           <a:xfrm>
             <a:off x="731520" y="548640"/>
-            <a:ext cx="2926080" cy="347472"/>
+            <a:ext cx="2560320" cy="347472"/>
           </a:xfrm>
           <a:prstGeom prst="rect">
             <a:avLst/>
@@ -1316,7 +1405,7 @@
                 <a:ea typeface="Calibri" pitchFamily="34" charset="-122"/>
                 <a:cs typeface="Calibri" pitchFamily="34" charset="-120"/>
               </a:rPr>
-              <a:t>MAJOR PROJECT PRESENTATION  *  2026</a:t>
+              <a:t>PROJECT PRESENTATION • 2026</a:t>
             </a:r>
             <a:endParaRPr lang="en-US" sz="950" dirty="0"/>
           </a:p>
@@ -1330,8 +1419,8 @@
         </p:nvSpPr>
         <p:spPr>
           <a:xfrm>
-            <a:off x="731520" y="1051560"/>
-            <a:ext cx="10515600" cy="822960"/>
+            <a:off x="731520" y="1097280"/>
+            <a:ext cx="10698480" cy="822960"/>
           </a:xfrm>
           <a:prstGeom prst="rect">
             <a:avLst/>
@@ -1369,8 +1458,8 @@
         </p:nvSpPr>
         <p:spPr>
           <a:xfrm>
-            <a:off x="731520" y="1874520"/>
-            <a:ext cx="10515600" cy="411480"/>
+            <a:off x="731520" y="1920240"/>
+            <a:ext cx="10698480" cy="457200"/>
           </a:xfrm>
           <a:prstGeom prst="rect">
             <a:avLst/>
@@ -1386,7 +1475,7 @@
               <a:buNone/>
             </a:pPr>
             <a:r>
-              <a:rPr lang="en-US" sz="1600" b="1" dirty="0">
+              <a:rPr lang="en-US" sz="1500" dirty="0">
                 <a:solidFill>
                   <a:srgbClr val="38BDF8"/>
                 </a:solidFill>
@@ -1394,67 +1483,28 @@
                 <a:ea typeface="Calibri" pitchFamily="34" charset="-122"/>
                 <a:cs typeface="Calibri" pitchFamily="34" charset="-120"/>
               </a:rPr>
-              <a:t>Next-Generation Airline Reservation &amp; Distributed Flight Operations Engine</a:t>
-            </a:r>
-            <a:endParaRPr lang="en-US" sz="1600" dirty="0"/>
-          </a:p>
-        </p:txBody>
-      </p:sp>
-      <p:sp>
-        <p:nvSpPr>
-          <p:cNvPr id="7" name="Text 5"/>
-          <p:cNvSpPr/>
-          <p:nvPr/>
-        </p:nvSpPr>
-        <p:spPr>
-          <a:xfrm>
-            <a:off x="731520" y="2331720"/>
-            <a:ext cx="10515600" cy="548640"/>
-          </a:xfrm>
-          <a:prstGeom prst="rect">
-            <a:avLst/>
-          </a:prstGeom>
-          <a:noFill/>
-          <a:ln/>
-        </p:spPr>
-        <p:txBody>
-          <a:bodyPr wrap="square" rtlCol="0" anchor="t"/>
-          <a:lstStyle/>
-          <a:p>
-            <a:pPr indent="0" marL="0">
-              <a:buNone/>
-            </a:pPr>
-            <a:r>
-              <a:rPr lang="en-US" sz="1100" dirty="0">
-                <a:solidFill>
-                  <a:srgbClr val="A1A1AA"/>
-                </a:solidFill>
-                <a:latin typeface="Calibri" pitchFamily="34" charset="0"/>
-                <a:ea typeface="Calibri" pitchFamily="34" charset="-122"/>
-                <a:cs typeface="Calibri" pitchFamily="34" charset="-120"/>
-              </a:rPr>
-              <a:t>A cloud-native, microservices-driven distributed reservation system featuring real-time seat inventory locking, dynamic fare calculations, self-service web check-in with 2D QR boarding passes, and event-driven asynchronous messaging.</a:t>
-            </a:r>
-            <a:endParaRPr lang="en-US" sz="1100" dirty="0"/>
-          </a:p>
-        </p:txBody>
-      </p:sp>
-      <p:sp>
-        <p:nvSpPr>
-          <p:cNvPr id="8" name="Shape 6"/>
-          <p:cNvSpPr/>
-          <p:nvPr/>
-        </p:nvSpPr>
-        <p:spPr>
-          <a:xfrm>
-            <a:off x="731520" y="3017520"/>
-            <a:ext cx="10725912" cy="0"/>
+              <a:t>Online Airline Ticket Booking &amp; Management System</a:t>
+            </a:r>
+            <a:endParaRPr lang="en-US" sz="1500" dirty="0"/>
+          </a:p>
+        </p:txBody>
+      </p:sp>
+      <p:sp>
+        <p:nvSpPr>
+          <p:cNvPr id="7" name="Shape 5"/>
+          <p:cNvSpPr/>
+          <p:nvPr/>
+        </p:nvSpPr>
+        <p:spPr>
+          <a:xfrm>
+            <a:off x="731520" y="2468880"/>
+            <a:ext cx="10698480" cy="0"/>
           </a:xfrm>
           <a:prstGeom prst="line">
             <a:avLst/>
           </a:prstGeom>
           <a:noFill/>
-          <a:ln w="15240">
+          <a:ln w="12700">
             <a:solidFill>
               <a:srgbClr val="3F3F46"/>
             </a:solidFill>
@@ -1464,18 +1514,18 @@
       </p:sp>
       <p:sp>
         <p:nvSpPr>
-          <p:cNvPr id="9" name="Shape 7"/>
-          <p:cNvSpPr/>
-          <p:nvPr/>
-        </p:nvSpPr>
-        <p:spPr>
-          <a:xfrm>
-            <a:off x="731520" y="3246120"/>
-            <a:ext cx="3337560" cy="2926080"/>
+          <p:cNvPr id="8" name="Shape 6"/>
+          <p:cNvSpPr/>
+          <p:nvPr/>
+        </p:nvSpPr>
+        <p:spPr>
+          <a:xfrm>
+            <a:off x="731520" y="2834640"/>
+            <a:ext cx="5120640" cy="2743200"/>
           </a:xfrm>
           <a:prstGeom prst="roundRect">
             <a:avLst>
-              <a:gd name="adj" fmla="val 3125"/>
+              <a:gd name="adj" fmla="val 4000"/>
             </a:avLst>
           </a:prstGeom>
           <a:solidFill>
@@ -1483,6 +1533,33 @@
           </a:solidFill>
           <a:ln w="19050">
             <a:solidFill>
+              <a:srgbClr val="FFFFFF"/>
+            </a:solidFill>
+            <a:prstDash val="solid"/>
+          </a:ln>
+        </p:spPr>
+      </p:sp>
+      <p:sp>
+        <p:nvSpPr>
+          <p:cNvPr id="9" name="Shape 7"/>
+          <p:cNvSpPr/>
+          <p:nvPr/>
+        </p:nvSpPr>
+        <p:spPr>
+          <a:xfrm>
+            <a:off x="1005840" y="3063240"/>
+            <a:ext cx="1828800" cy="274320"/>
+          </a:xfrm>
+          <a:prstGeom prst="roundRect">
+            <a:avLst>
+              <a:gd name="adj" fmla="val 20000"/>
+            </a:avLst>
+          </a:prstGeom>
+          <a:solidFill>
+            <a:srgbClr val="27272A"/>
+          </a:solidFill>
+          <a:ln w="12700">
+            <a:solidFill>
               <a:srgbClr val="38BDF8"/>
             </a:solidFill>
             <a:prstDash val="solid"/>
@@ -1497,8 +1574,8 @@
         </p:nvSpPr>
         <p:spPr>
           <a:xfrm>
-            <a:off x="914400" y="3429000"/>
-            <a:ext cx="2971800" cy="274320"/>
+            <a:off x="1005840" y="3063240"/>
+            <a:ext cx="1828800" cy="274320"/>
           </a:xfrm>
           <a:prstGeom prst="rect">
             <a:avLst/>
@@ -1510,11 +1587,11 @@
           <a:bodyPr wrap="square" rtlCol="0" anchor="ctr"/>
           <a:lstStyle/>
           <a:p>
-            <a:pPr indent="0" marL="0">
-              <a:buNone/>
-            </a:pPr>
-            <a:r>
-              <a:rPr lang="en-US" sz="1000" b="1" dirty="0">
+            <a:pPr algn="ctr" indent="0" marL="0">
+              <a:buNone/>
+            </a:pPr>
+            <a:r>
+              <a:rPr lang="en-US" sz="850" b="1" dirty="0">
                 <a:solidFill>
                   <a:srgbClr val="38BDF8"/>
                 </a:solidFill>
@@ -1522,9 +1599,9 @@
                 <a:ea typeface="Calibri" pitchFamily="34" charset="-122"/>
                 <a:cs typeface="Calibri" pitchFamily="34" charset="-120"/>
               </a:rPr>
-              <a:t>PROJECT LEAD &amp; DEVELOPER</a:t>
-            </a:r>
-            <a:endParaRPr lang="en-US" sz="1000" dirty="0"/>
+              <a:t>PRESENTED BY</a:t>
+            </a:r>
+            <a:endParaRPr lang="en-US" sz="850" dirty="0"/>
           </a:p>
         </p:txBody>
       </p:sp>
@@ -1536,8 +1613,8 @@
         </p:nvSpPr>
         <p:spPr>
           <a:xfrm>
-            <a:off x="914400" y="3794760"/>
-            <a:ext cx="2971800" cy="228600"/>
+            <a:off x="1005840" y="3474720"/>
+            <a:ext cx="4572000" cy="548640"/>
           </a:xfrm>
           <a:prstGeom prst="rect">
             <a:avLst/>
@@ -1553,17 +1630,17 @@
               <a:buNone/>
             </a:pPr>
             <a:r>
-              <a:rPr lang="en-US" sz="900" dirty="0">
-                <a:solidFill>
-                  <a:srgbClr val="A1A1AA"/>
-                </a:solidFill>
-                <a:latin typeface="Calibri" pitchFamily="34" charset="0"/>
-                <a:ea typeface="Calibri" pitchFamily="34" charset="-122"/>
-                <a:cs typeface="Calibri" pitchFamily="34" charset="-120"/>
-              </a:rPr>
-              <a:t>Presented By:</a:t>
-            </a:r>
-            <a:endParaRPr lang="en-US" sz="900" dirty="0"/>
+              <a:rPr lang="en-US" sz="2600" b="1" dirty="0">
+                <a:solidFill>
+                  <a:srgbClr val="FFFFFF"/>
+                </a:solidFill>
+                <a:latin typeface="Calibri" pitchFamily="34" charset="0"/>
+                <a:ea typeface="Calibri" pitchFamily="34" charset="-122"/>
+                <a:cs typeface="Calibri" pitchFamily="34" charset="-120"/>
+              </a:rPr>
+              <a:t>Amir Sohel</a:t>
+            </a:r>
+            <a:endParaRPr lang="en-US" sz="2600" dirty="0"/>
           </a:p>
         </p:txBody>
       </p:sp>
@@ -1575,8 +1652,8 @@
         </p:nvSpPr>
         <p:spPr>
           <a:xfrm>
-            <a:off x="914400" y="4023360"/>
-            <a:ext cx="2971800" cy="365760"/>
+            <a:off x="1005840" y="4069080"/>
+            <a:ext cx="4572000" cy="320040"/>
           </a:xfrm>
           <a:prstGeom prst="rect">
             <a:avLst/>
@@ -1594,13 +1671,13 @@
             <a:r>
               <a:rPr lang="en-US" sz="1500" b="1" dirty="0">
                 <a:solidFill>
-                  <a:srgbClr val="FFFFFF"/>
-                </a:solidFill>
-                <a:latin typeface="Calibri" pitchFamily="34" charset="0"/>
-                <a:ea typeface="Calibri" pitchFamily="34" charset="-122"/>
-                <a:cs typeface="Calibri" pitchFamily="34" charset="-120"/>
-              </a:rPr>
-              <a:t>Lead Developer / Student</a:t>
+                  <a:srgbClr val="4ADE80"/>
+                </a:solidFill>
+                <a:latin typeface="Calibri" pitchFamily="34" charset="0"/>
+                <a:ea typeface="Calibri" pitchFamily="34" charset="-122"/>
+                <a:cs typeface="Calibri" pitchFamily="34" charset="-120"/>
+              </a:rPr>
+              <a:t>Software Engineer</a:t>
             </a:r>
             <a:endParaRPr lang="en-US" sz="1500" dirty="0"/>
           </a:p>
@@ -1614,8 +1691,8 @@
         </p:nvSpPr>
         <p:spPr>
           <a:xfrm>
-            <a:off x="914400" y="4480560"/>
-            <a:ext cx="2971800" cy="1371600"/>
+            <a:off x="1005840" y="4526280"/>
+            <a:ext cx="4572000" cy="365760"/>
           </a:xfrm>
           <a:prstGeom prst="rect">
             <a:avLst/>
@@ -1628,13 +1705,10 @@
           <a:lstStyle/>
           <a:p>
             <a:pPr indent="0" marL="0">
-              <a:lnSpc>
-                <a:spcPct val="120000"/>
-              </a:lnSpc>
-              <a:buNone/>
-            </a:pPr>
-            <a:r>
-              <a:rPr lang="en-US" sz="950" dirty="0">
+              <a:buNone/>
+            </a:pPr>
+            <a:r>
+              <a:rPr lang="en-US" sz="1100" dirty="0">
                 <a:solidFill>
                   <a:srgbClr val="E4E4E7"/>
                 </a:solidFill>
@@ -1642,69 +1716,9 @@
                 <a:ea typeface="Calibri" pitchFamily="34" charset="-122"/>
                 <a:cs typeface="Calibri" pitchFamily="34" charset="-120"/>
               </a:rPr>
-              <a:t>B.Tech in Computer Science &amp; Engineering</a:t>
-            </a:r>
-            <a:endParaRPr lang="en-US" sz="950" dirty="0"/>
-          </a:p>
-          <a:p>
-            <a:pPr indent="0" marL="0">
-              <a:lnSpc>
-                <a:spcPct val="120000"/>
-              </a:lnSpc>
-              <a:buNone/>
-            </a:pPr>
-            <a:r>
-              <a:rPr lang="en-US" sz="950" dirty="0">
-                <a:solidFill>
-                  <a:srgbClr val="E4E4E7"/>
-                </a:solidFill>
-                <a:latin typeface="Calibri" pitchFamily="34" charset="0"/>
-                <a:ea typeface="Calibri" pitchFamily="34" charset="-122"/>
-                <a:cs typeface="Calibri" pitchFamily="34" charset="-120"/>
-              </a:rPr>
-              <a:t>Department of Computer Science &amp; Engineering</a:t>
-            </a:r>
-            <a:endParaRPr lang="en-US" sz="950" dirty="0"/>
-          </a:p>
-          <a:p>
-            <a:pPr indent="0" marL="0">
-              <a:lnSpc>
-                <a:spcPct val="120000"/>
-              </a:lnSpc>
-              <a:buNone/>
-            </a:pPr>
-            <a:r>
-              <a:rPr lang="en-US" sz="950" dirty="0">
-                <a:solidFill>
-                  <a:srgbClr val="E4E4E7"/>
-                </a:solidFill>
-                <a:latin typeface="Calibri" pitchFamily="34" charset="0"/>
-                <a:ea typeface="Calibri" pitchFamily="34" charset="-122"/>
-                <a:cs typeface="Calibri" pitchFamily="34" charset="-120"/>
-              </a:rPr>
-              <a:t>Project Roll No / ID: AB-2026-CS</a:t>
-            </a:r>
-            <a:endParaRPr lang="en-US" sz="950" dirty="0"/>
-          </a:p>
-          <a:p>
-            <a:pPr indent="0" marL="0">
-              <a:lnSpc>
-                <a:spcPct val="120000"/>
-              </a:lnSpc>
-              <a:buNone/>
-            </a:pPr>
-            <a:r>
-              <a:rPr lang="en-US" sz="950" dirty="0">
-                <a:solidFill>
-                  <a:srgbClr val="E4E4E7"/>
-                </a:solidFill>
-                <a:latin typeface="Calibri" pitchFamily="34" charset="0"/>
-                <a:ea typeface="Calibri" pitchFamily="34" charset="-122"/>
-                <a:cs typeface="Calibri" pitchFamily="34" charset="-120"/>
-              </a:rPr>
-              <a:t>Specialization: Cloud Computing &amp; Distributed Systems</a:t>
-            </a:r>
-            <a:endParaRPr lang="en-US" sz="950" dirty="0"/>
+              <a:t>AeroBook Flight Platform Project</a:t>
+            </a:r>
+            <a:endParaRPr lang="en-US" sz="1100" dirty="0"/>
           </a:p>
         </p:txBody>
       </p:sp>
@@ -1716,20 +1730,20 @@
         </p:nvSpPr>
         <p:spPr>
           <a:xfrm>
-            <a:off x="4434840" y="3246120"/>
-            <a:ext cx="3337560" cy="2926080"/>
+            <a:off x="6217920" y="2834640"/>
+            <a:ext cx="5212080" cy="2743200"/>
           </a:xfrm>
           <a:prstGeom prst="roundRect">
             <a:avLst>
-              <a:gd name="adj" fmla="val 3125"/>
+              <a:gd name="adj" fmla="val 4000"/>
             </a:avLst>
           </a:prstGeom>
           <a:solidFill>
             <a:srgbClr val="18181B"/>
           </a:solidFill>
-          <a:ln w="19050">
+          <a:ln w="12700">
             <a:solidFill>
-              <a:srgbClr val="4ADE80"/>
+              <a:srgbClr val="27272A"/>
             </a:solidFill>
             <a:prstDash val="solid"/>
           </a:ln>
@@ -1743,8 +1757,8 @@
         </p:nvSpPr>
         <p:spPr>
           <a:xfrm>
-            <a:off x="4617720" y="3429000"/>
-            <a:ext cx="2971800" cy="274320"/>
+            <a:off x="6492240" y="3063240"/>
+            <a:ext cx="4663440" cy="320040"/>
           </a:xfrm>
           <a:prstGeom prst="rect">
             <a:avLst/>
@@ -1760,15 +1774,155 @@
               <a:buNone/>
             </a:pPr>
             <a:r>
+              <a:rPr lang="en-US" sz="1150" b="1" dirty="0">
+                <a:solidFill>
+                  <a:srgbClr val="38BDF8"/>
+                </a:solidFill>
+                <a:latin typeface="Calibri" pitchFamily="34" charset="0"/>
+                <a:ea typeface="Calibri" pitchFamily="34" charset="-122"/>
+                <a:cs typeface="Calibri" pitchFamily="34" charset="-120"/>
+              </a:rPr>
+              <a:t>PROJECT HIGHLIGHTS</a:t>
+            </a:r>
+            <a:endParaRPr lang="en-US" sz="1150" dirty="0"/>
+          </a:p>
+        </p:txBody>
+      </p:sp>
+      <p:sp>
+        <p:nvSpPr>
+          <p:cNvPr id="16" name="Text 14"/>
+          <p:cNvSpPr/>
+          <p:nvPr/>
+        </p:nvSpPr>
+        <p:spPr>
+          <a:xfrm>
+            <a:off x="6492240" y="3474720"/>
+            <a:ext cx="4663440" cy="1920240"/>
+          </a:xfrm>
+          <a:prstGeom prst="rect">
+            <a:avLst/>
+          </a:prstGeom>
+          <a:noFill/>
+          <a:ln/>
+        </p:spPr>
+        <p:txBody>
+          <a:bodyPr wrap="square" rtlCol="0" anchor="t"/>
+          <a:lstStyle/>
+          <a:p>
+            <a:pPr indent="0" marL="0">
+              <a:buNone/>
+            </a:pPr>
+            <a:r>
               <a:rPr lang="en-US" sz="1000" b="1" dirty="0">
                 <a:solidFill>
-                  <a:srgbClr val="4ADE80"/>
-                </a:solidFill>
-                <a:latin typeface="Calibri" pitchFamily="34" charset="0"/>
-                <a:ea typeface="Calibri" pitchFamily="34" charset="-122"/>
-                <a:cs typeface="Calibri" pitchFamily="34" charset="-120"/>
-              </a:rPr>
-              <a:t>PROJECT GUIDANCE &amp; MENTORSHIP</a:t>
+                  <a:srgbClr val="FFFFFF"/>
+                </a:solidFill>
+                <a:latin typeface="Calibri" pitchFamily="34" charset="0"/>
+                <a:ea typeface="Calibri" pitchFamily="34" charset="-122"/>
+                <a:cs typeface="Calibri" pitchFamily="34" charset="-120"/>
+              </a:rPr>
+              <a:t>• What is it: </a:t>
+            </a:r>
+            <a:pPr indent="0" marL="0">
+              <a:buNone/>
+            </a:pPr>
+            <a:r>
+              <a:rPr lang="en-US" sz="1000" dirty="0">
+                <a:solidFill>
+                  <a:srgbClr val="E4E4E7"/>
+                </a:solidFill>
+                <a:latin typeface="Calibri" pitchFamily="34" charset="0"/>
+                <a:ea typeface="Calibri" pitchFamily="34" charset="-122"/>
+                <a:cs typeface="Calibri" pitchFamily="34" charset="-120"/>
+              </a:rPr>
+              <a:t>Complete web application for booking flights and web check-in.
+</a:t>
+            </a:r>
+            <a:pPr indent="0" marL="0">
+              <a:buNone/>
+            </a:pPr>
+            <a:r>
+              <a:rPr lang="en-US" sz="1000" b="1" dirty="0">
+                <a:solidFill>
+                  <a:srgbClr val="FFFFFF"/>
+                </a:solidFill>
+                <a:latin typeface="Calibri" pitchFamily="34" charset="0"/>
+                <a:ea typeface="Calibri" pitchFamily="34" charset="-122"/>
+                <a:cs typeface="Calibri" pitchFamily="34" charset="-120"/>
+              </a:rPr>
+              <a:t>• Architecture: </a:t>
+            </a:r>
+            <a:pPr indent="0" marL="0">
+              <a:buNone/>
+            </a:pPr>
+            <a:r>
+              <a:rPr lang="en-US" sz="1000" dirty="0">
+                <a:solidFill>
+                  <a:srgbClr val="E4E4E7"/>
+                </a:solidFill>
+                <a:latin typeface="Calibri" pitchFamily="34" charset="0"/>
+                <a:ea typeface="Calibri" pitchFamily="34" charset="-122"/>
+                <a:cs typeface="Calibri" pitchFamily="34" charset="-120"/>
+              </a:rPr>
+              <a:t>Microservices Architecture (Modular &amp; Independent Services).
+</a:t>
+            </a:r>
+            <a:pPr indent="0" marL="0">
+              <a:buNone/>
+            </a:pPr>
+            <a:r>
+              <a:rPr lang="en-US" sz="1000" b="1" dirty="0">
+                <a:solidFill>
+                  <a:srgbClr val="FFFFFF"/>
+                </a:solidFill>
+                <a:latin typeface="Calibri" pitchFamily="34" charset="0"/>
+                <a:ea typeface="Calibri" pitchFamily="34" charset="-122"/>
+                <a:cs typeface="Calibri" pitchFamily="34" charset="-120"/>
+              </a:rPr>
+              <a:t>• Technologies: </a:t>
+            </a:r>
+            <a:pPr indent="0" marL="0">
+              <a:buNone/>
+            </a:pPr>
+            <a:r>
+              <a:rPr lang="en-US" sz="1000" dirty="0">
+                <a:solidFill>
+                  <a:srgbClr val="E4E4E7"/>
+                </a:solidFill>
+                <a:latin typeface="Calibri" pitchFamily="34" charset="0"/>
+                <a:ea typeface="Calibri" pitchFamily="34" charset="-122"/>
+                <a:cs typeface="Calibri" pitchFamily="34" charset="-120"/>
+              </a:rPr>
+              <a:t>Java 17, Spring Boot, MySQL Database, REST APIs, Docker.
+</a:t>
+            </a:r>
+            <a:pPr indent="0" marL="0">
+              <a:buNone/>
+            </a:pPr>
+            <a:r>
+              <a:rPr lang="en-US" sz="1000" b="1" dirty="0">
+                <a:solidFill>
+                  <a:srgbClr val="FFFFFF"/>
+                </a:solidFill>
+                <a:latin typeface="Calibri" pitchFamily="34" charset="0"/>
+                <a:ea typeface="Calibri" pitchFamily="34" charset="-122"/>
+                <a:cs typeface="Calibri" pitchFamily="34" charset="-120"/>
+              </a:rPr>
+              <a:t>• Key Goal: </a:t>
+            </a:r>
+            <a:pPr indent="0" marL="0">
+              <a:buNone/>
+            </a:pPr>
+            <a:r>
+              <a:rPr lang="en-US" sz="1000" dirty="0">
+                <a:solidFill>
+                  <a:srgbClr val="E4E4E7"/>
+                </a:solidFill>
+                <a:latin typeface="Calibri" pitchFamily="34" charset="0"/>
+                <a:ea typeface="Calibri" pitchFamily="34" charset="-122"/>
+                <a:cs typeface="Calibri" pitchFamily="34" charset="-120"/>
+              </a:rPr>
+              <a:t>Fast, secure flight reservations with zero double-booking.</a:t>
             </a:r>
             <a:endParaRPr lang="en-US" sz="1000" dirty="0"/>
           </a:p>
@@ -1776,206 +1930,26 @@
       </p:sp>
       <p:sp>
         <p:nvSpPr>
-          <p:cNvPr id="16" name="Text 14"/>
-          <p:cNvSpPr/>
-          <p:nvPr/>
-        </p:nvSpPr>
-        <p:spPr>
-          <a:xfrm>
-            <a:off x="4617720" y="3794760"/>
-            <a:ext cx="2971800" cy="228600"/>
-          </a:xfrm>
-          <a:prstGeom prst="rect">
-            <a:avLst/>
-          </a:prstGeom>
-          <a:noFill/>
-          <a:ln/>
-        </p:spPr>
-        <p:txBody>
-          <a:bodyPr wrap="square" rtlCol="0" anchor="ctr"/>
-          <a:lstStyle/>
-          <a:p>
-            <a:pPr indent="0" marL="0">
-              <a:buNone/>
-            </a:pPr>
-            <a:r>
-              <a:rPr lang="en-US" sz="900" dirty="0">
-                <a:solidFill>
-                  <a:srgbClr val="A1A1AA"/>
-                </a:solidFill>
-                <a:latin typeface="Calibri" pitchFamily="34" charset="0"/>
-                <a:ea typeface="Calibri" pitchFamily="34" charset="-122"/>
-                <a:cs typeface="Calibri" pitchFamily="34" charset="-120"/>
-              </a:rPr>
-              <a:t>Project Mentor / Guide:</a:t>
-            </a:r>
-            <a:endParaRPr lang="en-US" sz="900" dirty="0"/>
-          </a:p>
-        </p:txBody>
-      </p:sp>
-      <p:sp>
-        <p:nvSpPr>
-          <p:cNvPr id="17" name="Text 15"/>
-          <p:cNvSpPr/>
-          <p:nvPr/>
-        </p:nvSpPr>
-        <p:spPr>
-          <a:xfrm>
-            <a:off x="4617720" y="4023360"/>
-            <a:ext cx="2971800" cy="365760"/>
-          </a:xfrm>
-          <a:prstGeom prst="rect">
-            <a:avLst/>
-          </a:prstGeom>
-          <a:noFill/>
-          <a:ln/>
-        </p:spPr>
-        <p:txBody>
-          <a:bodyPr wrap="square" rtlCol="0" anchor="ctr"/>
-          <a:lstStyle/>
-          <a:p>
-            <a:pPr indent="0" marL="0">
-              <a:buNone/>
-            </a:pPr>
-            <a:r>
-              <a:rPr lang="en-US" sz="1500" b="1" dirty="0">
-                <a:solidFill>
-                  <a:srgbClr val="FFFFFF"/>
-                </a:solidFill>
-                <a:latin typeface="Calibri" pitchFamily="34" charset="0"/>
-                <a:ea typeface="Calibri" pitchFamily="34" charset="-122"/>
-                <a:cs typeface="Calibri" pitchFamily="34" charset="-120"/>
-              </a:rPr>
-              <a:t>Prof. / Dr. Project Mentor</a:t>
-            </a:r>
-            <a:endParaRPr lang="en-US" sz="1500" dirty="0"/>
-          </a:p>
-        </p:txBody>
-      </p:sp>
-      <p:sp>
-        <p:nvSpPr>
-          <p:cNvPr id="18" name="Text 16"/>
-          <p:cNvSpPr/>
-          <p:nvPr/>
-        </p:nvSpPr>
-        <p:spPr>
-          <a:xfrm>
-            <a:off x="4617720" y="4480560"/>
-            <a:ext cx="2971800" cy="1371600"/>
-          </a:xfrm>
-          <a:prstGeom prst="rect">
-            <a:avLst/>
-          </a:prstGeom>
-          <a:noFill/>
-          <a:ln/>
-        </p:spPr>
-        <p:txBody>
-          <a:bodyPr wrap="square" rtlCol="0" anchor="ctr"/>
-          <a:lstStyle/>
-          <a:p>
-            <a:pPr indent="0" marL="0">
-              <a:lnSpc>
-                <a:spcPct val="120000"/>
-              </a:lnSpc>
-              <a:buNone/>
-            </a:pPr>
-            <a:r>
-              <a:rPr lang="en-US" sz="950" dirty="0">
-                <a:solidFill>
-                  <a:srgbClr val="E4E4E7"/>
-                </a:solidFill>
-                <a:latin typeface="Calibri" pitchFamily="34" charset="0"/>
-                <a:ea typeface="Calibri" pitchFamily="34" charset="-122"/>
-                <a:cs typeface="Calibri" pitchFamily="34" charset="-120"/>
-              </a:rPr>
-              <a:t>Professor &amp; Technical Guide</a:t>
-            </a:r>
-            <a:endParaRPr lang="en-US" sz="950" dirty="0"/>
-          </a:p>
-          <a:p>
-            <a:pPr indent="0" marL="0">
-              <a:lnSpc>
-                <a:spcPct val="120000"/>
-              </a:lnSpc>
-              <a:buNone/>
-            </a:pPr>
-            <a:r>
-              <a:rPr lang="en-US" sz="950" dirty="0">
-                <a:solidFill>
-                  <a:srgbClr val="E4E4E7"/>
-                </a:solidFill>
-                <a:latin typeface="Calibri" pitchFamily="34" charset="0"/>
-                <a:ea typeface="Calibri" pitchFamily="34" charset="-122"/>
-                <a:cs typeface="Calibri" pitchFamily="34" charset="-120"/>
-              </a:rPr>
-              <a:t>Department of Computer Science &amp; Engineering</a:t>
-            </a:r>
-            <a:endParaRPr lang="en-US" sz="950" dirty="0"/>
-          </a:p>
-          <a:p>
-            <a:pPr indent="0" marL="0">
-              <a:lnSpc>
-                <a:spcPct val="120000"/>
-              </a:lnSpc>
-              <a:buNone/>
-            </a:pPr>
-            <a:r>
-              <a:rPr lang="en-US" sz="950" dirty="0">
-                <a:solidFill>
-                  <a:srgbClr val="E4E4E7"/>
-                </a:solidFill>
-                <a:latin typeface="Calibri" pitchFamily="34" charset="0"/>
-                <a:ea typeface="Calibri" pitchFamily="34" charset="-122"/>
-                <a:cs typeface="Calibri" pitchFamily="34" charset="-120"/>
-              </a:rPr>
-              <a:t>Expertise: Enterprise Software Architecture,</a:t>
-            </a:r>
-            <a:endParaRPr lang="en-US" sz="950" dirty="0"/>
-          </a:p>
-          <a:p>
-            <a:pPr indent="0" marL="0">
-              <a:lnSpc>
-                <a:spcPct val="120000"/>
-              </a:lnSpc>
-              <a:buNone/>
-            </a:pPr>
-            <a:r>
-              <a:rPr lang="en-US" sz="950" dirty="0">
-                <a:solidFill>
-                  <a:srgbClr val="E4E4E7"/>
-                </a:solidFill>
-                <a:latin typeface="Calibri" pitchFamily="34" charset="0"/>
-                <a:ea typeface="Calibri" pitchFamily="34" charset="-122"/>
-                <a:cs typeface="Calibri" pitchFamily="34" charset="-120"/>
-              </a:rPr>
-              <a:t>Microservices &amp; Distributed Database Systems</a:t>
-            </a:r>
-            <a:endParaRPr lang="en-US" sz="950" dirty="0"/>
-          </a:p>
-        </p:txBody>
-      </p:sp>
-      <p:sp>
-        <p:nvSpPr>
-          <p:cNvPr id="19" name="Shape 17"/>
-          <p:cNvSpPr/>
-          <p:nvPr/>
-        </p:nvSpPr>
-        <p:spPr>
-          <a:xfrm>
-            <a:off x="8138160" y="3246120"/>
-            <a:ext cx="3337560" cy="2926080"/>
+          <p:cNvPr id="17" name="Shape 15"/>
+          <p:cNvSpPr/>
+          <p:nvPr/>
+        </p:nvSpPr>
+        <p:spPr>
+          <a:xfrm>
+            <a:off x="731520" y="5852160"/>
+            <a:ext cx="1417320" cy="320040"/>
           </a:xfrm>
           <a:prstGeom prst="roundRect">
             <a:avLst>
-              <a:gd name="adj" fmla="val 3125"/>
+              <a:gd name="adj" fmla="val 17143"/>
             </a:avLst>
           </a:prstGeom>
           <a:solidFill>
-            <a:srgbClr val="18181B"/>
+            <a:srgbClr val="111116"/>
           </a:solidFill>
-          <a:ln w="19050">
+          <a:ln w="10160">
             <a:solidFill>
-              <a:srgbClr val="C084FC"/>
+              <a:srgbClr val="27272A"/>
             </a:solidFill>
             <a:prstDash val="solid"/>
           </a:ln>
@@ -1983,14 +1957,80 @@
       </p:sp>
       <p:sp>
         <p:nvSpPr>
+          <p:cNvPr id="18" name="Text 16"/>
+          <p:cNvSpPr/>
+          <p:nvPr/>
+        </p:nvSpPr>
+        <p:spPr>
+          <a:xfrm>
+            <a:off x="731520" y="5852160"/>
+            <a:ext cx="1417320" cy="320040"/>
+          </a:xfrm>
+          <a:prstGeom prst="rect">
+            <a:avLst/>
+          </a:prstGeom>
+          <a:noFill/>
+          <a:ln/>
+        </p:spPr>
+        <p:txBody>
+          <a:bodyPr wrap="square" rtlCol="0" anchor="ctr"/>
+          <a:lstStyle/>
+          <a:p>
+            <a:pPr algn="ctr" indent="0" marL="0">
+              <a:buNone/>
+            </a:pPr>
+            <a:r>
+              <a:rPr lang="en-US" sz="850" b="1" dirty="0">
+                <a:solidFill>
+                  <a:srgbClr val="E4E4E7"/>
+                </a:solidFill>
+                <a:latin typeface="Calibri" pitchFamily="34" charset="0"/>
+                <a:ea typeface="Calibri" pitchFamily="34" charset="-122"/>
+                <a:cs typeface="Calibri" pitchFamily="34" charset="-120"/>
+              </a:rPr>
+              <a:t>Java 17</a:t>
+            </a:r>
+            <a:endParaRPr lang="en-US" sz="850" dirty="0"/>
+          </a:p>
+        </p:txBody>
+      </p:sp>
+      <p:sp>
+        <p:nvSpPr>
+          <p:cNvPr id="19" name="Shape 17"/>
+          <p:cNvSpPr/>
+          <p:nvPr/>
+        </p:nvSpPr>
+        <p:spPr>
+          <a:xfrm>
+            <a:off x="2286000" y="5852160"/>
+            <a:ext cx="1417320" cy="320040"/>
+          </a:xfrm>
+          <a:prstGeom prst="roundRect">
+            <a:avLst>
+              <a:gd name="adj" fmla="val 17143"/>
+            </a:avLst>
+          </a:prstGeom>
+          <a:solidFill>
+            <a:srgbClr val="111116"/>
+          </a:solidFill>
+          <a:ln w="10160">
+            <a:solidFill>
+              <a:srgbClr val="27272A"/>
+            </a:solidFill>
+            <a:prstDash val="solid"/>
+          </a:ln>
+        </p:spPr>
+      </p:sp>
+      <p:sp>
+        <p:nvSpPr>
           <p:cNvPr id="20" name="Text 18"/>
           <p:cNvSpPr/>
           <p:nvPr/>
         </p:nvSpPr>
         <p:spPr>
           <a:xfrm>
-            <a:off x="8321040" y="3429000"/>
-            <a:ext cx="2971800" cy="274320"/>
+            <a:off x="2286000" y="5852160"/>
+            <a:ext cx="1417320" cy="320040"/>
           </a:xfrm>
           <a:prstGeom prst="rect">
             <a:avLst/>
@@ -2002,34 +2042,61 @@
           <a:bodyPr wrap="square" rtlCol="0" anchor="ctr"/>
           <a:lstStyle/>
           <a:p>
-            <a:pPr indent="0" marL="0">
-              <a:buNone/>
-            </a:pPr>
-            <a:r>
-              <a:rPr lang="en-US" sz="1000" b="1" dirty="0">
-                <a:solidFill>
-                  <a:srgbClr val="C084FC"/>
-                </a:solidFill>
-                <a:latin typeface="Calibri" pitchFamily="34" charset="0"/>
-                <a:ea typeface="Calibri" pitchFamily="34" charset="-122"/>
-                <a:cs typeface="Calibri" pitchFamily="34" charset="-120"/>
-              </a:rPr>
-              <a:t>PLATFORM SPECIFICATIONS</a:t>
-            </a:r>
-            <a:endParaRPr lang="en-US" sz="1000" dirty="0"/>
-          </a:p>
-        </p:txBody>
-      </p:sp>
-      <p:sp>
-        <p:nvSpPr>
-          <p:cNvPr id="21" name="Text 19"/>
-          <p:cNvSpPr/>
-          <p:nvPr/>
-        </p:nvSpPr>
-        <p:spPr>
-          <a:xfrm>
-            <a:off x="8321040" y="3794760"/>
-            <a:ext cx="2971800" cy="228600"/>
+            <a:pPr algn="ctr" indent="0" marL="0">
+              <a:buNone/>
+            </a:pPr>
+            <a:r>
+              <a:rPr lang="en-US" sz="850" b="1" dirty="0">
+                <a:solidFill>
+                  <a:srgbClr val="E4E4E7"/>
+                </a:solidFill>
+                <a:latin typeface="Calibri" pitchFamily="34" charset="0"/>
+                <a:ea typeface="Calibri" pitchFamily="34" charset="-122"/>
+                <a:cs typeface="Calibri" pitchFamily="34" charset="-120"/>
+              </a:rPr>
+              <a:t>Spring Boot</a:t>
+            </a:r>
+            <a:endParaRPr lang="en-US" sz="850" dirty="0"/>
+          </a:p>
+        </p:txBody>
+      </p:sp>
+      <p:sp>
+        <p:nvSpPr>
+          <p:cNvPr id="21" name="Shape 19"/>
+          <p:cNvSpPr/>
+          <p:nvPr/>
+        </p:nvSpPr>
+        <p:spPr>
+          <a:xfrm>
+            <a:off x="3840480" y="5852160"/>
+            <a:ext cx="1417320" cy="320040"/>
+          </a:xfrm>
+          <a:prstGeom prst="roundRect">
+            <a:avLst>
+              <a:gd name="adj" fmla="val 17143"/>
+            </a:avLst>
+          </a:prstGeom>
+          <a:solidFill>
+            <a:srgbClr val="111116"/>
+          </a:solidFill>
+          <a:ln w="10160">
+            <a:solidFill>
+              <a:srgbClr val="27272A"/>
+            </a:solidFill>
+            <a:prstDash val="solid"/>
+          </a:ln>
+        </p:spPr>
+      </p:sp>
+      <p:sp>
+        <p:nvSpPr>
+          <p:cNvPr id="22" name="Text 20"/>
+          <p:cNvSpPr/>
+          <p:nvPr/>
+        </p:nvSpPr>
+        <p:spPr>
+          <a:xfrm>
+            <a:off x="3840480" y="5852160"/>
+            <a:ext cx="1417320" cy="320040"/>
           </a:xfrm>
           <a:prstGeom prst="rect">
             <a:avLst/>
@@ -2041,34 +2108,61 @@
           <a:bodyPr wrap="square" rtlCol="0" anchor="ctr"/>
           <a:lstStyle/>
           <a:p>
-            <a:pPr indent="0" marL="0">
-              <a:buNone/>
-            </a:pPr>
-            <a:r>
-              <a:rPr lang="en-US" sz="900" dirty="0">
-                <a:solidFill>
-                  <a:srgbClr val="A1A1AA"/>
-                </a:solidFill>
-                <a:latin typeface="Calibri" pitchFamily="34" charset="0"/>
-                <a:ea typeface="Calibri" pitchFamily="34" charset="-122"/>
-                <a:cs typeface="Calibri" pitchFamily="34" charset="-120"/>
-              </a:rPr>
-              <a:t>Architectural Foundation:</a:t>
-            </a:r>
-            <a:endParaRPr lang="en-US" sz="900" dirty="0"/>
-          </a:p>
-        </p:txBody>
-      </p:sp>
-      <p:sp>
-        <p:nvSpPr>
-          <p:cNvPr id="22" name="Text 20"/>
-          <p:cNvSpPr/>
-          <p:nvPr/>
-        </p:nvSpPr>
-        <p:spPr>
-          <a:xfrm>
-            <a:off x="8321040" y="4023360"/>
-            <a:ext cx="2971800" cy="365760"/>
+            <a:pPr algn="ctr" indent="0" marL="0">
+              <a:buNone/>
+            </a:pPr>
+            <a:r>
+              <a:rPr lang="en-US" sz="850" b="1" dirty="0">
+                <a:solidFill>
+                  <a:srgbClr val="E4E4E7"/>
+                </a:solidFill>
+                <a:latin typeface="Calibri" pitchFamily="34" charset="0"/>
+                <a:ea typeface="Calibri" pitchFamily="34" charset="-122"/>
+                <a:cs typeface="Calibri" pitchFamily="34" charset="-120"/>
+              </a:rPr>
+              <a:t>Microservices</a:t>
+            </a:r>
+            <a:endParaRPr lang="en-US" sz="850" dirty="0"/>
+          </a:p>
+        </p:txBody>
+      </p:sp>
+      <p:sp>
+        <p:nvSpPr>
+          <p:cNvPr id="23" name="Shape 21"/>
+          <p:cNvSpPr/>
+          <p:nvPr/>
+        </p:nvSpPr>
+        <p:spPr>
+          <a:xfrm>
+            <a:off x="5394960" y="5852160"/>
+            <a:ext cx="1417320" cy="320040"/>
+          </a:xfrm>
+          <a:prstGeom prst="roundRect">
+            <a:avLst>
+              <a:gd name="adj" fmla="val 17143"/>
+            </a:avLst>
+          </a:prstGeom>
+          <a:solidFill>
+            <a:srgbClr val="111116"/>
+          </a:solidFill>
+          <a:ln w="10160">
+            <a:solidFill>
+              <a:srgbClr val="27272A"/>
+            </a:solidFill>
+            <a:prstDash val="solid"/>
+          </a:ln>
+        </p:spPr>
+      </p:sp>
+      <p:sp>
+        <p:nvSpPr>
+          <p:cNvPr id="24" name="Text 22"/>
+          <p:cNvSpPr/>
+          <p:nvPr/>
+        </p:nvSpPr>
+        <p:spPr>
+          <a:xfrm>
+            <a:off x="5394960" y="5852160"/>
+            <a:ext cx="1417320" cy="320040"/>
           </a:xfrm>
           <a:prstGeom prst="rect">
             <a:avLst/>
@@ -2080,34 +2174,61 @@
           <a:bodyPr wrap="square" rtlCol="0" anchor="ctr"/>
           <a:lstStyle/>
           <a:p>
-            <a:pPr indent="0" marL="0">
-              <a:buNone/>
-            </a:pPr>
-            <a:r>
-              <a:rPr lang="en-US" sz="1300" b="1" dirty="0">
-                <a:solidFill>
-                  <a:srgbClr val="FFFFFF"/>
-                </a:solidFill>
-                <a:latin typeface="Calibri" pitchFamily="34" charset="0"/>
-                <a:ea typeface="Calibri" pitchFamily="34" charset="-122"/>
-                <a:cs typeface="Calibri" pitchFamily="34" charset="-120"/>
-              </a:rPr>
-              <a:t>Microservices + AMQP Event Broker</a:t>
-            </a:r>
-            <a:endParaRPr lang="en-US" sz="1300" dirty="0"/>
-          </a:p>
-        </p:txBody>
-      </p:sp>
-      <p:sp>
-        <p:nvSpPr>
-          <p:cNvPr id="23" name="Text 21"/>
-          <p:cNvSpPr/>
-          <p:nvPr/>
-        </p:nvSpPr>
-        <p:spPr>
-          <a:xfrm>
-            <a:off x="8321040" y="4480560"/>
-            <a:ext cx="2971800" cy="1463040"/>
+            <a:pPr algn="ctr" indent="0" marL="0">
+              <a:buNone/>
+            </a:pPr>
+            <a:r>
+              <a:rPr lang="en-US" sz="850" b="1" dirty="0">
+                <a:solidFill>
+                  <a:srgbClr val="E4E4E7"/>
+                </a:solidFill>
+                <a:latin typeface="Calibri" pitchFamily="34" charset="0"/>
+                <a:ea typeface="Calibri" pitchFamily="34" charset="-122"/>
+                <a:cs typeface="Calibri" pitchFamily="34" charset="-120"/>
+              </a:rPr>
+              <a:t>Spring Cloud</a:t>
+            </a:r>
+            <a:endParaRPr lang="en-US" sz="850" dirty="0"/>
+          </a:p>
+        </p:txBody>
+      </p:sp>
+      <p:sp>
+        <p:nvSpPr>
+          <p:cNvPr id="25" name="Shape 23"/>
+          <p:cNvSpPr/>
+          <p:nvPr/>
+        </p:nvSpPr>
+        <p:spPr>
+          <a:xfrm>
+            <a:off x="6949440" y="5852160"/>
+            <a:ext cx="1417320" cy="320040"/>
+          </a:xfrm>
+          <a:prstGeom prst="roundRect">
+            <a:avLst>
+              <a:gd name="adj" fmla="val 17143"/>
+            </a:avLst>
+          </a:prstGeom>
+          <a:solidFill>
+            <a:srgbClr val="111116"/>
+          </a:solidFill>
+          <a:ln w="10160">
+            <a:solidFill>
+              <a:srgbClr val="27272A"/>
+            </a:solidFill>
+            <a:prstDash val="solid"/>
+          </a:ln>
+        </p:spPr>
+      </p:sp>
+      <p:sp>
+        <p:nvSpPr>
+          <p:cNvPr id="26" name="Text 24"/>
+          <p:cNvSpPr/>
+          <p:nvPr/>
+        </p:nvSpPr>
+        <p:spPr>
+          <a:xfrm>
+            <a:off x="6949440" y="5852160"/>
+            <a:ext cx="1417320" cy="320040"/>
           </a:xfrm>
           <a:prstGeom prst="rect">
             <a:avLst/>
@@ -2119,14 +2240,11 @@
           <a:bodyPr wrap="square" rtlCol="0" anchor="ctr"/>
           <a:lstStyle/>
           <a:p>
-            <a:pPr indent="0" marL="0">
-              <a:lnSpc>
-                <a:spcPct val="115000"/>
-              </a:lnSpc>
-              <a:buNone/>
-            </a:pPr>
-            <a:r>
-              <a:rPr lang="en-US" sz="850" dirty="0">
+            <a:pPr algn="ctr" indent="0" marL="0">
+              <a:buNone/>
+            </a:pPr>
+            <a:r>
+              <a:rPr lang="en-US" sz="850" b="1" dirty="0">
                 <a:solidFill>
                   <a:srgbClr val="E4E4E7"/>
                 </a:solidFill>
@@ -2134,19 +2252,65 @@
                 <a:ea typeface="Calibri" pitchFamily="34" charset="-122"/>
                 <a:cs typeface="Calibri" pitchFamily="34" charset="-120"/>
               </a:rPr>
-              <a:t>• Framework: Spring Boot 3.2 &amp; Spring Cloud</a:t>
+              <a:t>MySQL</a:t>
             </a:r>
             <a:endParaRPr lang="en-US" sz="850" dirty="0"/>
           </a:p>
-          <a:p>
-            <a:pPr indent="0" marL="0">
-              <a:lnSpc>
-                <a:spcPct val="115000"/>
-              </a:lnSpc>
-              <a:buNone/>
-            </a:pPr>
-            <a:r>
-              <a:rPr lang="en-US" sz="850" dirty="0">
+        </p:txBody>
+      </p:sp>
+      <p:sp>
+        <p:nvSpPr>
+          <p:cNvPr id="27" name="Shape 25"/>
+          <p:cNvSpPr/>
+          <p:nvPr/>
+        </p:nvSpPr>
+        <p:spPr>
+          <a:xfrm>
+            <a:off x="8503920" y="5852160"/>
+            <a:ext cx="1417320" cy="320040"/>
+          </a:xfrm>
+          <a:prstGeom prst="roundRect">
+            <a:avLst>
+              <a:gd name="adj" fmla="val 17143"/>
+            </a:avLst>
+          </a:prstGeom>
+          <a:solidFill>
+            <a:srgbClr val="111116"/>
+          </a:solidFill>
+          <a:ln w="10160">
+            <a:solidFill>
+              <a:srgbClr val="27272A"/>
+            </a:solidFill>
+            <a:prstDash val="solid"/>
+          </a:ln>
+        </p:spPr>
+      </p:sp>
+      <p:sp>
+        <p:nvSpPr>
+          <p:cNvPr id="28" name="Text 26"/>
+          <p:cNvSpPr/>
+          <p:nvPr/>
+        </p:nvSpPr>
+        <p:spPr>
+          <a:xfrm>
+            <a:off x="8503920" y="5852160"/>
+            <a:ext cx="1417320" cy="320040"/>
+          </a:xfrm>
+          <a:prstGeom prst="rect">
+            <a:avLst/>
+          </a:prstGeom>
+          <a:noFill/>
+          <a:ln/>
+        </p:spPr>
+        <p:txBody>
+          <a:bodyPr wrap="square" rtlCol="0" anchor="ctr"/>
+          <a:lstStyle/>
+          <a:p>
+            <a:pPr algn="ctr" indent="0" marL="0">
+              <a:buNone/>
+            </a:pPr>
+            <a:r>
+              <a:rPr lang="en-US" sz="850" b="1" dirty="0">
                 <a:solidFill>
                   <a:srgbClr val="E4E4E7"/>
                 </a:solidFill>
@@ -2154,19 +2318,65 @@
                 <a:ea typeface="Calibri" pitchFamily="34" charset="-122"/>
                 <a:cs typeface="Calibri" pitchFamily="34" charset="-120"/>
               </a:rPr>
-              <a:t>• Routing: Spring Cloud Gateway (Netty WebFlux)</a:t>
+              <a:t>REST API</a:t>
             </a:r>
             <a:endParaRPr lang="en-US" sz="850" dirty="0"/>
           </a:p>
-          <a:p>
-            <a:pPr indent="0" marL="0">
-              <a:lnSpc>
-                <a:spcPct val="115000"/>
-              </a:lnSpc>
-              <a:buNone/>
-            </a:pPr>
-            <a:r>
-              <a:rPr lang="en-US" sz="850" dirty="0">
+        </p:txBody>
+      </p:sp>
+      <p:sp>
+        <p:nvSpPr>
+          <p:cNvPr id="29" name="Shape 27"/>
+          <p:cNvSpPr/>
+          <p:nvPr/>
+        </p:nvSpPr>
+        <p:spPr>
+          <a:xfrm>
+            <a:off x="10058400" y="5852160"/>
+            <a:ext cx="1417320" cy="320040"/>
+          </a:xfrm>
+          <a:prstGeom prst="roundRect">
+            <a:avLst>
+              <a:gd name="adj" fmla="val 17143"/>
+            </a:avLst>
+          </a:prstGeom>
+          <a:solidFill>
+            <a:srgbClr val="111116"/>
+          </a:solidFill>
+          <a:ln w="10160">
+            <a:solidFill>
+              <a:srgbClr val="27272A"/>
+            </a:solidFill>
+            <a:prstDash val="solid"/>
+          </a:ln>
+        </p:spPr>
+      </p:sp>
+      <p:sp>
+        <p:nvSpPr>
+          <p:cNvPr id="30" name="Text 28"/>
+          <p:cNvSpPr/>
+          <p:nvPr/>
+        </p:nvSpPr>
+        <p:spPr>
+          <a:xfrm>
+            <a:off x="10058400" y="5852160"/>
+            <a:ext cx="1417320" cy="320040"/>
+          </a:xfrm>
+          <a:prstGeom prst="rect">
+            <a:avLst/>
+          </a:prstGeom>
+          <a:noFill/>
+          <a:ln/>
+        </p:spPr>
+        <p:txBody>
+          <a:bodyPr wrap="square" rtlCol="0" anchor="ctr"/>
+          <a:lstStyle/>
+          <a:p>
+            <a:pPr algn="ctr" indent="0" marL="0">
+              <a:buNone/>
+            </a:pPr>
+            <a:r>
+              <a:rPr lang="en-US" sz="850" b="1" dirty="0">
                 <a:solidFill>
                   <a:srgbClr val="E4E4E7"/>
                 </a:solidFill>
@@ -2174,67 +2384,7 @@
                 <a:ea typeface="Calibri" pitchFamily="34" charset="-122"/>
                 <a:cs typeface="Calibri" pitchFamily="34" charset="-120"/>
               </a:rPr>
-              <a:t>• Discovery: Netflix Eureka Registry (Port 8761)</a:t>
-            </a:r>
-            <a:endParaRPr lang="en-US" sz="850" dirty="0"/>
-          </a:p>
-          <a:p>
-            <a:pPr indent="0" marL="0">
-              <a:lnSpc>
-                <a:spcPct val="115000"/>
-              </a:lnSpc>
-              <a:buNone/>
-            </a:pPr>
-            <a:r>
-              <a:rPr lang="en-US" sz="850" dirty="0">
-                <a:solidFill>
-                  <a:srgbClr val="E4E4E7"/>
-                </a:solidFill>
-                <a:latin typeface="Calibri" pitchFamily="34" charset="0"/>
-                <a:ea typeface="Calibri" pitchFamily="34" charset="-122"/>
-                <a:cs typeface="Calibri" pitchFamily="34" charset="-120"/>
-              </a:rPr>
-              <a:t>• Storage: Database-per-Service (6x MySQL 8.0)</a:t>
-            </a:r>
-            <a:endParaRPr lang="en-US" sz="850" dirty="0"/>
-          </a:p>
-          <a:p>
-            <a:pPr indent="0" marL="0">
-              <a:lnSpc>
-                <a:spcPct val="115000"/>
-              </a:lnSpc>
-              <a:buNone/>
-            </a:pPr>
-            <a:r>
-              <a:rPr lang="en-US" sz="850" dirty="0">
-                <a:solidFill>
-                  <a:srgbClr val="E4E4E7"/>
-                </a:solidFill>
-                <a:latin typeface="Calibri" pitchFamily="34" charset="0"/>
-                <a:ea typeface="Calibri" pitchFamily="34" charset="-122"/>
-                <a:cs typeface="Calibri" pitchFamily="34" charset="-120"/>
-              </a:rPr>
-              <a:t>• Messaging: RabbitMQ Message Broker (Port 5672)</a:t>
-            </a:r>
-            <a:endParaRPr lang="en-US" sz="850" dirty="0"/>
-          </a:p>
-          <a:p>
-            <a:pPr indent="0" marL="0">
-              <a:lnSpc>
-                <a:spcPct val="115000"/>
-              </a:lnSpc>
-              <a:buNone/>
-            </a:pPr>
-            <a:r>
-              <a:rPr lang="en-US" sz="850" dirty="0">
-                <a:solidFill>
-                  <a:srgbClr val="E4E4E7"/>
-                </a:solidFill>
-                <a:latin typeface="Calibri" pitchFamily="34" charset="0"/>
-                <a:ea typeface="Calibri" pitchFamily="34" charset="-122"/>
-                <a:cs typeface="Calibri" pitchFamily="34" charset="-120"/>
-              </a:rPr>
-              <a:t>• Security: Stateless JWT (HMAC-SHA256)</a:t>
+              <a:t>Docker</a:t>
             </a:r>
             <a:endParaRPr lang="en-US" sz="850" dirty="0"/>
           </a:p>
@@ -2306,7 +2456,7 @@
         <p:spPr>
           <a:xfrm>
             <a:off x="548640" y="411480"/>
-            <a:ext cx="2377440" cy="320040"/>
+            <a:ext cx="2286000" cy="320040"/>
           </a:xfrm>
           <a:prstGeom prst="roundRect">
             <a:avLst>
@@ -2333,7 +2483,7 @@
         <p:spPr>
           <a:xfrm>
             <a:off x="548640" y="411480"/>
-            <a:ext cx="2377440" cy="320040"/>
+            <a:ext cx="2286000" cy="320040"/>
           </a:xfrm>
           <a:prstGeom prst="rect">
             <a:avLst/>
@@ -2357,7 +2507,7 @@
                 <a:ea typeface="Calibri" pitchFamily="34" charset="-122"/>
                 <a:cs typeface="Calibri" pitchFamily="34" charset="-120"/>
               </a:rPr>
-              <a:t>PROBLEM &amp; SOLUTION</a:t>
+              <a:t>PROJECT OVERVIEW</a:t>
             </a:r>
             <a:endParaRPr lang="en-US" sz="900" dirty="0"/>
           </a:p>
@@ -2372,7 +2522,7 @@
         <p:spPr>
           <a:xfrm>
             <a:off x="548640" y="822960"/>
-            <a:ext cx="10515600" cy="594360"/>
+            <a:ext cx="10515600" cy="548640"/>
           </a:xfrm>
           <a:prstGeom prst="rect">
             <a:avLst/>
@@ -2396,7 +2546,7 @@
                 <a:ea typeface="Calibri" pitchFamily="34" charset="-122"/>
                 <a:cs typeface="Calibri" pitchFamily="34" charset="-120"/>
               </a:rPr>
-              <a:t>Project Motivation, Problem Statement &amp; Overview</a:t>
+              <a:t>Why Microservices Instead of One Big App?</a:t>
             </a:r>
             <a:endParaRPr lang="en-US" sz="2200" dirty="0"/>
           </a:p>
@@ -2429,13 +2579,13 @@
             <a:r>
               <a:rPr lang="en-US" sz="1100" dirty="0">
                 <a:solidFill>
-                  <a:srgbClr val="A1A1AA"/>
-                </a:solidFill>
-                <a:latin typeface="Calibri" pitchFamily="34" charset="0"/>
-                <a:ea typeface="Calibri" pitchFamily="34" charset="-122"/>
-                <a:cs typeface="Calibri" pitchFamily="34" charset="-120"/>
-              </a:rPr>
-              <a:t>Addressing the vulnerabilities of monolithic airline reservation architectures with cloud-native resilience</a:t>
+                  <a:srgbClr val="38BDF8"/>
+                </a:solidFill>
+                <a:latin typeface="Calibri" pitchFamily="34" charset="0"/>
+                <a:ea typeface="Calibri" pitchFamily="34" charset="-122"/>
+                <a:cs typeface="Calibri" pitchFamily="34" charset="-120"/>
+              </a:rPr>
+              <a:t>Easy Comparison Between Traditional Monolithic Systems and AeroBook Microservices</a:t>
             </a:r>
             <a:endParaRPr lang="en-US" sz="1100" dirty="0"/>
           </a:p>
@@ -2472,20 +2622,20 @@
         </p:nvSpPr>
         <p:spPr>
           <a:xfrm>
-            <a:off x="731520" y="1965960"/>
-            <a:ext cx="5257800" cy="2057400"/>
+            <a:off x="548640" y="1965960"/>
+            <a:ext cx="5303520" cy="4206240"/>
           </a:xfrm>
           <a:prstGeom prst="roundRect">
             <a:avLst>
-              <a:gd name="adj" fmla="val 4444"/>
+              <a:gd name="adj" fmla="val 2609"/>
             </a:avLst>
           </a:prstGeom>
           <a:solidFill>
             <a:srgbClr val="18181B"/>
           </a:solidFill>
-          <a:ln w="19050">
+          <a:ln w="12700">
             <a:solidFill>
-              <a:srgbClr val="EF4444"/>
+              <a:srgbClr val="3F3F46"/>
             </a:solidFill>
             <a:prstDash val="solid"/>
           </a:ln>
@@ -2499,8 +2649,8 @@
         </p:nvSpPr>
         <p:spPr>
           <a:xfrm>
-            <a:off x="914400" y="2103120"/>
-            <a:ext cx="4892040" cy="274320"/>
+            <a:off x="822960" y="2148840"/>
+            <a:ext cx="4754880" cy="365760"/>
           </a:xfrm>
           <a:prstGeom prst="rect">
             <a:avLst/>
@@ -2516,17 +2666,17 @@
               <a:buNone/>
             </a:pPr>
             <a:r>
-              <a:rPr lang="en-US" sz="1100" b="1" dirty="0">
-                <a:solidFill>
-                  <a:srgbClr val="EF4444"/>
-                </a:solidFill>
-                <a:latin typeface="Calibri" pitchFamily="34" charset="0"/>
-                <a:ea typeface="Calibri" pitchFamily="34" charset="-122"/>
-                <a:cs typeface="Calibri" pitchFamily="34" charset="-120"/>
-              </a:rPr>
-              <a:t>THE CHALLENGE: MONOLITHIC AIRLINE FAILURES</a:t>
-            </a:r>
-            <a:endParaRPr lang="en-US" sz="1100" dirty="0"/>
+              <a:rPr lang="en-US" sz="1300" b="1" dirty="0">
+                <a:solidFill>
+                  <a:srgbClr val="FACC15"/>
+                </a:solidFill>
+                <a:latin typeface="Calibri" pitchFamily="34" charset="0"/>
+                <a:ea typeface="Calibri" pitchFamily="34" charset="-122"/>
+                <a:cs typeface="Calibri" pitchFamily="34" charset="-120"/>
+              </a:rPr>
+              <a:t>Traditional Monolith (One Big Program)</a:t>
+            </a:r>
+            <a:endParaRPr lang="en-US" sz="1300" dirty="0"/>
           </a:p>
         </p:txBody>
       </p:sp>
@@ -2538,27 +2688,39 @@
         </p:nvSpPr>
         <p:spPr>
           <a:xfrm>
-            <a:off x="914400" y="2423160"/>
-            <a:ext cx="4892040" cy="1463040"/>
-          </a:xfrm>
-          <a:prstGeom prst="rect">
-            <a:avLst/>
-          </a:prstGeom>
-          <a:noFill/>
-          <a:ln/>
-        </p:spPr>
-        <p:txBody>
-          <a:bodyPr wrap="square" rtlCol="0" anchor="ctr"/>
-          <a:lstStyle/>
-          <a:p>
-            <a:pPr indent="0" marL="0">
-              <a:lnSpc>
-                <a:spcPct val="120000"/>
-              </a:lnSpc>
-              <a:buNone/>
-            </a:pPr>
-            <a:r>
-              <a:rPr lang="en-US" sz="920" dirty="0">
+            <a:off x="822960" y="2606040"/>
+            <a:ext cx="4754880" cy="3383280"/>
+          </a:xfrm>
+          <a:prstGeom prst="rect">
+            <a:avLst/>
+          </a:prstGeom>
+          <a:noFill/>
+          <a:ln/>
+        </p:spPr>
+        <p:txBody>
+          <a:bodyPr wrap="square" rtlCol="0" anchor="t"/>
+          <a:lstStyle/>
+          <a:p>
+            <a:pPr indent="0" marL="0">
+              <a:buNone/>
+            </a:pPr>
+            <a:r>
+              <a:rPr lang="en-US" sz="950" b="1" dirty="0">
+                <a:solidFill>
+                  <a:srgbClr val="FFFFFF"/>
+                </a:solidFill>
+                <a:latin typeface="Calibri" pitchFamily="34" charset="0"/>
+                <a:ea typeface="Calibri" pitchFamily="34" charset="-122"/>
+                <a:cs typeface="Calibri" pitchFamily="34" charset="-120"/>
+              </a:rPr>
+              <a:t>• Single Point of Failure:
+</a:t>
+            </a:r>
+            <a:pPr indent="0" marL="0">
+              <a:buNone/>
+            </a:pPr>
+            <a:r>
+              <a:rPr lang="en-US" sz="950" dirty="0">
                 <a:solidFill>
                   <a:srgbClr val="E4E4E7"/>
                 </a:solidFill>
@@ -2566,19 +2728,29 @@
                 <a:ea typeface="Calibri" pitchFamily="34" charset="-122"/>
                 <a:cs typeface="Calibri" pitchFamily="34" charset="-120"/>
               </a:rPr>
-              <a:t>• Single Point of Failure (SPOF): When high-volume flight searches surge, checkout and boarding systems crash simultaneously.</a:t>
-            </a:r>
-            <a:endParaRPr lang="en-US" sz="920" dirty="0"/>
-          </a:p>
-          <a:p>
-            <a:pPr indent="0" marL="0">
-              <a:lnSpc>
-                <a:spcPct val="120000"/>
-              </a:lnSpc>
-              <a:buNone/>
-            </a:pPr>
-            <a:r>
-              <a:rPr lang="en-US" sz="920" dirty="0">
+              <a:t>Everything is packed inside one single application. If one feature breaks or crashes, the entire website goes down.
+</a:t>
+            </a:r>
+            <a:pPr indent="0" marL="0">
+              <a:buNone/>
+            </a:pPr>
+            <a:r>
+              <a:rPr lang="en-US" sz="950" b="1" dirty="0">
+                <a:solidFill>
+                  <a:srgbClr val="FFFFFF"/>
+                </a:solidFill>
+                <a:latin typeface="Calibri" pitchFamily="34" charset="0"/>
+                <a:ea typeface="Calibri" pitchFamily="34" charset="-122"/>
+                <a:cs typeface="Calibri" pitchFamily="34" charset="-120"/>
+              </a:rPr>
+              <a:t>• Shared Database Slowdowns:
+</a:t>
+            </a:r>
+            <a:pPr indent="0" marL="0">
+              <a:buNone/>
+            </a:pPr>
+            <a:r>
+              <a:rPr lang="en-US" sz="950" dirty="0">
                 <a:solidFill>
                   <a:srgbClr val="E4E4E7"/>
                 </a:solidFill>
@@ -2586,19 +2758,29 @@
                 <a:ea typeface="Calibri" pitchFamily="34" charset="-122"/>
                 <a:cs typeface="Calibri" pitchFamily="34" charset="-120"/>
               </a:rPr>
-              <a:t>• Shared Database Contention: Heavy catalog read traffic causes table locking on transactional booking manifests.</a:t>
-            </a:r>
-            <a:endParaRPr lang="en-US" sz="920" dirty="0"/>
-          </a:p>
-          <a:p>
-            <a:pPr indent="0" marL="0">
-              <a:lnSpc>
-                <a:spcPct val="120000"/>
-              </a:lnSpc>
-              <a:buNone/>
-            </a:pPr>
-            <a:r>
-              <a:rPr lang="en-US" sz="920" dirty="0">
+              <a:t>All features share one database. When thousands of people search for flights, it slows down logins and payments.
+</a:t>
+            </a:r>
+            <a:pPr indent="0" marL="0">
+              <a:buNone/>
+            </a:pPr>
+            <a:r>
+              <a:rPr lang="en-US" sz="950" b="1" dirty="0">
+                <a:solidFill>
+                  <a:srgbClr val="FFFFFF"/>
+                </a:solidFill>
+                <a:latin typeface="Calibri" pitchFamily="34" charset="0"/>
+                <a:ea typeface="Calibri" pitchFamily="34" charset="-122"/>
+                <a:cs typeface="Calibri" pitchFamily="34" charset="-120"/>
+              </a:rPr>
+              <a:t>• Hard to Update:
+</a:t>
+            </a:r>
+            <a:pPr indent="0" marL="0">
+              <a:buNone/>
+            </a:pPr>
+            <a:r>
+              <a:rPr lang="en-US" sz="950" dirty="0">
                 <a:solidFill>
                   <a:srgbClr val="E4E4E7"/>
                 </a:solidFill>
@@ -2606,19 +2788,29 @@
                 <a:ea typeface="Calibri" pitchFamily="34" charset="-122"/>
                 <a:cs typeface="Calibri" pitchFamily="34" charset="-120"/>
               </a:rPr>
-              <a:t>• Tight Coupling: Modifying dynamic pricing formulas requires rebuilding and redeploying the entire airline platform.</a:t>
-            </a:r>
-            <a:endParaRPr lang="en-US" sz="920" dirty="0"/>
-          </a:p>
-          <a:p>
-            <a:pPr indent="0" marL="0">
-              <a:lnSpc>
-                <a:spcPct val="120000"/>
-              </a:lnSpc>
-              <a:buNone/>
-            </a:pPr>
-            <a:r>
-              <a:rPr lang="en-US" sz="920" dirty="0">
+              <a:t>Even a small text or button update requires stopping and restarting the whole system.
+</a:t>
+            </a:r>
+            <a:pPr indent="0" marL="0">
+              <a:buNone/>
+            </a:pPr>
+            <a:r>
+              <a:rPr lang="en-US" sz="950" b="1" dirty="0">
+                <a:solidFill>
+                  <a:srgbClr val="FFFFFF"/>
+                </a:solidFill>
+                <a:latin typeface="Calibri" pitchFamily="34" charset="0"/>
+                <a:ea typeface="Calibri" pitchFamily="34" charset="-122"/>
+                <a:cs typeface="Calibri" pitchFamily="34" charset="-120"/>
+              </a:rPr>
+              <a:t>• Difficult Teamwork:
+</a:t>
+            </a:r>
+            <a:pPr indent="0" marL="0">
+              <a:buNone/>
+            </a:pPr>
+            <a:r>
+              <a:rPr lang="en-US" sz="950" dirty="0">
                 <a:solidFill>
                   <a:srgbClr val="E4E4E7"/>
                 </a:solidFill>
@@ -2626,9 +2818,9 @@
                 <a:ea typeface="Calibri" pitchFamily="34" charset="-122"/>
                 <a:cs typeface="Calibri" pitchFamily="34" charset="-120"/>
               </a:rPr>
-              <a:t>• Lack of Fault Isolation: Third-party payment or SMS gateway timeouts freeze user requests and exhaust web server threads.</a:t>
-            </a:r>
-            <a:endParaRPr lang="en-US" sz="920" dirty="0"/>
+              <a:t>Many developers modifying the same codebase causes code conflicts and bugs.</a:t>
+            </a:r>
+            <a:endParaRPr lang="en-US" sz="950" dirty="0"/>
           </a:p>
         </p:txBody>
       </p:sp>
@@ -2641,19 +2833,19 @@
         <p:spPr>
           <a:xfrm>
             <a:off x="6217920" y="1965960"/>
-            <a:ext cx="5257800" cy="2057400"/>
+            <a:ext cx="5394960" cy="4206240"/>
           </a:xfrm>
           <a:prstGeom prst="roundRect">
             <a:avLst>
-              <a:gd name="adj" fmla="val 4444"/>
+              <a:gd name="adj" fmla="val 2609"/>
             </a:avLst>
           </a:prstGeom>
           <a:solidFill>
             <a:srgbClr val="18181B"/>
           </a:solidFill>
-          <a:ln w="19050">
+          <a:ln w="15240">
             <a:solidFill>
-              <a:srgbClr val="4ADE80"/>
+              <a:srgbClr val="FFFFFF"/>
             </a:solidFill>
             <a:prstDash val="solid"/>
           </a:ln>
@@ -2667,8 +2859,8 @@
         </p:nvSpPr>
         <p:spPr>
           <a:xfrm>
-            <a:off x="6400800" y="2103120"/>
-            <a:ext cx="4892040" cy="274320"/>
+            <a:off x="6492240" y="2148840"/>
+            <a:ext cx="4846320" cy="365760"/>
           </a:xfrm>
           <a:prstGeom prst="rect">
             <a:avLst/>
@@ -2684,7 +2876,7 @@
               <a:buNone/>
             </a:pPr>
             <a:r>
-              <a:rPr lang="en-US" sz="1100" b="1" dirty="0">
+              <a:rPr lang="en-US" sz="1300" b="1" dirty="0">
                 <a:solidFill>
                   <a:srgbClr val="4ADE80"/>
                 </a:solidFill>
@@ -2692,9 +2884,9 @@
                 <a:ea typeface="Calibri" pitchFamily="34" charset="-122"/>
                 <a:cs typeface="Calibri" pitchFamily="34" charset="-120"/>
               </a:rPr>
-              <a:t>THE AEROBOOK SOLUTION: CLOUD-NATIVE MICROSERVICES</a:t>
-            </a:r>
-            <a:endParaRPr lang="en-US" sz="1100" dirty="0"/>
+              <a:t>AeroBook Microservices (Our Approach)</a:t>
+            </a:r>
+            <a:endParaRPr lang="en-US" sz="1300" dirty="0"/>
           </a:p>
         </p:txBody>
       </p:sp>
@@ -2706,27 +2898,39 @@
         </p:nvSpPr>
         <p:spPr>
           <a:xfrm>
-            <a:off x="6400800" y="2423160"/>
-            <a:ext cx="4892040" cy="1463040"/>
-          </a:xfrm>
-          <a:prstGeom prst="rect">
-            <a:avLst/>
-          </a:prstGeom>
-          <a:noFill/>
-          <a:ln/>
-        </p:spPr>
-        <p:txBody>
-          <a:bodyPr wrap="square" rtlCol="0" anchor="ctr"/>
-          <a:lstStyle/>
-          <a:p>
-            <a:pPr indent="0" marL="0">
-              <a:lnSpc>
-                <a:spcPct val="120000"/>
-              </a:lnSpc>
-              <a:buNone/>
-            </a:pPr>
-            <a:r>
-              <a:rPr lang="en-US" sz="920" dirty="0">
+            <a:off x="6492240" y="2606040"/>
+            <a:ext cx="4846320" cy="3383280"/>
+          </a:xfrm>
+          <a:prstGeom prst="rect">
+            <a:avLst/>
+          </a:prstGeom>
+          <a:noFill/>
+          <a:ln/>
+        </p:spPr>
+        <p:txBody>
+          <a:bodyPr wrap="square" rtlCol="0" anchor="t"/>
+          <a:lstStyle/>
+          <a:p>
+            <a:pPr indent="0" marL="0">
+              <a:buNone/>
+            </a:pPr>
+            <a:r>
+              <a:rPr lang="en-US" sz="950" b="1" dirty="0">
+                <a:solidFill>
+                  <a:srgbClr val="FFFFFF"/>
+                </a:solidFill>
+                <a:latin typeface="Calibri" pitchFamily="34" charset="0"/>
+                <a:ea typeface="Calibri" pitchFamily="34" charset="-122"/>
+                <a:cs typeface="Calibri" pitchFamily="34" charset="-120"/>
+              </a:rPr>
+              <a:t>• Independent Services:
+</a:t>
+            </a:r>
+            <a:pPr indent="0" marL="0">
+              <a:buNone/>
+            </a:pPr>
+            <a:r>
+              <a:rPr lang="en-US" sz="950" dirty="0">
                 <a:solidFill>
                   <a:srgbClr val="E4E4E7"/>
                 </a:solidFill>
@@ -2734,19 +2938,29 @@
                 <a:ea typeface="Calibri" pitchFamily="34" charset="-122"/>
                 <a:cs typeface="Calibri" pitchFamily="34" charset="-120"/>
               </a:rPr>
-              <a:t>• Decentralized Domain Architecture: 6 independent, business-aligned microservices collaborating over REST &amp; AMQP.</a:t>
-            </a:r>
-            <a:endParaRPr lang="en-US" sz="920" dirty="0"/>
-          </a:p>
-          <a:p>
-            <a:pPr indent="0" marL="0">
-              <a:lnSpc>
-                <a:spcPct val="120000"/>
-              </a:lnSpc>
-              <a:buNone/>
-            </a:pPr>
-            <a:r>
-              <a:rPr lang="en-US" sz="920" dirty="0">
+              <a:t>The system is divided into small, independent services. If check-in is slow, flight search and booking still work normally.
+</a:t>
+            </a:r>
+            <a:pPr indent="0" marL="0">
+              <a:buNone/>
+            </a:pPr>
+            <a:r>
+              <a:rPr lang="en-US" sz="950" b="1" dirty="0">
+                <a:solidFill>
+                  <a:srgbClr val="FFFFFF"/>
+                </a:solidFill>
+                <a:latin typeface="Calibri" pitchFamily="34" charset="0"/>
+                <a:ea typeface="Calibri" pitchFamily="34" charset="-122"/>
+                <a:cs typeface="Calibri" pitchFamily="34" charset="-120"/>
+              </a:rPr>
+              <a:t>• Separate Databases:
+</a:t>
+            </a:r>
+            <a:pPr indent="0" marL="0">
+              <a:buNone/>
+            </a:pPr>
+            <a:r>
+              <a:rPr lang="en-US" sz="950" dirty="0">
                 <a:solidFill>
                   <a:srgbClr val="E4E4E7"/>
                 </a:solidFill>
@@ -2754,19 +2968,29 @@
                 <a:ea typeface="Calibri" pitchFamily="34" charset="-122"/>
                 <a:cs typeface="Calibri" pitchFamily="34" charset="-120"/>
               </a:rPr>
-              <a:t>• Database-Per-Service Isolation: Dedicated MySQL schemas ensure flight search reads never impact booking commits.</a:t>
-            </a:r>
-            <a:endParaRPr lang="en-US" sz="920" dirty="0"/>
-          </a:p>
-          <a:p>
-            <a:pPr indent="0" marL="0">
-              <a:lnSpc>
-                <a:spcPct val="120000"/>
-              </a:lnSpc>
-              <a:buNone/>
-            </a:pPr>
-            <a:r>
-              <a:rPr lang="en-US" sz="920" dirty="0">
+              <a:t>Each service has its own database. Flight searches don't interfere with user logins or ticket bookings.
+</a:t>
+            </a:r>
+            <a:pPr indent="0" marL="0">
+              <a:buNone/>
+            </a:pPr>
+            <a:r>
+              <a:rPr lang="en-US" sz="950" b="1" dirty="0">
+                <a:solidFill>
+                  <a:srgbClr val="FFFFFF"/>
+                </a:solidFill>
+                <a:latin typeface="Calibri" pitchFamily="34" charset="0"/>
+                <a:ea typeface="Calibri" pitchFamily="34" charset="-122"/>
+                <a:cs typeface="Calibri" pitchFamily="34" charset="-120"/>
+              </a:rPr>
+              <a:t>• Easy Zero-Downtime Updates:
+</a:t>
+            </a:r>
+            <a:pPr indent="0" marL="0">
+              <a:buNone/>
+            </a:pPr>
+            <a:r>
+              <a:rPr lang="en-US" sz="950" dirty="0">
                 <a:solidFill>
                   <a:srgbClr val="E4E4E7"/>
                 </a:solidFill>
@@ -2774,19 +2998,29 @@
                 <a:ea typeface="Calibri" pitchFamily="34" charset="-122"/>
                 <a:cs typeface="Calibri" pitchFamily="34" charset="-120"/>
               </a:rPr>
-              <a:t>• Non-Blocking Edge Gateway: Spring Cloud Gateway (Netty WebFlux) handles rate limiting, security, and OpenAPI aggregation.</a:t>
-            </a:r>
-            <a:endParaRPr lang="en-US" sz="920" dirty="0"/>
-          </a:p>
-          <a:p>
-            <a:pPr indent="0" marL="0">
-              <a:lnSpc>
-                <a:spcPct val="120000"/>
-              </a:lnSpc>
-              <a:buNone/>
-            </a:pPr>
-            <a:r>
-              <a:rPr lang="en-US" sz="920" dirty="0">
+              <a:t>We can update or fix one service without shutting down the other services.
+</a:t>
+            </a:r>
+            <a:pPr indent="0" marL="0">
+              <a:buNone/>
+            </a:pPr>
+            <a:r>
+              <a:rPr lang="en-US" sz="950" b="1" dirty="0">
+                <a:solidFill>
+                  <a:srgbClr val="FFFFFF"/>
+                </a:solidFill>
+                <a:latin typeface="Calibri" pitchFamily="34" charset="0"/>
+                <a:ea typeface="Calibri" pitchFamily="34" charset="-122"/>
+                <a:cs typeface="Calibri" pitchFamily="34" charset="-120"/>
+              </a:rPr>
+              <a:t>• Fast and Scalable:
+</a:t>
+            </a:r>
+            <a:pPr indent="0" marL="0">
+              <a:buNone/>
+            </a:pPr>
+            <a:r>
+              <a:rPr lang="en-US" sz="950" dirty="0">
                 <a:solidFill>
                   <a:srgbClr val="E4E4E7"/>
                 </a:solidFill>
@@ -2794,345 +3028,9 @@
                 <a:ea typeface="Calibri" pitchFamily="34" charset="-122"/>
                 <a:cs typeface="Calibri" pitchFamily="34" charset="-120"/>
               </a:rPr>
-              <a:t>• Asynchronous Event Streaming: RabbitMQ message queues offload notification dispatch, ensuring sub-50ms checkout responses.</a:t>
-            </a:r>
-            <a:endParaRPr lang="en-US" sz="920" dirty="0"/>
-          </a:p>
-        </p:txBody>
-      </p:sp>
-      <p:sp>
-        <p:nvSpPr>
-          <p:cNvPr id="14" name="Shape 12"/>
-          <p:cNvSpPr/>
-          <p:nvPr/>
-        </p:nvSpPr>
-        <p:spPr>
-          <a:xfrm>
-            <a:off x="731520" y="4206240"/>
-            <a:ext cx="5257800" cy="2057400"/>
-          </a:xfrm>
-          <a:prstGeom prst="roundRect">
-            <a:avLst>
-              <a:gd name="adj" fmla="val 4444"/>
-            </a:avLst>
-          </a:prstGeom>
-          <a:solidFill>
-            <a:srgbClr val="18181B"/>
-          </a:solidFill>
-          <a:ln w="19050">
-            <a:solidFill>
-              <a:srgbClr val="38BDF8"/>
-            </a:solidFill>
-            <a:prstDash val="solid"/>
-          </a:ln>
-        </p:spPr>
-      </p:sp>
-      <p:sp>
-        <p:nvSpPr>
-          <p:cNvPr id="15" name="Text 13"/>
-          <p:cNvSpPr/>
-          <p:nvPr/>
-        </p:nvSpPr>
-        <p:spPr>
-          <a:xfrm>
-            <a:off x="914400" y="4343400"/>
-            <a:ext cx="4892040" cy="274320"/>
-          </a:xfrm>
-          <a:prstGeom prst="rect">
-            <a:avLst/>
-          </a:prstGeom>
-          <a:noFill/>
-          <a:ln/>
-        </p:spPr>
-        <p:txBody>
-          <a:bodyPr wrap="square" rtlCol="0" anchor="ctr"/>
-          <a:lstStyle/>
-          <a:p>
-            <a:pPr indent="0" marL="0">
-              <a:buNone/>
-            </a:pPr>
-            <a:r>
-              <a:rPr lang="en-US" sz="1100" b="1" dirty="0">
-                <a:solidFill>
-                  <a:srgbClr val="38BDF8"/>
-                </a:solidFill>
-                <a:latin typeface="Calibri" pitchFamily="34" charset="0"/>
-                <a:ea typeface="Calibri" pitchFamily="34" charset="-122"/>
-                <a:cs typeface="Calibri" pitchFamily="34" charset="-120"/>
-              </a:rPr>
-              <a:t>CORE BUSINESS CAPABILITIES</a:t>
-            </a:r>
-            <a:endParaRPr lang="en-US" sz="1100" dirty="0"/>
-          </a:p>
-        </p:txBody>
-      </p:sp>
-      <p:sp>
-        <p:nvSpPr>
-          <p:cNvPr id="16" name="Text 14"/>
-          <p:cNvSpPr/>
-          <p:nvPr/>
-        </p:nvSpPr>
-        <p:spPr>
-          <a:xfrm>
-            <a:off x="914400" y="4663440"/>
-            <a:ext cx="4892040" cy="1463040"/>
-          </a:xfrm>
-          <a:prstGeom prst="rect">
-            <a:avLst/>
-          </a:prstGeom>
-          <a:noFill/>
-          <a:ln/>
-        </p:spPr>
-        <p:txBody>
-          <a:bodyPr wrap="square" rtlCol="0" anchor="ctr"/>
-          <a:lstStyle/>
-          <a:p>
-            <a:pPr indent="0" marL="0">
-              <a:lnSpc>
-                <a:spcPct val="120000"/>
-              </a:lnSpc>
-              <a:buNone/>
-            </a:pPr>
-            <a:r>
-              <a:rPr lang="en-US" sz="920" dirty="0">
-                <a:solidFill>
-                  <a:srgbClr val="E4E4E7"/>
-                </a:solidFill>
-                <a:latin typeface="Calibri" pitchFamily="34" charset="0"/>
-                <a:ea typeface="Calibri" pitchFamily="34" charset="-122"/>
-                <a:cs typeface="Calibri" pitchFamily="34" charset="-120"/>
-              </a:rPr>
-              <a:t>• Multi-Criteria Flight Search: Origin, destination, date, and multi-cabin class real-time availability querying.</a:t>
-            </a:r>
-            <a:endParaRPr lang="en-US" sz="920" dirty="0"/>
-          </a:p>
-          <a:p>
-            <a:pPr indent="0" marL="0">
-              <a:lnSpc>
-                <a:spcPct val="120000"/>
-              </a:lnSpc>
-              <a:buNone/>
-            </a:pPr>
-            <a:r>
-              <a:rPr lang="en-US" sz="920" dirty="0">
-                <a:solidFill>
-                  <a:srgbClr val="E4E4E7"/>
-                </a:solidFill>
-                <a:latin typeface="Calibri" pitchFamily="34" charset="0"/>
-                <a:ea typeface="Calibri" pitchFamily="34" charset="-122"/>
-                <a:cs typeface="Calibri" pitchFamily="34" charset="-120"/>
-              </a:rPr>
-              <a:t>• Dynamic Surge Pricing: Base fare distance calculations augmented with cabin multipliers, demand surge, and taxes.</a:t>
-            </a:r>
-            <a:endParaRPr lang="en-US" sz="920" dirty="0"/>
-          </a:p>
-          <a:p>
-            <a:pPr indent="0" marL="0">
-              <a:lnSpc>
-                <a:spcPct val="120000"/>
-              </a:lnSpc>
-              <a:buNone/>
-            </a:pPr>
-            <a:r>
-              <a:rPr lang="en-US" sz="920" dirty="0">
-                <a:solidFill>
-                  <a:srgbClr val="E4E4E7"/>
-                </a:solidFill>
-                <a:latin typeface="Calibri" pitchFamily="34" charset="0"/>
-                <a:ea typeface="Calibri" pitchFamily="34" charset="-122"/>
-                <a:cs typeface="Calibri" pitchFamily="34" charset="-120"/>
-              </a:rPr>
-              <a:t>• Atomic Seat Hold &amp; PNR: Two-phase 10-minute temporary seat holds with unique 6-character PNR generation.</a:t>
-            </a:r>
-            <a:endParaRPr lang="en-US" sz="920" dirty="0"/>
-          </a:p>
-          <a:p>
-            <a:pPr indent="0" marL="0">
-              <a:lnSpc>
-                <a:spcPct val="120000"/>
-              </a:lnSpc>
-              <a:buNone/>
-            </a:pPr>
-            <a:r>
-              <a:rPr lang="en-US" sz="920" dirty="0">
-                <a:solidFill>
-                  <a:srgbClr val="E4E4E7"/>
-                </a:solidFill>
-                <a:latin typeface="Calibri" pitchFamily="34" charset="0"/>
-                <a:ea typeface="Calibri" pitchFamily="34" charset="-122"/>
-                <a:cs typeface="Calibri" pitchFamily="34" charset="-120"/>
-              </a:rPr>
-              <a:t>• Airport Web Check-In: Departure window rules (T-24h to T-1h) with cryptographically signed 2D QR boarding passes.</a:t>
-            </a:r>
-            <a:endParaRPr lang="en-US" sz="920" dirty="0"/>
-          </a:p>
-        </p:txBody>
-      </p:sp>
-      <p:sp>
-        <p:nvSpPr>
-          <p:cNvPr id="17" name="Shape 15"/>
-          <p:cNvSpPr/>
-          <p:nvPr/>
-        </p:nvSpPr>
-        <p:spPr>
-          <a:xfrm>
-            <a:off x="6217920" y="4206240"/>
-            <a:ext cx="5257800" cy="2057400"/>
-          </a:xfrm>
-          <a:prstGeom prst="roundRect">
-            <a:avLst>
-              <a:gd name="adj" fmla="val 4444"/>
-            </a:avLst>
-          </a:prstGeom>
-          <a:solidFill>
-            <a:srgbClr val="18181B"/>
-          </a:solidFill>
-          <a:ln w="19050">
-            <a:solidFill>
-              <a:srgbClr val="C084FC"/>
-            </a:solidFill>
-            <a:prstDash val="solid"/>
-          </a:ln>
-        </p:spPr>
-      </p:sp>
-      <p:sp>
-        <p:nvSpPr>
-          <p:cNvPr id="18" name="Text 16"/>
-          <p:cNvSpPr/>
-          <p:nvPr/>
-        </p:nvSpPr>
-        <p:spPr>
-          <a:xfrm>
-            <a:off x="6400800" y="4343400"/>
-            <a:ext cx="4892040" cy="274320"/>
-          </a:xfrm>
-          <a:prstGeom prst="rect">
-            <a:avLst/>
-          </a:prstGeom>
-          <a:noFill/>
-          <a:ln/>
-        </p:spPr>
-        <p:txBody>
-          <a:bodyPr wrap="square" rtlCol="0" anchor="ctr"/>
-          <a:lstStyle/>
-          <a:p>
-            <a:pPr indent="0" marL="0">
-              <a:buNone/>
-            </a:pPr>
-            <a:r>
-              <a:rPr lang="en-US" sz="1100" b="1" dirty="0">
-                <a:solidFill>
-                  <a:srgbClr val="C084FC"/>
-                </a:solidFill>
-                <a:latin typeface="Calibri" pitchFamily="34" charset="0"/>
-                <a:ea typeface="Calibri" pitchFamily="34" charset="-122"/>
-                <a:cs typeface="Calibri" pitchFamily="34" charset="-120"/>
-              </a:rPr>
-              <a:t>ENTERPRISE QUALITY ATTRIBUTES</a:t>
-            </a:r>
-            <a:endParaRPr lang="en-US" sz="1100" dirty="0"/>
-          </a:p>
-        </p:txBody>
-      </p:sp>
-      <p:sp>
-        <p:nvSpPr>
-          <p:cNvPr id="19" name="Text 17"/>
-          <p:cNvSpPr/>
-          <p:nvPr/>
-        </p:nvSpPr>
-        <p:spPr>
-          <a:xfrm>
-            <a:off x="6400800" y="4663440"/>
-            <a:ext cx="4892040" cy="1463040"/>
-          </a:xfrm>
-          <a:prstGeom prst="rect">
-            <a:avLst/>
-          </a:prstGeom>
-          <a:noFill/>
-          <a:ln/>
-        </p:spPr>
-        <p:txBody>
-          <a:bodyPr wrap="square" rtlCol="0" anchor="ctr"/>
-          <a:lstStyle/>
-          <a:p>
-            <a:pPr indent="0" marL="0">
-              <a:lnSpc>
-                <a:spcPct val="120000"/>
-              </a:lnSpc>
-              <a:buNone/>
-            </a:pPr>
-            <a:r>
-              <a:rPr lang="en-US" sz="920" dirty="0">
-                <a:solidFill>
-                  <a:srgbClr val="E4E4E7"/>
-                </a:solidFill>
-                <a:latin typeface="Calibri" pitchFamily="34" charset="0"/>
-                <a:ea typeface="Calibri" pitchFamily="34" charset="-122"/>
-                <a:cs typeface="Calibri" pitchFamily="34" charset="-120"/>
-              </a:rPr>
-              <a:t>• High Availability: Eureka service discovery enables horizontal scaling with automated client-side load balancing.</a:t>
-            </a:r>
-            <a:endParaRPr lang="en-US" sz="920" dirty="0"/>
-          </a:p>
-          <a:p>
-            <a:pPr indent="0" marL="0">
-              <a:lnSpc>
-                <a:spcPct val="120000"/>
-              </a:lnSpc>
-              <a:buNone/>
-            </a:pPr>
-            <a:r>
-              <a:rPr lang="en-US" sz="920" dirty="0">
-                <a:solidFill>
-                  <a:srgbClr val="E4E4E7"/>
-                </a:solidFill>
-                <a:latin typeface="Calibri" pitchFamily="34" charset="0"/>
-                <a:ea typeface="Calibri" pitchFamily="34" charset="-122"/>
-                <a:cs typeface="Calibri" pitchFamily="34" charset="-120"/>
-              </a:rPr>
-              <a:t>• PCI-DSS Scope Minimization: Zero plain-text credit card storage; utilizes opaque single-use tokens authorized with external gateways.</a:t>
-            </a:r>
-            <a:endParaRPr lang="en-US" sz="920" dirty="0"/>
-          </a:p>
-          <a:p>
-            <a:pPr indent="0" marL="0">
-              <a:lnSpc>
-                <a:spcPct val="120000"/>
-              </a:lnSpc>
-              <a:buNone/>
-            </a:pPr>
-            <a:r>
-              <a:rPr lang="en-US" sz="920" dirty="0">
-                <a:solidFill>
-                  <a:srgbClr val="E4E4E7"/>
-                </a:solidFill>
-                <a:latin typeface="Calibri" pitchFamily="34" charset="0"/>
-                <a:ea typeface="Calibri" pitchFamily="34" charset="-122"/>
-                <a:cs typeface="Calibri" pitchFamily="34" charset="-120"/>
-              </a:rPr>
-              <a:t>• Strict Data Governance: Entity correlation via immutable UUIDs and PNRs across service boundaries without cross-DB joins.</a:t>
-            </a:r>
-            <a:endParaRPr lang="en-US" sz="920" dirty="0"/>
-          </a:p>
-          <a:p>
-            <a:pPr indent="0" marL="0">
-              <a:lnSpc>
-                <a:spcPct val="120000"/>
-              </a:lnSpc>
-              <a:buNone/>
-            </a:pPr>
-            <a:r>
-              <a:rPr lang="en-US" sz="920" dirty="0">
-                <a:solidFill>
-                  <a:srgbClr val="E4E4E7"/>
-                </a:solidFill>
-                <a:latin typeface="Calibri" pitchFamily="34" charset="0"/>
-                <a:ea typeface="Calibri" pitchFamily="34" charset="-122"/>
-                <a:cs typeface="Calibri" pitchFamily="34" charset="-120"/>
-              </a:rPr>
-              <a:t>• Resilient Error Recovery: RabbitMQ Dead-Letter Exchanges (DLX) and retry backoffs guarantee at-least-once message delivery.</a:t>
-            </a:r>
-            <a:endParaRPr lang="en-US" sz="920" dirty="0"/>
+              <a:t>If ticket booking is busy during holidays, we can easily run extra copies of just the booking service.</a:t>
+            </a:r>
+            <a:endParaRPr lang="en-US" sz="950" dirty="0"/>
           </a:p>
         </p:txBody>
       </p:sp>
@@ -3202,7 +3100,7 @@
         <p:spPr>
           <a:xfrm>
             <a:off x="548640" y="411480"/>
-            <a:ext cx="2377440" cy="320040"/>
+            <a:ext cx="2286000" cy="320040"/>
           </a:xfrm>
           <a:prstGeom prst="roundRect">
             <a:avLst>
@@ -3229,7 +3127,7 @@
         <p:spPr>
           <a:xfrm>
             <a:off x="548640" y="411480"/>
-            <a:ext cx="2377440" cy="320040"/>
+            <a:ext cx="2286000" cy="320040"/>
           </a:xfrm>
           <a:prstGeom prst="rect">
             <a:avLst/>
@@ -3253,7 +3151,7 @@
                 <a:ea typeface="Calibri" pitchFamily="34" charset="-122"/>
                 <a:cs typeface="Calibri" pitchFamily="34" charset="-120"/>
               </a:rPr>
-              <a:t>ARCHITECTURE BLUEPRINT</a:t>
+              <a:t>SYSTEM ARCHITECTURE</a:t>
             </a:r>
             <a:endParaRPr lang="en-US" sz="900" dirty="0"/>
           </a:p>
@@ -3268,7 +3166,7 @@
         <p:spPr>
           <a:xfrm>
             <a:off x="548640" y="822960"/>
-            <a:ext cx="10515600" cy="594360"/>
+            <a:ext cx="10515600" cy="548640"/>
           </a:xfrm>
           <a:prstGeom prst="rect">
             <a:avLst/>
@@ -3292,7 +3190,7 @@
                 <a:ea typeface="Calibri" pitchFamily="34" charset="-122"/>
                 <a:cs typeface="Calibri" pitchFamily="34" charset="-120"/>
               </a:rPr>
-              <a:t>End-to-End System Architecture &amp; Microservice Topology</a:t>
+              <a:t>The Core Microservices in AeroBook</a:t>
             </a:r>
             <a:endParaRPr lang="en-US" sz="2200" dirty="0"/>
           </a:p>
@@ -3325,13 +3223,13 @@
             <a:r>
               <a:rPr lang="en-US" sz="1100" dirty="0">
                 <a:solidFill>
-                  <a:srgbClr val="A1A1AA"/>
-                </a:solidFill>
-                <a:latin typeface="Calibri" pitchFamily="34" charset="0"/>
-                <a:ea typeface="Calibri" pitchFamily="34" charset="-122"/>
-                <a:cs typeface="Calibri" pitchFamily="34" charset="-120"/>
-              </a:rPr>
-              <a:t>Comprehensive multi-tier decomposition with centralized edge routing, discovery, and isolated domain data stores</a:t>
+                  <a:srgbClr val="38BDF8"/>
+                </a:solidFill>
+                <a:latin typeface="Calibri" pitchFamily="34" charset="0"/>
+                <a:ea typeface="Calibri" pitchFamily="34" charset="-122"/>
+                <a:cs typeface="Calibri" pitchFamily="34" charset="-120"/>
+              </a:rPr>
+              <a:t>Each Service Does Exactly One Job Well (Simple &amp; Modular)</a:t>
             </a:r>
             <a:endParaRPr lang="en-US" sz="1100" dirty="0"/>
           </a:p>
@@ -3360,43 +3258,20 @@
           </a:ln>
         </p:spPr>
       </p:sp>
-      <p:pic>
-        <p:nvPicPr>
-          <p:cNvPr id="8" name="Image 0" descr="D:/aerobook/documentation/AeroBook_Architecture_Diagram.png">    </p:cNvPr>
-          <p:cNvPicPr>
-            <a:picLocks noChangeAspect="1"/>
-          </p:cNvPicPr>
-          <p:nvPr/>
-        </p:nvPicPr>
-        <p:blipFill>
-          <a:blip r:embed="rId1"/>
-          <a:srcRect l="0" r="0" t="0" b="0"/>
-          <a:stretch/>
-        </p:blipFill>
-        <p:spPr>
-          <a:xfrm>
-            <a:off x="731520" y="1965960"/>
-            <a:ext cx="6583680" cy="4297680"/>
-          </a:xfrm>
-          <a:prstGeom prst="rect">
-            <a:avLst/>
-          </a:prstGeom>
-        </p:spPr>
-      </p:pic>
-      <p:sp>
-        <p:nvSpPr>
-          <p:cNvPr id="9" name="Shape 6"/>
-          <p:cNvSpPr/>
-          <p:nvPr/>
-        </p:nvSpPr>
-        <p:spPr>
-          <a:xfrm>
-            <a:off x="7498080" y="1965960"/>
-            <a:ext cx="3931920" cy="1325880"/>
+      <p:sp>
+        <p:nvSpPr>
+          <p:cNvPr id="8" name="Shape 6"/>
+          <p:cNvSpPr/>
+          <p:nvPr/>
+        </p:nvSpPr>
+        <p:spPr>
+          <a:xfrm>
+            <a:off x="548640" y="1965960"/>
+            <a:ext cx="2670048" cy="1965960"/>
           </a:xfrm>
           <a:prstGeom prst="roundRect">
             <a:avLst>
-              <a:gd name="adj" fmla="val 5517"/>
+              <a:gd name="adj" fmla="val 4651"/>
             </a:avLst>
           </a:prstGeom>
           <a:solidFill>
@@ -3404,7 +3279,7 @@
           </a:solidFill>
           <a:ln w="12700">
             <a:solidFill>
-              <a:srgbClr val="38BDF8"/>
+              <a:srgbClr val="3F3F46"/>
             </a:solidFill>
             <a:prstDash val="solid"/>
           </a:ln>
@@ -3412,14 +3287,14 @@
       </p:sp>
       <p:sp>
         <p:nvSpPr>
-          <p:cNvPr id="10" name="Text 7"/>
-          <p:cNvSpPr/>
-          <p:nvPr/>
-        </p:nvSpPr>
-        <p:spPr>
-          <a:xfrm>
-            <a:off x="7635240" y="2057400"/>
-            <a:ext cx="3657600" cy="228600"/>
+          <p:cNvPr id="9" name="Text 7"/>
+          <p:cNvSpPr/>
+          <p:nvPr/>
+        </p:nvSpPr>
+        <p:spPr>
+          <a:xfrm>
+            <a:off x="685800" y="2103120"/>
+            <a:ext cx="2395728" cy="320040"/>
           </a:xfrm>
           <a:prstGeom prst="rect">
             <a:avLst/>
@@ -3435,30 +3310,30 @@
               <a:buNone/>
             </a:pPr>
             <a:r>
-              <a:rPr lang="en-US" sz="950" b="1" dirty="0">
-                <a:solidFill>
-                  <a:srgbClr val="38BDF8"/>
-                </a:solidFill>
-                <a:latin typeface="Calibri" pitchFamily="34" charset="0"/>
-                <a:ea typeface="Calibri" pitchFamily="34" charset="-122"/>
-                <a:cs typeface="Calibri" pitchFamily="34" charset="-120"/>
-              </a:rPr>
-              <a:t>1. EDGE ROUTING &amp; SECURITY TIER</a:t>
-            </a:r>
-            <a:endParaRPr lang="en-US" sz="950" dirty="0"/>
-          </a:p>
-        </p:txBody>
-      </p:sp>
-      <p:sp>
-        <p:nvSpPr>
-          <p:cNvPr id="11" name="Text 8"/>
-          <p:cNvSpPr/>
-          <p:nvPr/>
-        </p:nvSpPr>
-        <p:spPr>
-          <a:xfrm>
-            <a:off x="7635240" y="2304288"/>
-            <a:ext cx="3657600" cy="914400"/>
+              <a:rPr lang="en-US" sz="1050" b="1" dirty="0">
+                <a:solidFill>
+                  <a:srgbClr val="FFFFFF"/>
+                </a:solidFill>
+                <a:latin typeface="Calibri" pitchFamily="34" charset="0"/>
+                <a:ea typeface="Calibri" pitchFamily="34" charset="-122"/>
+                <a:cs typeface="Calibri" pitchFamily="34" charset="-120"/>
+              </a:rPr>
+              <a:t>1. API Gateway (Port 8083)</a:t>
+            </a:r>
+            <a:endParaRPr lang="en-US" sz="1050" dirty="0"/>
+          </a:p>
+        </p:txBody>
+      </p:sp>
+      <p:sp>
+        <p:nvSpPr>
+          <p:cNvPr id="10" name="Text 8"/>
+          <p:cNvSpPr/>
+          <p:nvPr/>
+        </p:nvSpPr>
+        <p:spPr>
+          <a:xfrm>
+            <a:off x="685800" y="2468880"/>
+            <a:ext cx="2395728" cy="228600"/>
           </a:xfrm>
           <a:prstGeom prst="rect">
             <a:avLst/>
@@ -3468,6 +3343,45 @@
         </p:spPr>
         <p:txBody>
           <a:bodyPr wrap="square" rtlCol="0" anchor="ctr"/>
+          <a:lstStyle/>
+          <a:p>
+            <a:pPr indent="0" marL="0">
+              <a:buNone/>
+            </a:pPr>
+            <a:r>
+              <a:rPr lang="en-US" sz="900" b="1" dirty="0">
+                <a:solidFill>
+                  <a:srgbClr val="4ADE80"/>
+                </a:solidFill>
+                <a:latin typeface="Calibri" pitchFamily="34" charset="0"/>
+                <a:ea typeface="Calibri" pitchFamily="34" charset="-122"/>
+                <a:cs typeface="Calibri" pitchFamily="34" charset="-120"/>
+              </a:rPr>
+              <a:t>The Main Entrance</a:t>
+            </a:r>
+            <a:endParaRPr lang="en-US" sz="900" dirty="0"/>
+          </a:p>
+        </p:txBody>
+      </p:sp>
+      <p:sp>
+        <p:nvSpPr>
+          <p:cNvPr id="11" name="Text 9"/>
+          <p:cNvSpPr/>
+          <p:nvPr/>
+        </p:nvSpPr>
+        <p:spPr>
+          <a:xfrm>
+            <a:off x="685800" y="2743200"/>
+            <a:ext cx="2395728" cy="1051560"/>
+          </a:xfrm>
+          <a:prstGeom prst="rect">
+            <a:avLst/>
+          </a:prstGeom>
+          <a:noFill/>
+          <a:ln/>
+        </p:spPr>
+        <p:txBody>
+          <a:bodyPr wrap="square" rtlCol="0" anchor="t"/>
           <a:lstStyle/>
           <a:p>
             <a:pPr indent="0" marL="0">
@@ -3477,7 +3391,7 @@
               <a:buNone/>
             </a:pPr>
             <a:r>
-              <a:rPr lang="en-US" sz="800" dirty="0">
+              <a:rPr lang="en-US" sz="850" dirty="0">
                 <a:solidFill>
                   <a:srgbClr val="E4E4E7"/>
                 </a:solidFill>
@@ -3485,86 +3399,26 @@
                 <a:ea typeface="Calibri" pitchFamily="34" charset="-122"/>
                 <a:cs typeface="Calibri" pitchFamily="34" charset="-120"/>
               </a:rPr>
-              <a:t>• API Gateway (Port 8083): Spring Cloud Gateway (Netty WebFlux).</a:t>
-            </a:r>
-            <a:endParaRPr lang="en-US" sz="800" dirty="0"/>
-          </a:p>
-          <a:p>
-            <a:pPr indent="0" marL="0">
-              <a:lnSpc>
-                <a:spcPct val="115000"/>
-              </a:lnSpc>
-              <a:buNone/>
-            </a:pPr>
-            <a:r>
-              <a:rPr lang="en-US" sz="800" dirty="0">
-                <a:solidFill>
-                  <a:srgbClr val="E4E4E7"/>
-                </a:solidFill>
-                <a:latin typeface="Calibri" pitchFamily="34" charset="0"/>
-                <a:ea typeface="Calibri" pitchFamily="34" charset="-122"/>
-                <a:cs typeface="Calibri" pitchFamily="34" charset="-120"/>
-              </a:rPr>
-              <a:t>• Global JWT Filter: Enforces Bearer token verification.</a:t>
-            </a:r>
-            <a:endParaRPr lang="en-US" sz="800" dirty="0"/>
-          </a:p>
-          <a:p>
-            <a:pPr indent="0" marL="0">
-              <a:lnSpc>
-                <a:spcPct val="115000"/>
-              </a:lnSpc>
-              <a:buNone/>
-            </a:pPr>
-            <a:r>
-              <a:rPr lang="en-US" sz="800" dirty="0">
-                <a:solidFill>
-                  <a:srgbClr val="E4E4E7"/>
-                </a:solidFill>
-                <a:latin typeface="Calibri" pitchFamily="34" charset="0"/>
-                <a:ea typeface="Calibri" pitchFamily="34" charset="-122"/>
-                <a:cs typeface="Calibri" pitchFamily="34" charset="-120"/>
-              </a:rPr>
-              <a:t>• Centralized Docs Hub: Swagger UI aggregate dropdown.</a:t>
-            </a:r>
-            <a:endParaRPr lang="en-US" sz="800" dirty="0"/>
-          </a:p>
-          <a:p>
-            <a:pPr indent="0" marL="0">
-              <a:lnSpc>
-                <a:spcPct val="115000"/>
-              </a:lnSpc>
-              <a:buNone/>
-            </a:pPr>
-            <a:r>
-              <a:rPr lang="en-US" sz="800" dirty="0">
-                <a:solidFill>
-                  <a:srgbClr val="E4E4E7"/>
-                </a:solidFill>
-                <a:latin typeface="Calibri" pitchFamily="34" charset="0"/>
-                <a:ea typeface="Calibri" pitchFamily="34" charset="-122"/>
-                <a:cs typeface="Calibri" pitchFamily="34" charset="-120"/>
-              </a:rPr>
-              <a:t>• Netflix Eureka (Port 8761): Heartbeat health checks &amp; load balancing.</a:t>
-            </a:r>
-            <a:endParaRPr lang="en-US" sz="800" dirty="0"/>
-          </a:p>
-        </p:txBody>
-      </p:sp>
-      <p:sp>
-        <p:nvSpPr>
-          <p:cNvPr id="12" name="Shape 9"/>
-          <p:cNvSpPr/>
-          <p:nvPr/>
-        </p:nvSpPr>
-        <p:spPr>
-          <a:xfrm>
-            <a:off x="7498080" y="3429000"/>
-            <a:ext cx="3931920" cy="1645920"/>
+              <a:t>The front door for all incoming user requests. Forwards each request to the correct microservice automatically.</a:t>
+            </a:r>
+            <a:endParaRPr lang="en-US" sz="850" dirty="0"/>
+          </a:p>
+        </p:txBody>
+      </p:sp>
+      <p:sp>
+        <p:nvSpPr>
+          <p:cNvPr id="12" name="Shape 10"/>
+          <p:cNvSpPr/>
+          <p:nvPr/>
+        </p:nvSpPr>
+        <p:spPr>
+          <a:xfrm>
+            <a:off x="3364992" y="1965960"/>
+            <a:ext cx="2670048" cy="1965960"/>
           </a:xfrm>
           <a:prstGeom prst="roundRect">
             <a:avLst>
-              <a:gd name="adj" fmla="val 4444"/>
+              <a:gd name="adj" fmla="val 4651"/>
             </a:avLst>
           </a:prstGeom>
           <a:solidFill>
@@ -3572,7 +3426,7 @@
           </a:solidFill>
           <a:ln w="12700">
             <a:solidFill>
-              <a:srgbClr val="4ADE80"/>
+              <a:srgbClr val="3F3F46"/>
             </a:solidFill>
             <a:prstDash val="solid"/>
           </a:ln>
@@ -3580,14 +3434,14 @@
       </p:sp>
       <p:sp>
         <p:nvSpPr>
-          <p:cNvPr id="13" name="Text 10"/>
-          <p:cNvSpPr/>
-          <p:nvPr/>
-        </p:nvSpPr>
-        <p:spPr>
-          <a:xfrm>
-            <a:off x="7635240" y="3520440"/>
-            <a:ext cx="3657600" cy="228600"/>
+          <p:cNvPr id="13" name="Text 11"/>
+          <p:cNvSpPr/>
+          <p:nvPr/>
+        </p:nvSpPr>
+        <p:spPr>
+          <a:xfrm>
+            <a:off x="3502152" y="2103120"/>
+            <a:ext cx="2395728" cy="320040"/>
           </a:xfrm>
           <a:prstGeom prst="rect">
             <a:avLst/>
@@ -3603,7 +3457,46 @@
               <a:buNone/>
             </a:pPr>
             <a:r>
-              <a:rPr lang="en-US" sz="950" b="1" dirty="0">
+              <a:rPr lang="en-US" sz="1050" b="1" dirty="0">
+                <a:solidFill>
+                  <a:srgbClr val="FFFFFF"/>
+                </a:solidFill>
+                <a:latin typeface="Calibri" pitchFamily="34" charset="0"/>
+                <a:ea typeface="Calibri" pitchFamily="34" charset="-122"/>
+                <a:cs typeface="Calibri" pitchFamily="34" charset="-120"/>
+              </a:rPr>
+              <a:t>2. Service Discovery (Port 8761)</a:t>
+            </a:r>
+            <a:endParaRPr lang="en-US" sz="1050" dirty="0"/>
+          </a:p>
+        </p:txBody>
+      </p:sp>
+      <p:sp>
+        <p:nvSpPr>
+          <p:cNvPr id="14" name="Text 12"/>
+          <p:cNvSpPr/>
+          <p:nvPr/>
+        </p:nvSpPr>
+        <p:spPr>
+          <a:xfrm>
+            <a:off x="3502152" y="2468880"/>
+            <a:ext cx="2395728" cy="228600"/>
+          </a:xfrm>
+          <a:prstGeom prst="rect">
+            <a:avLst/>
+          </a:prstGeom>
+          <a:noFill/>
+          <a:ln/>
+        </p:spPr>
+        <p:txBody>
+          <a:bodyPr wrap="square" rtlCol="0" anchor="ctr"/>
+          <a:lstStyle/>
+          <a:p>
+            <a:pPr indent="0" marL="0">
+              <a:buNone/>
+            </a:pPr>
+            <a:r>
+              <a:rPr lang="en-US" sz="900" b="1" dirty="0">
                 <a:solidFill>
                   <a:srgbClr val="4ADE80"/>
                 </a:solidFill>
@@ -3611,31 +3504,31 @@
                 <a:ea typeface="Calibri" pitchFamily="34" charset="-122"/>
                 <a:cs typeface="Calibri" pitchFamily="34" charset="-120"/>
               </a:rPr>
-              <a:t>2. CORE DOMAIN MICROSERVICES (PORTS)</a:t>
-            </a:r>
-            <a:endParaRPr lang="en-US" sz="950" dirty="0"/>
-          </a:p>
-        </p:txBody>
-      </p:sp>
-      <p:sp>
-        <p:nvSpPr>
-          <p:cNvPr id="14" name="Text 11"/>
-          <p:cNvSpPr/>
-          <p:nvPr/>
-        </p:nvSpPr>
-        <p:spPr>
-          <a:xfrm>
-            <a:off x="7635240" y="3767328"/>
-            <a:ext cx="3657600" cy="1234440"/>
-          </a:xfrm>
-          <a:prstGeom prst="rect">
-            <a:avLst/>
-          </a:prstGeom>
-          <a:noFill/>
-          <a:ln/>
-        </p:spPr>
-        <p:txBody>
-          <a:bodyPr wrap="square" rtlCol="0" anchor="ctr"/>
+              <a:t>The Phonebook</a:t>
+            </a:r>
+            <a:endParaRPr lang="en-US" sz="900" dirty="0"/>
+          </a:p>
+        </p:txBody>
+      </p:sp>
+      <p:sp>
+        <p:nvSpPr>
+          <p:cNvPr id="15" name="Text 13"/>
+          <p:cNvSpPr/>
+          <p:nvPr/>
+        </p:nvSpPr>
+        <p:spPr>
+          <a:xfrm>
+            <a:off x="3502152" y="2743200"/>
+            <a:ext cx="2395728" cy="1051560"/>
+          </a:xfrm>
+          <a:prstGeom prst="rect">
+            <a:avLst/>
+          </a:prstGeom>
+          <a:noFill/>
+          <a:ln/>
+        </p:spPr>
+        <p:txBody>
+          <a:bodyPr wrap="square" rtlCol="0" anchor="t"/>
           <a:lstStyle/>
           <a:p>
             <a:pPr indent="0" marL="0">
@@ -3645,7 +3538,7 @@
               <a:buNone/>
             </a:pPr>
             <a:r>
-              <a:rPr lang="en-US" sz="800" dirty="0">
+              <a:rPr lang="en-US" sz="850" dirty="0">
                 <a:solidFill>
                   <a:srgbClr val="E4E4E7"/>
                 </a:solidFill>
@@ -3653,126 +3546,26 @@
                 <a:ea typeface="Calibri" pitchFamily="34" charset="-122"/>
                 <a:cs typeface="Calibri" pitchFamily="34" charset="-120"/>
               </a:rPr>
-              <a:t>• auth-service (8082): Identity provider, BCrypt, HMAC-SHA256 JWT.</a:t>
-            </a:r>
-            <a:endParaRPr lang="en-US" sz="800" dirty="0"/>
-          </a:p>
-          <a:p>
-            <a:pPr indent="0" marL="0">
-              <a:lnSpc>
-                <a:spcPct val="115000"/>
-              </a:lnSpc>
-              <a:buNone/>
-            </a:pPr>
-            <a:r>
-              <a:rPr lang="en-US" sz="800" dirty="0">
-                <a:solidFill>
-                  <a:srgbClr val="E4E4E7"/>
-                </a:solidFill>
-                <a:latin typeface="Calibri" pitchFamily="34" charset="0"/>
-                <a:ea typeface="Calibri" pitchFamily="34" charset="-122"/>
-                <a:cs typeface="Calibri" pitchFamily="34" charset="-120"/>
-              </a:rPr>
-              <a:t>• user-service (8084): Traveler profiles, passports, preferences.</a:t>
-            </a:r>
-            <a:endParaRPr lang="en-US" sz="800" dirty="0"/>
-          </a:p>
-          <a:p>
-            <a:pPr indent="0" marL="0">
-              <a:lnSpc>
-                <a:spcPct val="115000"/>
-              </a:lnSpc>
-              <a:buNone/>
-            </a:pPr>
-            <a:r>
-              <a:rPr lang="en-US" sz="800" dirty="0">
-                <a:solidFill>
-                  <a:srgbClr val="E4E4E7"/>
-                </a:solidFill>
-                <a:latin typeface="Calibri" pitchFamily="34" charset="0"/>
-                <a:ea typeface="Calibri" pitchFamily="34" charset="-122"/>
-                <a:cs typeface="Calibri" pitchFamily="34" charset="-120"/>
-              </a:rPr>
-              <a:t>• flight-service (8087): Fleet schedules, cabin seats, atomic locks.</a:t>
-            </a:r>
-            <a:endParaRPr lang="en-US" sz="800" dirty="0"/>
-          </a:p>
-          <a:p>
-            <a:pPr indent="0" marL="0">
-              <a:lnSpc>
-                <a:spcPct val="115000"/>
-              </a:lnSpc>
-              <a:buNone/>
-            </a:pPr>
-            <a:r>
-              <a:rPr lang="en-US" sz="800" dirty="0">
-                <a:solidFill>
-                  <a:srgbClr val="E4E4E7"/>
-                </a:solidFill>
-                <a:latin typeface="Calibri" pitchFamily="34" charset="0"/>
-                <a:ea typeface="Calibri" pitchFamily="34" charset="-122"/>
-                <a:cs typeface="Calibri" pitchFamily="34" charset="-120"/>
-              </a:rPr>
-              <a:t>• fare-service (8089): Dynamic pricing engine, surge multipliers.</a:t>
-            </a:r>
-            <a:endParaRPr lang="en-US" sz="800" dirty="0"/>
-          </a:p>
-          <a:p>
-            <a:pPr indent="0" marL="0">
-              <a:lnSpc>
-                <a:spcPct val="115000"/>
-              </a:lnSpc>
-              <a:buNone/>
-            </a:pPr>
-            <a:r>
-              <a:rPr lang="en-US" sz="800" dirty="0">
-                <a:solidFill>
-                  <a:srgbClr val="E4E4E7"/>
-                </a:solidFill>
-                <a:latin typeface="Calibri" pitchFamily="34" charset="0"/>
-                <a:ea typeface="Calibri" pitchFamily="34" charset="-122"/>
-                <a:cs typeface="Calibri" pitchFamily="34" charset="-120"/>
-              </a:rPr>
-              <a:t>• booking-service (8088): PNR orchestration, saga coordinator.</a:t>
-            </a:r>
-            <a:endParaRPr lang="en-US" sz="800" dirty="0"/>
-          </a:p>
-          <a:p>
-            <a:pPr indent="0" marL="0">
-              <a:lnSpc>
-                <a:spcPct val="115000"/>
-              </a:lnSpc>
-              <a:buNone/>
-            </a:pPr>
-            <a:r>
-              <a:rPr lang="en-US" sz="800" dirty="0">
-                <a:solidFill>
-                  <a:srgbClr val="E4E4E7"/>
-                </a:solidFill>
-                <a:latin typeface="Calibri" pitchFamily="34" charset="0"/>
-                <a:ea typeface="Calibri" pitchFamily="34" charset="-122"/>
-                <a:cs typeface="Calibri" pitchFamily="34" charset="-120"/>
-              </a:rPr>
-              <a:t>• check-in-service (8090): Web check-in, 2D QR pass generation.</a:t>
-            </a:r>
-            <a:endParaRPr lang="en-US" sz="800" dirty="0"/>
-          </a:p>
-        </p:txBody>
-      </p:sp>
-      <p:sp>
-        <p:nvSpPr>
-          <p:cNvPr id="15" name="Shape 12"/>
-          <p:cNvSpPr/>
-          <p:nvPr/>
-        </p:nvSpPr>
-        <p:spPr>
-          <a:xfrm>
-            <a:off x="7498080" y="5212080"/>
-            <a:ext cx="3931920" cy="1051560"/>
+              <a:t>Uses Netflix Eureka to keep a live list of all running microservices and their network locations.</a:t>
+            </a:r>
+            <a:endParaRPr lang="en-US" sz="850" dirty="0"/>
+          </a:p>
+        </p:txBody>
+      </p:sp>
+      <p:sp>
+        <p:nvSpPr>
+          <p:cNvPr id="16" name="Shape 14"/>
+          <p:cNvSpPr/>
+          <p:nvPr/>
+        </p:nvSpPr>
+        <p:spPr>
+          <a:xfrm>
+            <a:off x="6181344" y="1965960"/>
+            <a:ext cx="2670048" cy="1965960"/>
           </a:xfrm>
           <a:prstGeom prst="roundRect">
             <a:avLst>
-              <a:gd name="adj" fmla="val 6957"/>
+              <a:gd name="adj" fmla="val 4651"/>
             </a:avLst>
           </a:prstGeom>
           <a:solidFill>
@@ -3780,7 +3573,7 @@
           </a:solidFill>
           <a:ln w="12700">
             <a:solidFill>
-              <a:srgbClr val="C084FC"/>
+              <a:srgbClr val="3F3F46"/>
             </a:solidFill>
             <a:prstDash val="solid"/>
           </a:ln>
@@ -3788,14 +3581,14 @@
       </p:sp>
       <p:sp>
         <p:nvSpPr>
-          <p:cNvPr id="16" name="Text 13"/>
-          <p:cNvSpPr/>
-          <p:nvPr/>
-        </p:nvSpPr>
-        <p:spPr>
-          <a:xfrm>
-            <a:off x="7635240" y="5285232"/>
-            <a:ext cx="3657600" cy="201168"/>
+          <p:cNvPr id="17" name="Text 15"/>
+          <p:cNvSpPr/>
+          <p:nvPr/>
+        </p:nvSpPr>
+        <p:spPr>
+          <a:xfrm>
+            <a:off x="6318504" y="2103120"/>
+            <a:ext cx="2395728" cy="320040"/>
           </a:xfrm>
           <a:prstGeom prst="rect">
             <a:avLst/>
@@ -3811,30 +3604,30 @@
               <a:buNone/>
             </a:pPr>
             <a:r>
-              <a:rPr lang="en-US" sz="950" b="1" dirty="0">
-                <a:solidFill>
-                  <a:srgbClr val="C084FC"/>
-                </a:solidFill>
-                <a:latin typeface="Calibri" pitchFamily="34" charset="0"/>
-                <a:ea typeface="Calibri" pitchFamily="34" charset="-122"/>
-                <a:cs typeface="Calibri" pitchFamily="34" charset="-120"/>
-              </a:rPr>
-              <a:t>3. ISOLATED PERSISTENCE &amp; MESSAGING</a:t>
-            </a:r>
-            <a:endParaRPr lang="en-US" sz="950" dirty="0"/>
-          </a:p>
-        </p:txBody>
-      </p:sp>
-      <p:sp>
-        <p:nvSpPr>
-          <p:cNvPr id="17" name="Text 14"/>
-          <p:cNvSpPr/>
-          <p:nvPr/>
-        </p:nvSpPr>
-        <p:spPr>
-          <a:xfrm>
-            <a:off x="7635240" y="5504688"/>
-            <a:ext cx="3657600" cy="685800"/>
+              <a:rPr lang="en-US" sz="1050" b="1" dirty="0">
+                <a:solidFill>
+                  <a:srgbClr val="FFFFFF"/>
+                </a:solidFill>
+                <a:latin typeface="Calibri" pitchFamily="34" charset="0"/>
+                <a:ea typeface="Calibri" pitchFamily="34" charset="-122"/>
+                <a:cs typeface="Calibri" pitchFamily="34" charset="-120"/>
+              </a:rPr>
+              <a:t>3. Auth Service (Port 8082)</a:t>
+            </a:r>
+            <a:endParaRPr lang="en-US" sz="1050" dirty="0"/>
+          </a:p>
+        </p:txBody>
+      </p:sp>
+      <p:sp>
+        <p:nvSpPr>
+          <p:cNvPr id="18" name="Text 16"/>
+          <p:cNvSpPr/>
+          <p:nvPr/>
+        </p:nvSpPr>
+        <p:spPr>
+          <a:xfrm>
+            <a:off x="6318504" y="2468880"/>
+            <a:ext cx="2395728" cy="228600"/>
           </a:xfrm>
           <a:prstGeom prst="rect">
             <a:avLst/>
@@ -3844,6 +3637,45 @@
         </p:spPr>
         <p:txBody>
           <a:bodyPr wrap="square" rtlCol="0" anchor="ctr"/>
+          <a:lstStyle/>
+          <a:p>
+            <a:pPr indent="0" marL="0">
+              <a:buNone/>
+            </a:pPr>
+            <a:r>
+              <a:rPr lang="en-US" sz="900" b="1" dirty="0">
+                <a:solidFill>
+                  <a:srgbClr val="4ADE80"/>
+                </a:solidFill>
+                <a:latin typeface="Calibri" pitchFamily="34" charset="0"/>
+                <a:ea typeface="Calibri" pitchFamily="34" charset="-122"/>
+                <a:cs typeface="Calibri" pitchFamily="34" charset="-120"/>
+              </a:rPr>
+              <a:t>Security &amp; Login</a:t>
+            </a:r>
+            <a:endParaRPr lang="en-US" sz="900" dirty="0"/>
+          </a:p>
+        </p:txBody>
+      </p:sp>
+      <p:sp>
+        <p:nvSpPr>
+          <p:cNvPr id="19" name="Text 17"/>
+          <p:cNvSpPr/>
+          <p:nvPr/>
+        </p:nvSpPr>
+        <p:spPr>
+          <a:xfrm>
+            <a:off x="6318504" y="2743200"/>
+            <a:ext cx="2395728" cy="1051560"/>
+          </a:xfrm>
+          <a:prstGeom prst="rect">
+            <a:avLst/>
+          </a:prstGeom>
+          <a:noFill/>
+          <a:ln/>
+        </p:spPr>
+        <p:txBody>
+          <a:bodyPr wrap="square" rtlCol="0" anchor="t"/>
           <a:lstStyle/>
           <a:p>
             <a:pPr indent="0" marL="0">
@@ -3853,7 +3685,7 @@
               <a:buNone/>
             </a:pPr>
             <a:r>
-              <a:rPr lang="en-US" sz="800" dirty="0">
+              <a:rPr lang="en-US" sz="850" dirty="0">
                 <a:solidFill>
                   <a:srgbClr val="E4E4E7"/>
                 </a:solidFill>
@@ -3861,10 +3693,137 @@
                 <a:ea typeface="Calibri" pitchFamily="34" charset="-122"/>
                 <a:cs typeface="Calibri" pitchFamily="34" charset="-120"/>
               </a:rPr>
-              <a:t>• Database-per-Service: 6 isolated MySQL 8 schemas (Zero shared state).</a:t>
-            </a:r>
-            <a:endParaRPr lang="en-US" sz="800" dirty="0"/>
-          </a:p>
+              <a:t>Handles user registration, password encryption (BCrypt), and login authentication tokens (JWT).</a:t>
+            </a:r>
+            <a:endParaRPr lang="en-US" sz="850" dirty="0"/>
+          </a:p>
+        </p:txBody>
+      </p:sp>
+      <p:sp>
+        <p:nvSpPr>
+          <p:cNvPr id="20" name="Shape 18"/>
+          <p:cNvSpPr/>
+          <p:nvPr/>
+        </p:nvSpPr>
+        <p:spPr>
+          <a:xfrm>
+            <a:off x="8997696" y="1965960"/>
+            <a:ext cx="2670048" cy="1965960"/>
+          </a:xfrm>
+          <a:prstGeom prst="roundRect">
+            <a:avLst>
+              <a:gd name="adj" fmla="val 4651"/>
+            </a:avLst>
+          </a:prstGeom>
+          <a:solidFill>
+            <a:srgbClr val="18181B"/>
+          </a:solidFill>
+          <a:ln w="12700">
+            <a:solidFill>
+              <a:srgbClr val="3F3F46"/>
+            </a:solidFill>
+            <a:prstDash val="solid"/>
+          </a:ln>
+        </p:spPr>
+      </p:sp>
+      <p:sp>
+        <p:nvSpPr>
+          <p:cNvPr id="21" name="Text 19"/>
+          <p:cNvSpPr/>
+          <p:nvPr/>
+        </p:nvSpPr>
+        <p:spPr>
+          <a:xfrm>
+            <a:off x="9134856" y="2103120"/>
+            <a:ext cx="2395728" cy="320040"/>
+          </a:xfrm>
+          <a:prstGeom prst="rect">
+            <a:avLst/>
+          </a:prstGeom>
+          <a:noFill/>
+          <a:ln/>
+        </p:spPr>
+        <p:txBody>
+          <a:bodyPr wrap="square" rtlCol="0" anchor="ctr"/>
+          <a:lstStyle/>
+          <a:p>
+            <a:pPr indent="0" marL="0">
+              <a:buNone/>
+            </a:pPr>
+            <a:r>
+              <a:rPr lang="en-US" sz="1050" b="1" dirty="0">
+                <a:solidFill>
+                  <a:srgbClr val="FFFFFF"/>
+                </a:solidFill>
+                <a:latin typeface="Calibri" pitchFamily="34" charset="0"/>
+                <a:ea typeface="Calibri" pitchFamily="34" charset="-122"/>
+                <a:cs typeface="Calibri" pitchFamily="34" charset="-120"/>
+              </a:rPr>
+              <a:t>4. User Service (Port 8084)</a:t>
+            </a:r>
+            <a:endParaRPr lang="en-US" sz="1050" dirty="0"/>
+          </a:p>
+        </p:txBody>
+      </p:sp>
+      <p:sp>
+        <p:nvSpPr>
+          <p:cNvPr id="22" name="Text 20"/>
+          <p:cNvSpPr/>
+          <p:nvPr/>
+        </p:nvSpPr>
+        <p:spPr>
+          <a:xfrm>
+            <a:off x="9134856" y="2468880"/>
+            <a:ext cx="2395728" cy="228600"/>
+          </a:xfrm>
+          <a:prstGeom prst="rect">
+            <a:avLst/>
+          </a:prstGeom>
+          <a:noFill/>
+          <a:ln/>
+        </p:spPr>
+        <p:txBody>
+          <a:bodyPr wrap="square" rtlCol="0" anchor="ctr"/>
+          <a:lstStyle/>
+          <a:p>
+            <a:pPr indent="0" marL="0">
+              <a:buNone/>
+            </a:pPr>
+            <a:r>
+              <a:rPr lang="en-US" sz="900" b="1" dirty="0">
+                <a:solidFill>
+                  <a:srgbClr val="4ADE80"/>
+                </a:solidFill>
+                <a:latin typeface="Calibri" pitchFamily="34" charset="0"/>
+                <a:ea typeface="Calibri" pitchFamily="34" charset="-122"/>
+                <a:cs typeface="Calibri" pitchFamily="34" charset="-120"/>
+              </a:rPr>
+              <a:t>Customer Profiles</a:t>
+            </a:r>
+            <a:endParaRPr lang="en-US" sz="900" dirty="0"/>
+          </a:p>
+        </p:txBody>
+      </p:sp>
+      <p:sp>
+        <p:nvSpPr>
+          <p:cNvPr id="23" name="Text 21"/>
+          <p:cNvSpPr/>
+          <p:nvPr/>
+        </p:nvSpPr>
+        <p:spPr>
+          <a:xfrm>
+            <a:off x="9134856" y="2743200"/>
+            <a:ext cx="2395728" cy="1051560"/>
+          </a:xfrm>
+          <a:prstGeom prst="rect">
+            <a:avLst/>
+          </a:prstGeom>
+          <a:noFill/>
+          <a:ln/>
+        </p:spPr>
+        <p:txBody>
+          <a:bodyPr wrap="square" rtlCol="0" anchor="t"/>
+          <a:lstStyle/>
           <a:p>
             <a:pPr indent="0" marL="0">
               <a:lnSpc>
@@ -3873,7 +3832,7 @@
               <a:buNone/>
             </a:pPr>
             <a:r>
-              <a:rPr lang="en-US" sz="800" dirty="0">
+              <a:rPr lang="en-US" sz="850" dirty="0">
                 <a:solidFill>
                   <a:srgbClr val="E4E4E7"/>
                 </a:solidFill>
@@ -3881,10 +3840,137 @@
                 <a:ea typeface="Calibri" pitchFamily="34" charset="-122"/>
                 <a:cs typeface="Calibri" pitchFamily="34" charset="-120"/>
               </a:rPr>
-              <a:t>• RabbitMQ Message Broker (5672): AMQP topic exchange &amp; queues.</a:t>
-            </a:r>
-            <a:endParaRPr lang="en-US" sz="800" dirty="0"/>
-          </a:p>
+              <a:t>Stores customer details like first name, last name, phone number, date of birth, and nationality.</a:t>
+            </a:r>
+            <a:endParaRPr lang="en-US" sz="850" dirty="0"/>
+          </a:p>
+        </p:txBody>
+      </p:sp>
+      <p:sp>
+        <p:nvSpPr>
+          <p:cNvPr id="24" name="Shape 22"/>
+          <p:cNvSpPr/>
+          <p:nvPr/>
+        </p:nvSpPr>
+        <p:spPr>
+          <a:xfrm>
+            <a:off x="548640" y="4069080"/>
+            <a:ext cx="2670048" cy="1965960"/>
+          </a:xfrm>
+          <a:prstGeom prst="roundRect">
+            <a:avLst>
+              <a:gd name="adj" fmla="val 4651"/>
+            </a:avLst>
+          </a:prstGeom>
+          <a:solidFill>
+            <a:srgbClr val="18181B"/>
+          </a:solidFill>
+          <a:ln w="12700">
+            <a:solidFill>
+              <a:srgbClr val="3F3F46"/>
+            </a:solidFill>
+            <a:prstDash val="solid"/>
+          </a:ln>
+        </p:spPr>
+      </p:sp>
+      <p:sp>
+        <p:nvSpPr>
+          <p:cNvPr id="25" name="Text 23"/>
+          <p:cNvSpPr/>
+          <p:nvPr/>
+        </p:nvSpPr>
+        <p:spPr>
+          <a:xfrm>
+            <a:off x="685800" y="4206240"/>
+            <a:ext cx="2395728" cy="320040"/>
+          </a:xfrm>
+          <a:prstGeom prst="rect">
+            <a:avLst/>
+          </a:prstGeom>
+          <a:noFill/>
+          <a:ln/>
+        </p:spPr>
+        <p:txBody>
+          <a:bodyPr wrap="square" rtlCol="0" anchor="ctr"/>
+          <a:lstStyle/>
+          <a:p>
+            <a:pPr indent="0" marL="0">
+              <a:buNone/>
+            </a:pPr>
+            <a:r>
+              <a:rPr lang="en-US" sz="1050" b="1" dirty="0">
+                <a:solidFill>
+                  <a:srgbClr val="FFFFFF"/>
+                </a:solidFill>
+                <a:latin typeface="Calibri" pitchFamily="34" charset="0"/>
+                <a:ea typeface="Calibri" pitchFamily="34" charset="-122"/>
+                <a:cs typeface="Calibri" pitchFamily="34" charset="-120"/>
+              </a:rPr>
+              <a:t>5. Flight Service (Port 8087)</a:t>
+            </a:r>
+            <a:endParaRPr lang="en-US" sz="1050" dirty="0"/>
+          </a:p>
+        </p:txBody>
+      </p:sp>
+      <p:sp>
+        <p:nvSpPr>
+          <p:cNvPr id="26" name="Text 24"/>
+          <p:cNvSpPr/>
+          <p:nvPr/>
+        </p:nvSpPr>
+        <p:spPr>
+          <a:xfrm>
+            <a:off x="685800" y="4572000"/>
+            <a:ext cx="2395728" cy="228600"/>
+          </a:xfrm>
+          <a:prstGeom prst="rect">
+            <a:avLst/>
+          </a:prstGeom>
+          <a:noFill/>
+          <a:ln/>
+        </p:spPr>
+        <p:txBody>
+          <a:bodyPr wrap="square" rtlCol="0" anchor="ctr"/>
+          <a:lstStyle/>
+          <a:p>
+            <a:pPr indent="0" marL="0">
+              <a:buNone/>
+            </a:pPr>
+            <a:r>
+              <a:rPr lang="en-US" sz="900" b="1" dirty="0">
+                <a:solidFill>
+                  <a:srgbClr val="4ADE80"/>
+                </a:solidFill>
+                <a:latin typeface="Calibri" pitchFamily="34" charset="0"/>
+                <a:ea typeface="Calibri" pitchFamily="34" charset="-122"/>
+                <a:cs typeface="Calibri" pitchFamily="34" charset="-120"/>
+              </a:rPr>
+              <a:t>Flight Schedules</a:t>
+            </a:r>
+            <a:endParaRPr lang="en-US" sz="900" dirty="0"/>
+          </a:p>
+        </p:txBody>
+      </p:sp>
+      <p:sp>
+        <p:nvSpPr>
+          <p:cNvPr id="27" name="Text 25"/>
+          <p:cNvSpPr/>
+          <p:nvPr/>
+        </p:nvSpPr>
+        <p:spPr>
+          <a:xfrm>
+            <a:off x="685800" y="4846320"/>
+            <a:ext cx="2395728" cy="1051560"/>
+          </a:xfrm>
+          <a:prstGeom prst="rect">
+            <a:avLst/>
+          </a:prstGeom>
+          <a:noFill/>
+          <a:ln/>
+        </p:spPr>
+        <p:txBody>
+          <a:bodyPr wrap="square" rtlCol="0" anchor="t"/>
+          <a:lstStyle/>
           <a:p>
             <a:pPr indent="0" marL="0">
               <a:lnSpc>
@@ -3893,7 +3979,7 @@
               <a:buNone/>
             </a:pPr>
             <a:r>
-              <a:rPr lang="en-US" sz="800" dirty="0">
+              <a:rPr lang="en-US" sz="850" dirty="0">
                 <a:solidFill>
                   <a:srgbClr val="E4E4E7"/>
                 </a:solidFill>
@@ -3901,9 +3987,450 @@
                 <a:ea typeface="Calibri" pitchFamily="34" charset="-122"/>
                 <a:cs typeface="Calibri" pitchFamily="34" charset="-120"/>
               </a:rPr>
-              <a:t>• Asynchronous Decoupling: Non-blocking email/SMS notification delivery.</a:t>
-            </a:r>
-            <a:endParaRPr lang="en-US" sz="800" dirty="0"/>
+              <a:t>Manages airplanes, flight schedules, departure times, and live counts of available seats.</a:t>
+            </a:r>
+            <a:endParaRPr lang="en-US" sz="850" dirty="0"/>
+          </a:p>
+        </p:txBody>
+      </p:sp>
+      <p:sp>
+        <p:nvSpPr>
+          <p:cNvPr id="28" name="Shape 26"/>
+          <p:cNvSpPr/>
+          <p:nvPr/>
+        </p:nvSpPr>
+        <p:spPr>
+          <a:xfrm>
+            <a:off x="3364992" y="4069080"/>
+            <a:ext cx="2670048" cy="1965960"/>
+          </a:xfrm>
+          <a:prstGeom prst="roundRect">
+            <a:avLst>
+              <a:gd name="adj" fmla="val 4651"/>
+            </a:avLst>
+          </a:prstGeom>
+          <a:solidFill>
+            <a:srgbClr val="18181B"/>
+          </a:solidFill>
+          <a:ln w="12700">
+            <a:solidFill>
+              <a:srgbClr val="3F3F46"/>
+            </a:solidFill>
+            <a:prstDash val="solid"/>
+          </a:ln>
+        </p:spPr>
+      </p:sp>
+      <p:sp>
+        <p:nvSpPr>
+          <p:cNvPr id="29" name="Text 27"/>
+          <p:cNvSpPr/>
+          <p:nvPr/>
+        </p:nvSpPr>
+        <p:spPr>
+          <a:xfrm>
+            <a:off x="3502152" y="4206240"/>
+            <a:ext cx="2395728" cy="320040"/>
+          </a:xfrm>
+          <a:prstGeom prst="rect">
+            <a:avLst/>
+          </a:prstGeom>
+          <a:noFill/>
+          <a:ln/>
+        </p:spPr>
+        <p:txBody>
+          <a:bodyPr wrap="square" rtlCol="0" anchor="ctr"/>
+          <a:lstStyle/>
+          <a:p>
+            <a:pPr indent="0" marL="0">
+              <a:buNone/>
+            </a:pPr>
+            <a:r>
+              <a:rPr lang="en-US" sz="1050" b="1" dirty="0">
+                <a:solidFill>
+                  <a:srgbClr val="FFFFFF"/>
+                </a:solidFill>
+                <a:latin typeface="Calibri" pitchFamily="34" charset="0"/>
+                <a:ea typeface="Calibri" pitchFamily="34" charset="-122"/>
+                <a:cs typeface="Calibri" pitchFamily="34" charset="-120"/>
+              </a:rPr>
+              <a:t>6. Fare Service (Port 8089)</a:t>
+            </a:r>
+            <a:endParaRPr lang="en-US" sz="1050" dirty="0"/>
+          </a:p>
+        </p:txBody>
+      </p:sp>
+      <p:sp>
+        <p:nvSpPr>
+          <p:cNvPr id="30" name="Text 28"/>
+          <p:cNvSpPr/>
+          <p:nvPr/>
+        </p:nvSpPr>
+        <p:spPr>
+          <a:xfrm>
+            <a:off x="3502152" y="4572000"/>
+            <a:ext cx="2395728" cy="228600"/>
+          </a:xfrm>
+          <a:prstGeom prst="rect">
+            <a:avLst/>
+          </a:prstGeom>
+          <a:noFill/>
+          <a:ln/>
+        </p:spPr>
+        <p:txBody>
+          <a:bodyPr wrap="square" rtlCol="0" anchor="ctr"/>
+          <a:lstStyle/>
+          <a:p>
+            <a:pPr indent="0" marL="0">
+              <a:buNone/>
+            </a:pPr>
+            <a:r>
+              <a:rPr lang="en-US" sz="900" b="1" dirty="0">
+                <a:solidFill>
+                  <a:srgbClr val="4ADE80"/>
+                </a:solidFill>
+                <a:latin typeface="Calibri" pitchFamily="34" charset="0"/>
+                <a:ea typeface="Calibri" pitchFamily="34" charset="-122"/>
+                <a:cs typeface="Calibri" pitchFamily="34" charset="-120"/>
+              </a:rPr>
+              <a:t>Ticket Pricing</a:t>
+            </a:r>
+            <a:endParaRPr lang="en-US" sz="900" dirty="0"/>
+          </a:p>
+        </p:txBody>
+      </p:sp>
+      <p:sp>
+        <p:nvSpPr>
+          <p:cNvPr id="31" name="Text 29"/>
+          <p:cNvSpPr/>
+          <p:nvPr/>
+        </p:nvSpPr>
+        <p:spPr>
+          <a:xfrm>
+            <a:off x="3502152" y="4846320"/>
+            <a:ext cx="2395728" cy="1051560"/>
+          </a:xfrm>
+          <a:prstGeom prst="rect">
+            <a:avLst/>
+          </a:prstGeom>
+          <a:noFill/>
+          <a:ln/>
+        </p:spPr>
+        <p:txBody>
+          <a:bodyPr wrap="square" rtlCol="0" anchor="t"/>
+          <a:lstStyle/>
+          <a:p>
+            <a:pPr indent="0" marL="0">
+              <a:lnSpc>
+                <a:spcPct val="115000"/>
+              </a:lnSpc>
+              <a:buNone/>
+            </a:pPr>
+            <a:r>
+              <a:rPr lang="en-US" sz="850" dirty="0">
+                <a:solidFill>
+                  <a:srgbClr val="E4E4E7"/>
+                </a:solidFill>
+                <a:latin typeface="Calibri" pitchFamily="34" charset="0"/>
+                <a:ea typeface="Calibri" pitchFamily="34" charset="-122"/>
+                <a:cs typeface="Calibri" pitchFamily="34" charset="-120"/>
+              </a:rPr>
+              <a:t>Calculates prices for Economy, Business, and First Class seats, adding taxes and discounts.</a:t>
+            </a:r>
+            <a:endParaRPr lang="en-US" sz="850" dirty="0"/>
+          </a:p>
+        </p:txBody>
+      </p:sp>
+      <p:sp>
+        <p:nvSpPr>
+          <p:cNvPr id="32" name="Shape 30"/>
+          <p:cNvSpPr/>
+          <p:nvPr/>
+        </p:nvSpPr>
+        <p:spPr>
+          <a:xfrm>
+            <a:off x="6181344" y="4069080"/>
+            <a:ext cx="2670048" cy="1965960"/>
+          </a:xfrm>
+          <a:prstGeom prst="roundRect">
+            <a:avLst>
+              <a:gd name="adj" fmla="val 4651"/>
+            </a:avLst>
+          </a:prstGeom>
+          <a:solidFill>
+            <a:srgbClr val="18181B"/>
+          </a:solidFill>
+          <a:ln w="12700">
+            <a:solidFill>
+              <a:srgbClr val="3F3F46"/>
+            </a:solidFill>
+            <a:prstDash val="solid"/>
+          </a:ln>
+        </p:spPr>
+      </p:sp>
+      <p:sp>
+        <p:nvSpPr>
+          <p:cNvPr id="33" name="Text 31"/>
+          <p:cNvSpPr/>
+          <p:nvPr/>
+        </p:nvSpPr>
+        <p:spPr>
+          <a:xfrm>
+            <a:off x="6318504" y="4206240"/>
+            <a:ext cx="2395728" cy="320040"/>
+          </a:xfrm>
+          <a:prstGeom prst="rect">
+            <a:avLst/>
+          </a:prstGeom>
+          <a:noFill/>
+          <a:ln/>
+        </p:spPr>
+        <p:txBody>
+          <a:bodyPr wrap="square" rtlCol="0" anchor="ctr"/>
+          <a:lstStyle/>
+          <a:p>
+            <a:pPr indent="0" marL="0">
+              <a:buNone/>
+            </a:pPr>
+            <a:r>
+              <a:rPr lang="en-US" sz="1050" b="1" dirty="0">
+                <a:solidFill>
+                  <a:srgbClr val="FFFFFF"/>
+                </a:solidFill>
+                <a:latin typeface="Calibri" pitchFamily="34" charset="0"/>
+                <a:ea typeface="Calibri" pitchFamily="34" charset="-122"/>
+                <a:cs typeface="Calibri" pitchFamily="34" charset="-120"/>
+              </a:rPr>
+              <a:t>7. Booking Service (Port 8088)</a:t>
+            </a:r>
+            <a:endParaRPr lang="en-US" sz="1050" dirty="0"/>
+          </a:p>
+        </p:txBody>
+      </p:sp>
+      <p:sp>
+        <p:nvSpPr>
+          <p:cNvPr id="34" name="Text 32"/>
+          <p:cNvSpPr/>
+          <p:nvPr/>
+        </p:nvSpPr>
+        <p:spPr>
+          <a:xfrm>
+            <a:off x="6318504" y="4572000"/>
+            <a:ext cx="2395728" cy="228600"/>
+          </a:xfrm>
+          <a:prstGeom prst="rect">
+            <a:avLst/>
+          </a:prstGeom>
+          <a:noFill/>
+          <a:ln/>
+        </p:spPr>
+        <p:txBody>
+          <a:bodyPr wrap="square" rtlCol="0" anchor="ctr"/>
+          <a:lstStyle/>
+          <a:p>
+            <a:pPr indent="0" marL="0">
+              <a:buNone/>
+            </a:pPr>
+            <a:r>
+              <a:rPr lang="en-US" sz="900" b="1" dirty="0">
+                <a:solidFill>
+                  <a:srgbClr val="4ADE80"/>
+                </a:solidFill>
+                <a:latin typeface="Calibri" pitchFamily="34" charset="0"/>
+                <a:ea typeface="Calibri" pitchFamily="34" charset="-122"/>
+                <a:cs typeface="Calibri" pitchFamily="34" charset="-120"/>
+              </a:rPr>
+              <a:t>Reservation Engine</a:t>
+            </a:r>
+            <a:endParaRPr lang="en-US" sz="900" dirty="0"/>
+          </a:p>
+        </p:txBody>
+      </p:sp>
+      <p:sp>
+        <p:nvSpPr>
+          <p:cNvPr id="35" name="Text 33"/>
+          <p:cNvSpPr/>
+          <p:nvPr/>
+        </p:nvSpPr>
+        <p:spPr>
+          <a:xfrm>
+            <a:off x="6318504" y="4846320"/>
+            <a:ext cx="2395728" cy="1051560"/>
+          </a:xfrm>
+          <a:prstGeom prst="rect">
+            <a:avLst/>
+          </a:prstGeom>
+          <a:noFill/>
+          <a:ln/>
+        </p:spPr>
+        <p:txBody>
+          <a:bodyPr wrap="square" rtlCol="0" anchor="t"/>
+          <a:lstStyle/>
+          <a:p>
+            <a:pPr indent="0" marL="0">
+              <a:lnSpc>
+                <a:spcPct val="115000"/>
+              </a:lnSpc>
+              <a:buNone/>
+            </a:pPr>
+            <a:r>
+              <a:rPr lang="en-US" sz="850" dirty="0">
+                <a:solidFill>
+                  <a:srgbClr val="E4E4E7"/>
+                </a:solidFill>
+                <a:latin typeface="Calibri" pitchFamily="34" charset="0"/>
+                <a:ea typeface="Calibri" pitchFamily="34" charset="-122"/>
+                <a:cs typeface="Calibri" pitchFamily="34" charset="-120"/>
+              </a:rPr>
+              <a:t>Creates flight bookings, saves passenger details, and generates a unique PNR ticket number.</a:t>
+            </a:r>
+            <a:endParaRPr lang="en-US" sz="850" dirty="0"/>
+          </a:p>
+        </p:txBody>
+      </p:sp>
+      <p:sp>
+        <p:nvSpPr>
+          <p:cNvPr id="36" name="Shape 34"/>
+          <p:cNvSpPr/>
+          <p:nvPr/>
+        </p:nvSpPr>
+        <p:spPr>
+          <a:xfrm>
+            <a:off x="8997696" y="4069080"/>
+            <a:ext cx="2670048" cy="1965960"/>
+          </a:xfrm>
+          <a:prstGeom prst="roundRect">
+            <a:avLst>
+              <a:gd name="adj" fmla="val 4651"/>
+            </a:avLst>
+          </a:prstGeom>
+          <a:solidFill>
+            <a:srgbClr val="18181B"/>
+          </a:solidFill>
+          <a:ln w="12700">
+            <a:solidFill>
+              <a:srgbClr val="3F3F46"/>
+            </a:solidFill>
+            <a:prstDash val="solid"/>
+          </a:ln>
+        </p:spPr>
+      </p:sp>
+      <p:sp>
+        <p:nvSpPr>
+          <p:cNvPr id="37" name="Text 35"/>
+          <p:cNvSpPr/>
+          <p:nvPr/>
+        </p:nvSpPr>
+        <p:spPr>
+          <a:xfrm>
+            <a:off x="9134856" y="4206240"/>
+            <a:ext cx="2395728" cy="320040"/>
+          </a:xfrm>
+          <a:prstGeom prst="rect">
+            <a:avLst/>
+          </a:prstGeom>
+          <a:noFill/>
+          <a:ln/>
+        </p:spPr>
+        <p:txBody>
+          <a:bodyPr wrap="square" rtlCol="0" anchor="ctr"/>
+          <a:lstStyle/>
+          <a:p>
+            <a:pPr indent="0" marL="0">
+              <a:buNone/>
+            </a:pPr>
+            <a:r>
+              <a:rPr lang="en-US" sz="1050" b="1" dirty="0">
+                <a:solidFill>
+                  <a:srgbClr val="FFFFFF"/>
+                </a:solidFill>
+                <a:latin typeface="Calibri" pitchFamily="34" charset="0"/>
+                <a:ea typeface="Calibri" pitchFamily="34" charset="-122"/>
+                <a:cs typeface="Calibri" pitchFamily="34" charset="-120"/>
+              </a:rPr>
+              <a:t>8. Check-In Service (Port 8090)</a:t>
+            </a:r>
+            <a:endParaRPr lang="en-US" sz="1050" dirty="0"/>
+          </a:p>
+        </p:txBody>
+      </p:sp>
+      <p:sp>
+        <p:nvSpPr>
+          <p:cNvPr id="38" name="Text 36"/>
+          <p:cNvSpPr/>
+          <p:nvPr/>
+        </p:nvSpPr>
+        <p:spPr>
+          <a:xfrm>
+            <a:off x="9134856" y="4572000"/>
+            <a:ext cx="2395728" cy="228600"/>
+          </a:xfrm>
+          <a:prstGeom prst="rect">
+            <a:avLst/>
+          </a:prstGeom>
+          <a:noFill/>
+          <a:ln/>
+        </p:spPr>
+        <p:txBody>
+          <a:bodyPr wrap="square" rtlCol="0" anchor="ctr"/>
+          <a:lstStyle/>
+          <a:p>
+            <a:pPr indent="0" marL="0">
+              <a:buNone/>
+            </a:pPr>
+            <a:r>
+              <a:rPr lang="en-US" sz="900" b="1" dirty="0">
+                <a:solidFill>
+                  <a:srgbClr val="4ADE80"/>
+                </a:solidFill>
+                <a:latin typeface="Calibri" pitchFamily="34" charset="0"/>
+                <a:ea typeface="Calibri" pitchFamily="34" charset="-122"/>
+                <a:cs typeface="Calibri" pitchFamily="34" charset="-120"/>
+              </a:rPr>
+              <a:t>Airport Web Check-In</a:t>
+            </a:r>
+            <a:endParaRPr lang="en-US" sz="900" dirty="0"/>
+          </a:p>
+        </p:txBody>
+      </p:sp>
+      <p:sp>
+        <p:nvSpPr>
+          <p:cNvPr id="39" name="Text 37"/>
+          <p:cNvSpPr/>
+          <p:nvPr/>
+        </p:nvSpPr>
+        <p:spPr>
+          <a:xfrm>
+            <a:off x="9134856" y="4846320"/>
+            <a:ext cx="2395728" cy="1051560"/>
+          </a:xfrm>
+          <a:prstGeom prst="rect">
+            <a:avLst/>
+          </a:prstGeom>
+          <a:noFill/>
+          <a:ln/>
+        </p:spPr>
+        <p:txBody>
+          <a:bodyPr wrap="square" rtlCol="0" anchor="t"/>
+          <a:lstStyle/>
+          <a:p>
+            <a:pPr indent="0" marL="0">
+              <a:lnSpc>
+                <a:spcPct val="115000"/>
+              </a:lnSpc>
+              <a:buNone/>
+            </a:pPr>
+            <a:r>
+              <a:rPr lang="en-US" sz="850" dirty="0">
+                <a:solidFill>
+                  <a:srgbClr val="E4E4E7"/>
+                </a:solidFill>
+                <a:latin typeface="Calibri" pitchFamily="34" charset="0"/>
+                <a:ea typeface="Calibri" pitchFamily="34" charset="-122"/>
+                <a:cs typeface="Calibri" pitchFamily="34" charset="-120"/>
+              </a:rPr>
+              <a:t>Lets passengers pick their seat (e.g. 12A) and get a digital boarding pass with a scannable QR code.</a:t>
+            </a:r>
+            <a:endParaRPr lang="en-US" sz="850" dirty="0"/>
           </a:p>
         </p:txBody>
       </p:sp>
@@ -3973,7 +4500,7 @@
         <p:spPr>
           <a:xfrm>
             <a:off x="548640" y="411480"/>
-            <a:ext cx="2377440" cy="320040"/>
+            <a:ext cx="2286000" cy="320040"/>
           </a:xfrm>
           <a:prstGeom prst="roundRect">
             <a:avLst>
@@ -4000,7 +4527,7 @@
         <p:spPr>
           <a:xfrm>
             <a:off x="548640" y="411480"/>
-            <a:ext cx="2377440" cy="320040"/>
+            <a:ext cx="2286000" cy="320040"/>
           </a:xfrm>
           <a:prstGeom prst="rect">
             <a:avLst/>
@@ -4024,7 +4551,7 @@
                 <a:ea typeface="Calibri" pitchFamily="34" charset="-122"/>
                 <a:cs typeface="Calibri" pitchFamily="34" charset="-120"/>
               </a:rPr>
-              <a:t>TECHNICAL EXCELLENCE</a:t>
+              <a:t>WORKFLOW</a:t>
             </a:r>
             <a:endParaRPr lang="en-US" sz="900" dirty="0"/>
           </a:p>
@@ -4039,7 +4566,7 @@
         <p:spPr>
           <a:xfrm>
             <a:off x="548640" y="822960"/>
-            <a:ext cx="10515600" cy="594360"/>
+            <a:ext cx="10515600" cy="548640"/>
           </a:xfrm>
           <a:prstGeom prst="rect">
             <a:avLst/>
@@ -4063,7 +4590,7 @@
                 <a:ea typeface="Calibri" pitchFamily="34" charset="-122"/>
                 <a:cs typeface="Calibri" pitchFamily="34" charset="-120"/>
               </a:rPr>
-              <a:t>Key Technical Highlights &amp; Data Architecture</a:t>
+              <a:t>How AeroBook Works: Step-by-Step</a:t>
             </a:r>
             <a:endParaRPr lang="en-US" sz="2200" dirty="0"/>
           </a:p>
@@ -4096,13 +4623,13 @@
             <a:r>
               <a:rPr lang="en-US" sz="1100" dirty="0">
                 <a:solidFill>
-                  <a:srgbClr val="A1A1AA"/>
-                </a:solidFill>
-                <a:latin typeface="Calibri" pitchFamily="34" charset="0"/>
-                <a:ea typeface="Calibri" pitchFamily="34" charset="-122"/>
-                <a:cs typeface="Calibri" pitchFamily="34" charset="-120"/>
-              </a:rPr>
-              <a:t>Deep architectural deep dive into transactional sagas, event-driven messaging, and data governance</a:t>
+                  <a:srgbClr val="38BDF8"/>
+                </a:solidFill>
+                <a:latin typeface="Calibri" pitchFamily="34" charset="0"/>
+                <a:ea typeface="Calibri" pitchFamily="34" charset="-122"/>
+                <a:cs typeface="Calibri" pitchFamily="34" charset="-120"/>
+              </a:rPr>
+              <a:t>A Simple Walkthrough of the Customer Journey from Search to Boarding Pass</a:t>
             </a:r>
             <a:endParaRPr lang="en-US" sz="1100" dirty="0"/>
           </a:p>
@@ -4139,18 +4666,45 @@
         </p:nvSpPr>
         <p:spPr>
           <a:xfrm>
-            <a:off x="731520" y="1965960"/>
-            <a:ext cx="2514600" cy="4251960"/>
+            <a:off x="548640" y="1965960"/>
+            <a:ext cx="3584448" cy="1965960"/>
           </a:xfrm>
           <a:prstGeom prst="roundRect">
             <a:avLst>
-              <a:gd name="adj" fmla="val 3636"/>
+              <a:gd name="adj" fmla="val 4651"/>
             </a:avLst>
           </a:prstGeom>
           <a:solidFill>
             <a:srgbClr val="18181B"/>
           </a:solidFill>
-          <a:ln w="19050">
+          <a:ln w="12700">
+            <a:solidFill>
+              <a:srgbClr val="3F3F46"/>
+            </a:solidFill>
+            <a:prstDash val="solid"/>
+          </a:ln>
+        </p:spPr>
+      </p:sp>
+      <p:sp>
+        <p:nvSpPr>
+          <p:cNvPr id="9" name="Shape 7"/>
+          <p:cNvSpPr/>
+          <p:nvPr/>
+        </p:nvSpPr>
+        <p:spPr>
+          <a:xfrm>
+            <a:off x="685800" y="2103120"/>
+            <a:ext cx="914400" cy="256032"/>
+          </a:xfrm>
+          <a:prstGeom prst="roundRect">
+            <a:avLst>
+              <a:gd name="adj" fmla="val 17857"/>
+            </a:avLst>
+          </a:prstGeom>
+          <a:solidFill>
+            <a:srgbClr val="27272A"/>
+          </a:solidFill>
+          <a:ln w="10160">
             <a:solidFill>
               <a:srgbClr val="38BDF8"/>
             </a:solidFill>
@@ -4160,14 +4714,14 @@
       </p:sp>
       <p:sp>
         <p:nvSpPr>
-          <p:cNvPr id="9" name="Text 7"/>
-          <p:cNvSpPr/>
-          <p:nvPr/>
-        </p:nvSpPr>
-        <p:spPr>
-          <a:xfrm>
-            <a:off x="868680" y="2148840"/>
-            <a:ext cx="2240280" cy="548640"/>
+          <p:cNvPr id="10" name="Text 8"/>
+          <p:cNvSpPr/>
+          <p:nvPr/>
+        </p:nvSpPr>
+        <p:spPr>
+          <a:xfrm>
+            <a:off x="685800" y="2103120"/>
+            <a:ext cx="914400" cy="256032"/>
           </a:xfrm>
           <a:prstGeom prst="rect">
             <a:avLst/>
@@ -4179,60 +4733,82 @@
           <a:bodyPr wrap="square" rtlCol="0" anchor="ctr"/>
           <a:lstStyle/>
           <a:p>
+            <a:pPr algn="ctr" indent="0" marL="0">
+              <a:buNone/>
+            </a:pPr>
+            <a:r>
+              <a:rPr lang="en-US" sz="850" b="1" dirty="0">
+                <a:solidFill>
+                  <a:srgbClr val="38BDF8"/>
+                </a:solidFill>
+                <a:latin typeface="Calibri" pitchFamily="34" charset="0"/>
+                <a:ea typeface="Calibri" pitchFamily="34" charset="-122"/>
+                <a:cs typeface="Calibri" pitchFamily="34" charset="-120"/>
+              </a:rPr>
+              <a:t>Step 1</a:t>
+            </a:r>
+            <a:endParaRPr lang="en-US" sz="850" dirty="0"/>
+          </a:p>
+        </p:txBody>
+      </p:sp>
+      <p:sp>
+        <p:nvSpPr>
+          <p:cNvPr id="11" name="Text 9"/>
+          <p:cNvSpPr/>
+          <p:nvPr/>
+        </p:nvSpPr>
+        <p:spPr>
+          <a:xfrm>
+            <a:off x="1691640" y="2103120"/>
+            <a:ext cx="2286000" cy="256032"/>
+          </a:xfrm>
+          <a:prstGeom prst="rect">
+            <a:avLst/>
+          </a:prstGeom>
+          <a:noFill/>
+          <a:ln/>
+        </p:spPr>
+        <p:txBody>
+          <a:bodyPr wrap="square" rtlCol="0" anchor="ctr"/>
+          <a:lstStyle/>
+          <a:p>
             <a:pPr indent="0" marL="0">
               <a:buNone/>
             </a:pPr>
             <a:r>
               <a:rPr lang="en-US" sz="1100" b="1" dirty="0">
                 <a:solidFill>
-                  <a:srgbClr val="38BDF8"/>
-                </a:solidFill>
-                <a:latin typeface="Calibri" pitchFamily="34" charset="0"/>
-                <a:ea typeface="Calibri" pitchFamily="34" charset="-122"/>
-                <a:cs typeface="Calibri" pitchFamily="34" charset="-120"/>
-              </a:rPr>
-              <a:t>DATABASE-PER-SERVICE</a:t>
+                  <a:srgbClr val="FFFFFF"/>
+                </a:solidFill>
+                <a:latin typeface="Calibri" pitchFamily="34" charset="0"/>
+                <a:ea typeface="Calibri" pitchFamily="34" charset="-122"/>
+                <a:cs typeface="Calibri" pitchFamily="34" charset="-120"/>
+              </a:rPr>
+              <a:t>Search Flights</a:t>
             </a:r>
             <a:endParaRPr lang="en-US" sz="1100" dirty="0"/>
           </a:p>
-          <a:p>
-            <a:pPr indent="0" marL="0">
-              <a:buNone/>
-            </a:pPr>
-            <a:r>
-              <a:rPr lang="en-US" sz="1100" b="1" dirty="0">
-                <a:solidFill>
-                  <a:srgbClr val="38BDF8"/>
-                </a:solidFill>
-                <a:latin typeface="Calibri" pitchFamily="34" charset="0"/>
-                <a:ea typeface="Calibri" pitchFamily="34" charset="-122"/>
-                <a:cs typeface="Calibri" pitchFamily="34" charset="-120"/>
-              </a:rPr>
-              <a:t>ISOLATION PATTERN</a:t>
-            </a:r>
-            <a:endParaRPr lang="en-US" sz="1100" dirty="0"/>
-          </a:p>
-        </p:txBody>
-      </p:sp>
-      <p:sp>
-        <p:nvSpPr>
-          <p:cNvPr id="10" name="Text 8"/>
-          <p:cNvSpPr/>
-          <p:nvPr/>
-        </p:nvSpPr>
-        <p:spPr>
-          <a:xfrm>
-            <a:off x="868680" y="2743200"/>
-            <a:ext cx="2240280" cy="3291840"/>
-          </a:xfrm>
-          <a:prstGeom prst="rect">
-            <a:avLst/>
-          </a:prstGeom>
-          <a:noFill/>
-          <a:ln/>
-        </p:spPr>
-        <p:txBody>
-          <a:bodyPr wrap="square" rtlCol="0" anchor="ctr"/>
+        </p:txBody>
+      </p:sp>
+      <p:sp>
+        <p:nvSpPr>
+          <p:cNvPr id="12" name="Text 10"/>
+          <p:cNvSpPr/>
+          <p:nvPr/>
+        </p:nvSpPr>
+        <p:spPr>
+          <a:xfrm>
+            <a:off x="685800" y="2468880"/>
+            <a:ext cx="3291840" cy="1325880"/>
+          </a:xfrm>
+          <a:prstGeom prst="rect">
+            <a:avLst/>
+          </a:prstGeom>
+          <a:noFill/>
+          <a:ln/>
+        </p:spPr>
+        <p:txBody>
+          <a:bodyPr wrap="square" rtlCol="0" anchor="t"/>
           <a:lstStyle/>
           <a:p>
             <a:pPr indent="0" marL="0">
@@ -4242,7 +4818,7 @@
               <a:buNone/>
             </a:pPr>
             <a:r>
-              <a:rPr lang="en-US" sz="850" dirty="0">
+              <a:rPr lang="en-US" sz="900" dirty="0">
                 <a:solidFill>
                   <a:srgbClr val="E4E4E7"/>
                 </a:solidFill>
@@ -4250,10 +4826,164 @@
                 <a:ea typeface="Calibri" pitchFamily="34" charset="-122"/>
                 <a:cs typeface="Calibri" pitchFamily="34" charset="-120"/>
               </a:rPr>
-              <a:t>• 6 Isolated Schemas:</a:t>
+              <a:t>Passenger enters origin city, destination, and travel date. System displays all available flights with live prices.</a:t>
+            </a:r>
+            <a:endParaRPr lang="en-US" sz="900" dirty="0"/>
+          </a:p>
+        </p:txBody>
+      </p:sp>
+      <p:sp>
+        <p:nvSpPr>
+          <p:cNvPr id="13" name="Shape 11"/>
+          <p:cNvSpPr/>
+          <p:nvPr/>
+        </p:nvSpPr>
+        <p:spPr>
+          <a:xfrm>
+            <a:off x="4315968" y="1965960"/>
+            <a:ext cx="3584448" cy="1965960"/>
+          </a:xfrm>
+          <a:prstGeom prst="roundRect">
+            <a:avLst>
+              <a:gd name="adj" fmla="val 4651"/>
+            </a:avLst>
+          </a:prstGeom>
+          <a:solidFill>
+            <a:srgbClr val="18181B"/>
+          </a:solidFill>
+          <a:ln w="12700">
+            <a:solidFill>
+              <a:srgbClr val="3F3F46"/>
+            </a:solidFill>
+            <a:prstDash val="solid"/>
+          </a:ln>
+        </p:spPr>
+      </p:sp>
+      <p:sp>
+        <p:nvSpPr>
+          <p:cNvPr id="14" name="Shape 12"/>
+          <p:cNvSpPr/>
+          <p:nvPr/>
+        </p:nvSpPr>
+        <p:spPr>
+          <a:xfrm>
+            <a:off x="4453128" y="2103120"/>
+            <a:ext cx="914400" cy="256032"/>
+          </a:xfrm>
+          <a:prstGeom prst="roundRect">
+            <a:avLst>
+              <a:gd name="adj" fmla="val 17857"/>
+            </a:avLst>
+          </a:prstGeom>
+          <a:solidFill>
+            <a:srgbClr val="27272A"/>
+          </a:solidFill>
+          <a:ln w="10160">
+            <a:solidFill>
+              <a:srgbClr val="38BDF8"/>
+            </a:solidFill>
+            <a:prstDash val="solid"/>
+          </a:ln>
+        </p:spPr>
+      </p:sp>
+      <p:sp>
+        <p:nvSpPr>
+          <p:cNvPr id="15" name="Text 13"/>
+          <p:cNvSpPr/>
+          <p:nvPr/>
+        </p:nvSpPr>
+        <p:spPr>
+          <a:xfrm>
+            <a:off x="4453128" y="2103120"/>
+            <a:ext cx="914400" cy="256032"/>
+          </a:xfrm>
+          <a:prstGeom prst="rect">
+            <a:avLst/>
+          </a:prstGeom>
+          <a:noFill/>
+          <a:ln/>
+        </p:spPr>
+        <p:txBody>
+          <a:bodyPr wrap="square" rtlCol="0" anchor="ctr"/>
+          <a:lstStyle/>
+          <a:p>
+            <a:pPr algn="ctr" indent="0" marL="0">
+              <a:buNone/>
+            </a:pPr>
+            <a:r>
+              <a:rPr lang="en-US" sz="850" b="1" dirty="0">
+                <a:solidFill>
+                  <a:srgbClr val="38BDF8"/>
+                </a:solidFill>
+                <a:latin typeface="Calibri" pitchFamily="34" charset="0"/>
+                <a:ea typeface="Calibri" pitchFamily="34" charset="-122"/>
+                <a:cs typeface="Calibri" pitchFamily="34" charset="-120"/>
+              </a:rPr>
+              <a:t>Step 2</a:t>
             </a:r>
             <a:endParaRPr lang="en-US" sz="850" dirty="0"/>
           </a:p>
+        </p:txBody>
+      </p:sp>
+      <p:sp>
+        <p:nvSpPr>
+          <p:cNvPr id="16" name="Text 14"/>
+          <p:cNvSpPr/>
+          <p:nvPr/>
+        </p:nvSpPr>
+        <p:spPr>
+          <a:xfrm>
+            <a:off x="5458968" y="2103120"/>
+            <a:ext cx="2286000" cy="256032"/>
+          </a:xfrm>
+          <a:prstGeom prst="rect">
+            <a:avLst/>
+          </a:prstGeom>
+          <a:noFill/>
+          <a:ln/>
+        </p:spPr>
+        <p:txBody>
+          <a:bodyPr wrap="square" rtlCol="0" anchor="ctr"/>
+          <a:lstStyle/>
+          <a:p>
+            <a:pPr indent="0" marL="0">
+              <a:buNone/>
+            </a:pPr>
+            <a:r>
+              <a:rPr lang="en-US" sz="1100" b="1" dirty="0">
+                <a:solidFill>
+                  <a:srgbClr val="FFFFFF"/>
+                </a:solidFill>
+                <a:latin typeface="Calibri" pitchFamily="34" charset="0"/>
+                <a:ea typeface="Calibri" pitchFamily="34" charset="-122"/>
+                <a:cs typeface="Calibri" pitchFamily="34" charset="-120"/>
+              </a:rPr>
+              <a:t>Select &amp; Add Passengers</a:t>
+            </a:r>
+            <a:endParaRPr lang="en-US" sz="1100" dirty="0"/>
+          </a:p>
+        </p:txBody>
+      </p:sp>
+      <p:sp>
+        <p:nvSpPr>
+          <p:cNvPr id="17" name="Text 15"/>
+          <p:cNvSpPr/>
+          <p:nvPr/>
+        </p:nvSpPr>
+        <p:spPr>
+          <a:xfrm>
+            <a:off x="4453128" y="2468880"/>
+            <a:ext cx="3291840" cy="1325880"/>
+          </a:xfrm>
+          <a:prstGeom prst="rect">
+            <a:avLst/>
+          </a:prstGeom>
+          <a:noFill/>
+          <a:ln/>
+        </p:spPr>
+        <p:txBody>
+          <a:bodyPr wrap="square" rtlCol="0" anchor="t"/>
+          <a:lstStyle/>
           <a:p>
             <a:pPr indent="0" marL="0">
               <a:lnSpc>
@@ -4262,7 +4992,7 @@
               <a:buNone/>
             </a:pPr>
             <a:r>
-              <a:rPr lang="en-US" sz="850" dirty="0">
+              <a:rPr lang="en-US" sz="900" dirty="0">
                 <a:solidFill>
                   <a:srgbClr val="E4E4E7"/>
                 </a:solidFill>
@@ -4270,10 +5000,164 @@
                 <a:ea typeface="Calibri" pitchFamily="34" charset="-122"/>
                 <a:cs typeface="Calibri" pitchFamily="34" charset="-120"/>
               </a:rPr>
-              <a:t>aerobook_auth_db, flight_db, booking_db, user_db, fare_db, checkin_db.</a:t>
+              <a:t>Passenger picks a flight, chooses Economy or Business class, and fills in passenger names and ages.</a:t>
+            </a:r>
+            <a:endParaRPr lang="en-US" sz="900" dirty="0"/>
+          </a:p>
+        </p:txBody>
+      </p:sp>
+      <p:sp>
+        <p:nvSpPr>
+          <p:cNvPr id="18" name="Shape 16"/>
+          <p:cNvSpPr/>
+          <p:nvPr/>
+        </p:nvSpPr>
+        <p:spPr>
+          <a:xfrm>
+            <a:off x="8083296" y="1965960"/>
+            <a:ext cx="3584448" cy="1965960"/>
+          </a:xfrm>
+          <a:prstGeom prst="roundRect">
+            <a:avLst>
+              <a:gd name="adj" fmla="val 4651"/>
+            </a:avLst>
+          </a:prstGeom>
+          <a:solidFill>
+            <a:srgbClr val="18181B"/>
+          </a:solidFill>
+          <a:ln w="12700">
+            <a:solidFill>
+              <a:srgbClr val="3F3F46"/>
+            </a:solidFill>
+            <a:prstDash val="solid"/>
+          </a:ln>
+        </p:spPr>
+      </p:sp>
+      <p:sp>
+        <p:nvSpPr>
+          <p:cNvPr id="19" name="Shape 17"/>
+          <p:cNvSpPr/>
+          <p:nvPr/>
+        </p:nvSpPr>
+        <p:spPr>
+          <a:xfrm>
+            <a:off x="8220456" y="2103120"/>
+            <a:ext cx="914400" cy="256032"/>
+          </a:xfrm>
+          <a:prstGeom prst="roundRect">
+            <a:avLst>
+              <a:gd name="adj" fmla="val 17857"/>
+            </a:avLst>
+          </a:prstGeom>
+          <a:solidFill>
+            <a:srgbClr val="27272A"/>
+          </a:solidFill>
+          <a:ln w="10160">
+            <a:solidFill>
+              <a:srgbClr val="38BDF8"/>
+            </a:solidFill>
+            <a:prstDash val="solid"/>
+          </a:ln>
+        </p:spPr>
+      </p:sp>
+      <p:sp>
+        <p:nvSpPr>
+          <p:cNvPr id="20" name="Text 18"/>
+          <p:cNvSpPr/>
+          <p:nvPr/>
+        </p:nvSpPr>
+        <p:spPr>
+          <a:xfrm>
+            <a:off x="8220456" y="2103120"/>
+            <a:ext cx="914400" cy="256032"/>
+          </a:xfrm>
+          <a:prstGeom prst="rect">
+            <a:avLst/>
+          </a:prstGeom>
+          <a:noFill/>
+          <a:ln/>
+        </p:spPr>
+        <p:txBody>
+          <a:bodyPr wrap="square" rtlCol="0" anchor="ctr"/>
+          <a:lstStyle/>
+          <a:p>
+            <a:pPr algn="ctr" indent="0" marL="0">
+              <a:buNone/>
+            </a:pPr>
+            <a:r>
+              <a:rPr lang="en-US" sz="850" b="1" dirty="0">
+                <a:solidFill>
+                  <a:srgbClr val="38BDF8"/>
+                </a:solidFill>
+                <a:latin typeface="Calibri" pitchFamily="34" charset="0"/>
+                <a:ea typeface="Calibri" pitchFamily="34" charset="-122"/>
+                <a:cs typeface="Calibri" pitchFamily="34" charset="-120"/>
+              </a:rPr>
+              <a:t>Step 3</a:t>
             </a:r>
             <a:endParaRPr lang="en-US" sz="850" dirty="0"/>
           </a:p>
+        </p:txBody>
+      </p:sp>
+      <p:sp>
+        <p:nvSpPr>
+          <p:cNvPr id="21" name="Text 19"/>
+          <p:cNvSpPr/>
+          <p:nvPr/>
+        </p:nvSpPr>
+        <p:spPr>
+          <a:xfrm>
+            <a:off x="9226296" y="2103120"/>
+            <a:ext cx="2286000" cy="256032"/>
+          </a:xfrm>
+          <a:prstGeom prst="rect">
+            <a:avLst/>
+          </a:prstGeom>
+          <a:noFill/>
+          <a:ln/>
+        </p:spPr>
+        <p:txBody>
+          <a:bodyPr wrap="square" rtlCol="0" anchor="ctr"/>
+          <a:lstStyle/>
+          <a:p>
+            <a:pPr indent="0" marL="0">
+              <a:buNone/>
+            </a:pPr>
+            <a:r>
+              <a:rPr lang="en-US" sz="1100" b="1" dirty="0">
+                <a:solidFill>
+                  <a:srgbClr val="FFFFFF"/>
+                </a:solidFill>
+                <a:latin typeface="Calibri" pitchFamily="34" charset="0"/>
+                <a:ea typeface="Calibri" pitchFamily="34" charset="-122"/>
+                <a:cs typeface="Calibri" pitchFamily="34" charset="-120"/>
+              </a:rPr>
+              <a:t>Seat Check (No Double Booking)</a:t>
+            </a:r>
+            <a:endParaRPr lang="en-US" sz="1100" dirty="0"/>
+          </a:p>
+        </p:txBody>
+      </p:sp>
+      <p:sp>
+        <p:nvSpPr>
+          <p:cNvPr id="22" name="Text 20"/>
+          <p:cNvSpPr/>
+          <p:nvPr/>
+        </p:nvSpPr>
+        <p:spPr>
+          <a:xfrm>
+            <a:off x="8220456" y="2468880"/>
+            <a:ext cx="3291840" cy="1325880"/>
+          </a:xfrm>
+          <a:prstGeom prst="rect">
+            <a:avLst/>
+          </a:prstGeom>
+          <a:noFill/>
+          <a:ln/>
+        </p:spPr>
+        <p:txBody>
+          <a:bodyPr wrap="square" rtlCol="0" anchor="t"/>
+          <a:lstStyle/>
           <a:p>
             <a:pPr indent="0" marL="0">
               <a:lnSpc>
@@ -4281,8 +5165,173 @@
               </a:lnSpc>
               <a:buNone/>
             </a:pPr>
+            <a:r>
+              <a:rPr lang="en-US" sz="900" dirty="0">
+                <a:solidFill>
+                  <a:srgbClr val="E4E4E7"/>
+                </a:solidFill>
+                <a:latin typeface="Calibri" pitchFamily="34" charset="0"/>
+                <a:ea typeface="Calibri" pitchFamily="34" charset="-122"/>
+                <a:cs typeface="Calibri" pitchFamily="34" charset="-120"/>
+              </a:rPr>
+              <a:t>Before confirming, Flight Service checks available seats. If seats are left, it safely reserves them so no one else can take them.</a:t>
+            </a:r>
+            <a:endParaRPr lang="en-US" sz="900" dirty="0"/>
+          </a:p>
+        </p:txBody>
+      </p:sp>
+      <p:sp>
+        <p:nvSpPr>
+          <p:cNvPr id="23" name="Shape 21"/>
+          <p:cNvSpPr/>
+          <p:nvPr/>
+        </p:nvSpPr>
+        <p:spPr>
+          <a:xfrm>
+            <a:off x="548640" y="4069080"/>
+            <a:ext cx="3584448" cy="1965960"/>
+          </a:xfrm>
+          <a:prstGeom prst="roundRect">
+            <a:avLst>
+              <a:gd name="adj" fmla="val 4651"/>
+            </a:avLst>
+          </a:prstGeom>
+          <a:solidFill>
+            <a:srgbClr val="18181B"/>
+          </a:solidFill>
+          <a:ln w="12700">
+            <a:solidFill>
+              <a:srgbClr val="3F3F46"/>
+            </a:solidFill>
+            <a:prstDash val="solid"/>
+          </a:ln>
+        </p:spPr>
+      </p:sp>
+      <p:sp>
+        <p:nvSpPr>
+          <p:cNvPr id="24" name="Shape 22"/>
+          <p:cNvSpPr/>
+          <p:nvPr/>
+        </p:nvSpPr>
+        <p:spPr>
+          <a:xfrm>
+            <a:off x="685800" y="4206240"/>
+            <a:ext cx="914400" cy="256032"/>
+          </a:xfrm>
+          <a:prstGeom prst="roundRect">
+            <a:avLst>
+              <a:gd name="adj" fmla="val 17857"/>
+            </a:avLst>
+          </a:prstGeom>
+          <a:solidFill>
+            <a:srgbClr val="27272A"/>
+          </a:solidFill>
+          <a:ln w="10160">
+            <a:solidFill>
+              <a:srgbClr val="38BDF8"/>
+            </a:solidFill>
+            <a:prstDash val="solid"/>
+          </a:ln>
+        </p:spPr>
+      </p:sp>
+      <p:sp>
+        <p:nvSpPr>
+          <p:cNvPr id="25" name="Text 23"/>
+          <p:cNvSpPr/>
+          <p:nvPr/>
+        </p:nvSpPr>
+        <p:spPr>
+          <a:xfrm>
+            <a:off x="685800" y="4206240"/>
+            <a:ext cx="914400" cy="256032"/>
+          </a:xfrm>
+          <a:prstGeom prst="rect">
+            <a:avLst/>
+          </a:prstGeom>
+          <a:noFill/>
+          <a:ln/>
+        </p:spPr>
+        <p:txBody>
+          <a:bodyPr wrap="square" rtlCol="0" anchor="ctr"/>
+          <a:lstStyle/>
+          <a:p>
+            <a:pPr algn="ctr" indent="0" marL="0">
+              <a:buNone/>
+            </a:pPr>
+            <a:r>
+              <a:rPr lang="en-US" sz="850" b="1" dirty="0">
+                <a:solidFill>
+                  <a:srgbClr val="38BDF8"/>
+                </a:solidFill>
+                <a:latin typeface="Calibri" pitchFamily="34" charset="0"/>
+                <a:ea typeface="Calibri" pitchFamily="34" charset="-122"/>
+                <a:cs typeface="Calibri" pitchFamily="34" charset="-120"/>
+              </a:rPr>
+              <a:t>Step 4</a:t>
+            </a:r>
             <a:endParaRPr lang="en-US" sz="850" dirty="0"/>
           </a:p>
+        </p:txBody>
+      </p:sp>
+      <p:sp>
+        <p:nvSpPr>
+          <p:cNvPr id="26" name="Text 24"/>
+          <p:cNvSpPr/>
+          <p:nvPr/>
+        </p:nvSpPr>
+        <p:spPr>
+          <a:xfrm>
+            <a:off x="1691640" y="4206240"/>
+            <a:ext cx="2286000" cy="256032"/>
+          </a:xfrm>
+          <a:prstGeom prst="rect">
+            <a:avLst/>
+          </a:prstGeom>
+          <a:noFill/>
+          <a:ln/>
+        </p:spPr>
+        <p:txBody>
+          <a:bodyPr wrap="square" rtlCol="0" anchor="ctr"/>
+          <a:lstStyle/>
+          <a:p>
+            <a:pPr indent="0" marL="0">
+              <a:buNone/>
+            </a:pPr>
+            <a:r>
+              <a:rPr lang="en-US" sz="1100" b="1" dirty="0">
+                <a:solidFill>
+                  <a:srgbClr val="FFFFFF"/>
+                </a:solidFill>
+                <a:latin typeface="Calibri" pitchFamily="34" charset="0"/>
+                <a:ea typeface="Calibri" pitchFamily="34" charset="-122"/>
+                <a:cs typeface="Calibri" pitchFamily="34" charset="-120"/>
+              </a:rPr>
+              <a:t>Instant PNR Generation</a:t>
+            </a:r>
+            <a:endParaRPr lang="en-US" sz="1100" dirty="0"/>
+          </a:p>
+        </p:txBody>
+      </p:sp>
+      <p:sp>
+        <p:nvSpPr>
+          <p:cNvPr id="27" name="Text 25"/>
+          <p:cNvSpPr/>
+          <p:nvPr/>
+        </p:nvSpPr>
+        <p:spPr>
+          <a:xfrm>
+            <a:off x="685800" y="4572000"/>
+            <a:ext cx="3291840" cy="1325880"/>
+          </a:xfrm>
+          <a:prstGeom prst="rect">
+            <a:avLst/>
+          </a:prstGeom>
+          <a:noFill/>
+          <a:ln/>
+        </p:spPr>
+        <p:txBody>
+          <a:bodyPr wrap="square" rtlCol="0" anchor="t"/>
+          <a:lstStyle/>
           <a:p>
             <a:pPr indent="0" marL="0">
               <a:lnSpc>
@@ -4291,7 +5340,7 @@
               <a:buNone/>
             </a:pPr>
             <a:r>
-              <a:rPr lang="en-US" sz="850" dirty="0">
+              <a:rPr lang="en-US" sz="900" dirty="0">
                 <a:solidFill>
                   <a:srgbClr val="E4E4E7"/>
                 </a:solidFill>
@@ -4299,10 +5348,164 @@
                 <a:ea typeface="Calibri" pitchFamily="34" charset="-122"/>
                 <a:cs typeface="Calibri" pitchFamily="34" charset="-120"/>
               </a:rPr>
-              <a:t>• Zero Cross-Database Joins: Direct SQL joins across schemas are architecturally banned.</a:t>
+              <a:t>Booking Service creates the reservation, confirms the ticket, and generates a unique PNR code (e.g. PNR-AB789).</a:t>
+            </a:r>
+            <a:endParaRPr lang="en-US" sz="900" dirty="0"/>
+          </a:p>
+        </p:txBody>
+      </p:sp>
+      <p:sp>
+        <p:nvSpPr>
+          <p:cNvPr id="28" name="Shape 26"/>
+          <p:cNvSpPr/>
+          <p:nvPr/>
+        </p:nvSpPr>
+        <p:spPr>
+          <a:xfrm>
+            <a:off x="4315968" y="4069080"/>
+            <a:ext cx="3584448" cy="1965960"/>
+          </a:xfrm>
+          <a:prstGeom prst="roundRect">
+            <a:avLst>
+              <a:gd name="adj" fmla="val 4651"/>
+            </a:avLst>
+          </a:prstGeom>
+          <a:solidFill>
+            <a:srgbClr val="18181B"/>
+          </a:solidFill>
+          <a:ln w="12700">
+            <a:solidFill>
+              <a:srgbClr val="3F3F46"/>
+            </a:solidFill>
+            <a:prstDash val="solid"/>
+          </a:ln>
+        </p:spPr>
+      </p:sp>
+      <p:sp>
+        <p:nvSpPr>
+          <p:cNvPr id="29" name="Shape 27"/>
+          <p:cNvSpPr/>
+          <p:nvPr/>
+        </p:nvSpPr>
+        <p:spPr>
+          <a:xfrm>
+            <a:off x="4453128" y="4206240"/>
+            <a:ext cx="914400" cy="256032"/>
+          </a:xfrm>
+          <a:prstGeom prst="roundRect">
+            <a:avLst>
+              <a:gd name="adj" fmla="val 17857"/>
+            </a:avLst>
+          </a:prstGeom>
+          <a:solidFill>
+            <a:srgbClr val="27272A"/>
+          </a:solidFill>
+          <a:ln w="10160">
+            <a:solidFill>
+              <a:srgbClr val="38BDF8"/>
+            </a:solidFill>
+            <a:prstDash val="solid"/>
+          </a:ln>
+        </p:spPr>
+      </p:sp>
+      <p:sp>
+        <p:nvSpPr>
+          <p:cNvPr id="30" name="Text 28"/>
+          <p:cNvSpPr/>
+          <p:nvPr/>
+        </p:nvSpPr>
+        <p:spPr>
+          <a:xfrm>
+            <a:off x="4453128" y="4206240"/>
+            <a:ext cx="914400" cy="256032"/>
+          </a:xfrm>
+          <a:prstGeom prst="rect">
+            <a:avLst/>
+          </a:prstGeom>
+          <a:noFill/>
+          <a:ln/>
+        </p:spPr>
+        <p:txBody>
+          <a:bodyPr wrap="square" rtlCol="0" anchor="ctr"/>
+          <a:lstStyle/>
+          <a:p>
+            <a:pPr algn="ctr" indent="0" marL="0">
+              <a:buNone/>
+            </a:pPr>
+            <a:r>
+              <a:rPr lang="en-US" sz="850" b="1" dirty="0">
+                <a:solidFill>
+                  <a:srgbClr val="38BDF8"/>
+                </a:solidFill>
+                <a:latin typeface="Calibri" pitchFamily="34" charset="0"/>
+                <a:ea typeface="Calibri" pitchFamily="34" charset="-122"/>
+                <a:cs typeface="Calibri" pitchFamily="34" charset="-120"/>
+              </a:rPr>
+              <a:t>Step 5</a:t>
             </a:r>
             <a:endParaRPr lang="en-US" sz="850" dirty="0"/>
           </a:p>
+        </p:txBody>
+      </p:sp>
+      <p:sp>
+        <p:nvSpPr>
+          <p:cNvPr id="31" name="Text 29"/>
+          <p:cNvSpPr/>
+          <p:nvPr/>
+        </p:nvSpPr>
+        <p:spPr>
+          <a:xfrm>
+            <a:off x="5458968" y="4206240"/>
+            <a:ext cx="2286000" cy="256032"/>
+          </a:xfrm>
+          <a:prstGeom prst="rect">
+            <a:avLst/>
+          </a:prstGeom>
+          <a:noFill/>
+          <a:ln/>
+        </p:spPr>
+        <p:txBody>
+          <a:bodyPr wrap="square" rtlCol="0" anchor="ctr"/>
+          <a:lstStyle/>
+          <a:p>
+            <a:pPr indent="0" marL="0">
+              <a:buNone/>
+            </a:pPr>
+            <a:r>
+              <a:rPr lang="en-US" sz="1100" b="1" dirty="0">
+                <a:solidFill>
+                  <a:srgbClr val="FFFFFF"/>
+                </a:solidFill>
+                <a:latin typeface="Calibri" pitchFamily="34" charset="0"/>
+                <a:ea typeface="Calibri" pitchFamily="34" charset="-122"/>
+                <a:cs typeface="Calibri" pitchFamily="34" charset="-120"/>
+              </a:rPr>
+              <a:t>Web Check-In (T-24 Hours)</a:t>
+            </a:r>
+            <a:endParaRPr lang="en-US" sz="1100" dirty="0"/>
+          </a:p>
+        </p:txBody>
+      </p:sp>
+      <p:sp>
+        <p:nvSpPr>
+          <p:cNvPr id="32" name="Text 30"/>
+          <p:cNvSpPr/>
+          <p:nvPr/>
+        </p:nvSpPr>
+        <p:spPr>
+          <a:xfrm>
+            <a:off x="4453128" y="4572000"/>
+            <a:ext cx="3291840" cy="1325880"/>
+          </a:xfrm>
+          <a:prstGeom prst="rect">
+            <a:avLst/>
+          </a:prstGeom>
+          <a:noFill/>
+          <a:ln/>
+        </p:spPr>
+        <p:txBody>
+          <a:bodyPr wrap="square" rtlCol="0" anchor="t"/>
+          <a:lstStyle/>
           <a:p>
             <a:pPr indent="0" marL="0">
               <a:lnSpc>
@@ -4310,8 +5513,173 @@
               </a:lnSpc>
               <a:buNone/>
             </a:pPr>
+            <a:r>
+              <a:rPr lang="en-US" sz="900" dirty="0">
+                <a:solidFill>
+                  <a:srgbClr val="E4E4E7"/>
+                </a:solidFill>
+                <a:latin typeface="Calibri" pitchFamily="34" charset="0"/>
+                <a:ea typeface="Calibri" pitchFamily="34" charset="-122"/>
+                <a:cs typeface="Calibri" pitchFamily="34" charset="-120"/>
+              </a:rPr>
+              <a:t>Before the flight, the passenger logs into Web Check-In, enters their PNR, and selects their favorite seat (e.g. 12A).</a:t>
+            </a:r>
+            <a:endParaRPr lang="en-US" sz="900" dirty="0"/>
+          </a:p>
+        </p:txBody>
+      </p:sp>
+      <p:sp>
+        <p:nvSpPr>
+          <p:cNvPr id="33" name="Shape 31"/>
+          <p:cNvSpPr/>
+          <p:nvPr/>
+        </p:nvSpPr>
+        <p:spPr>
+          <a:xfrm>
+            <a:off x="8083296" y="4069080"/>
+            <a:ext cx="3584448" cy="1965960"/>
+          </a:xfrm>
+          <a:prstGeom prst="roundRect">
+            <a:avLst>
+              <a:gd name="adj" fmla="val 4651"/>
+            </a:avLst>
+          </a:prstGeom>
+          <a:solidFill>
+            <a:srgbClr val="18181B"/>
+          </a:solidFill>
+          <a:ln w="12700">
+            <a:solidFill>
+              <a:srgbClr val="3F3F46"/>
+            </a:solidFill>
+            <a:prstDash val="solid"/>
+          </a:ln>
+        </p:spPr>
+      </p:sp>
+      <p:sp>
+        <p:nvSpPr>
+          <p:cNvPr id="34" name="Shape 32"/>
+          <p:cNvSpPr/>
+          <p:nvPr/>
+        </p:nvSpPr>
+        <p:spPr>
+          <a:xfrm>
+            <a:off x="8220456" y="4206240"/>
+            <a:ext cx="914400" cy="256032"/>
+          </a:xfrm>
+          <a:prstGeom prst="roundRect">
+            <a:avLst>
+              <a:gd name="adj" fmla="val 17857"/>
+            </a:avLst>
+          </a:prstGeom>
+          <a:solidFill>
+            <a:srgbClr val="27272A"/>
+          </a:solidFill>
+          <a:ln w="10160">
+            <a:solidFill>
+              <a:srgbClr val="38BDF8"/>
+            </a:solidFill>
+            <a:prstDash val="solid"/>
+          </a:ln>
+        </p:spPr>
+      </p:sp>
+      <p:sp>
+        <p:nvSpPr>
+          <p:cNvPr id="35" name="Text 33"/>
+          <p:cNvSpPr/>
+          <p:nvPr/>
+        </p:nvSpPr>
+        <p:spPr>
+          <a:xfrm>
+            <a:off x="8220456" y="4206240"/>
+            <a:ext cx="914400" cy="256032"/>
+          </a:xfrm>
+          <a:prstGeom prst="rect">
+            <a:avLst/>
+          </a:prstGeom>
+          <a:noFill/>
+          <a:ln/>
+        </p:spPr>
+        <p:txBody>
+          <a:bodyPr wrap="square" rtlCol="0" anchor="ctr"/>
+          <a:lstStyle/>
+          <a:p>
+            <a:pPr algn="ctr" indent="0" marL="0">
+              <a:buNone/>
+            </a:pPr>
+            <a:r>
+              <a:rPr lang="en-US" sz="850" b="1" dirty="0">
+                <a:solidFill>
+                  <a:srgbClr val="38BDF8"/>
+                </a:solidFill>
+                <a:latin typeface="Calibri" pitchFamily="34" charset="0"/>
+                <a:ea typeface="Calibri" pitchFamily="34" charset="-122"/>
+                <a:cs typeface="Calibri" pitchFamily="34" charset="-120"/>
+              </a:rPr>
+              <a:t>Step 6</a:t>
+            </a:r>
             <a:endParaRPr lang="en-US" sz="850" dirty="0"/>
           </a:p>
+        </p:txBody>
+      </p:sp>
+      <p:sp>
+        <p:nvSpPr>
+          <p:cNvPr id="36" name="Text 34"/>
+          <p:cNvSpPr/>
+          <p:nvPr/>
+        </p:nvSpPr>
+        <p:spPr>
+          <a:xfrm>
+            <a:off x="9226296" y="4206240"/>
+            <a:ext cx="2286000" cy="256032"/>
+          </a:xfrm>
+          <a:prstGeom prst="rect">
+            <a:avLst/>
+          </a:prstGeom>
+          <a:noFill/>
+          <a:ln/>
+        </p:spPr>
+        <p:txBody>
+          <a:bodyPr wrap="square" rtlCol="0" anchor="ctr"/>
+          <a:lstStyle/>
+          <a:p>
+            <a:pPr indent="0" marL="0">
+              <a:buNone/>
+            </a:pPr>
+            <a:r>
+              <a:rPr lang="en-US" sz="1100" b="1" dirty="0">
+                <a:solidFill>
+                  <a:srgbClr val="FFFFFF"/>
+                </a:solidFill>
+                <a:latin typeface="Calibri" pitchFamily="34" charset="0"/>
+                <a:ea typeface="Calibri" pitchFamily="34" charset="-122"/>
+                <a:cs typeface="Calibri" pitchFamily="34" charset="-120"/>
+              </a:rPr>
+              <a:t>Digital QR Boarding Pass</a:t>
+            </a:r>
+            <a:endParaRPr lang="en-US" sz="1100" dirty="0"/>
+          </a:p>
+        </p:txBody>
+      </p:sp>
+      <p:sp>
+        <p:nvSpPr>
+          <p:cNvPr id="37" name="Text 35"/>
+          <p:cNvSpPr/>
+          <p:nvPr/>
+        </p:nvSpPr>
+        <p:spPr>
+          <a:xfrm>
+            <a:off x="8220456" y="4572000"/>
+            <a:ext cx="3291840" cy="1325880"/>
+          </a:xfrm>
+          <a:prstGeom prst="rect">
+            <a:avLst/>
+          </a:prstGeom>
+          <a:noFill/>
+          <a:ln/>
+        </p:spPr>
+        <p:txBody>
+          <a:bodyPr wrap="square" rtlCol="0" anchor="t"/>
+          <a:lstStyle/>
           <a:p>
             <a:pPr indent="0" marL="0">
               <a:lnSpc>
@@ -4320,7 +5688,7 @@
               <a:buNone/>
             </a:pPr>
             <a:r>
-              <a:rPr lang="en-US" sz="850" dirty="0">
+              <a:rPr lang="en-US" sz="900" dirty="0">
                 <a:solidFill>
                   <a:srgbClr val="E4E4E7"/>
                 </a:solidFill>
@@ -4328,674 +5696,9 @@
                 <a:ea typeface="Calibri" pitchFamily="34" charset="-122"/>
                 <a:cs typeface="Calibri" pitchFamily="34" charset="-120"/>
               </a:rPr>
-              <a:t>• Entity Correlation: Services reference immutable IDs (e.g. flightId, pnr) validated via OpenFeign.</a:t>
-            </a:r>
-            <a:endParaRPr lang="en-US" sz="850" dirty="0"/>
-          </a:p>
-          <a:p>
-            <a:pPr indent="0" marL="0">
-              <a:lnSpc>
-                <a:spcPct val="120000"/>
-              </a:lnSpc>
-              <a:buNone/>
-            </a:pPr>
-            <a:endParaRPr lang="en-US" sz="850" dirty="0"/>
-          </a:p>
-          <a:p>
-            <a:pPr indent="0" marL="0">
-              <a:lnSpc>
-                <a:spcPct val="120000"/>
-              </a:lnSpc>
-              <a:buNone/>
-            </a:pPr>
-            <a:r>
-              <a:rPr lang="en-US" sz="850" dirty="0">
-                <a:solidFill>
-                  <a:srgbClr val="E4E4E7"/>
-                </a:solidFill>
-                <a:latin typeface="Calibri" pitchFamily="34" charset="0"/>
-                <a:ea typeface="Calibri" pitchFamily="34" charset="-122"/>
-                <a:cs typeface="Calibri" pitchFamily="34" charset="-120"/>
-              </a:rPr>
-              <a:t>• Benefits: Zero deadlock cascades, independent scaling, and schema autonomy.</a:t>
-            </a:r>
-            <a:endParaRPr lang="en-US" sz="850" dirty="0"/>
-          </a:p>
-        </p:txBody>
-      </p:sp>
-      <p:sp>
-        <p:nvSpPr>
-          <p:cNvPr id="11" name="Shape 9"/>
-          <p:cNvSpPr/>
-          <p:nvPr/>
-        </p:nvSpPr>
-        <p:spPr>
-          <a:xfrm>
-            <a:off x="3474720" y="1965960"/>
-            <a:ext cx="2514600" cy="4251960"/>
-          </a:xfrm>
-          <a:prstGeom prst="roundRect">
-            <a:avLst>
-              <a:gd name="adj" fmla="val 3636"/>
-            </a:avLst>
-          </a:prstGeom>
-          <a:solidFill>
-            <a:srgbClr val="18181B"/>
-          </a:solidFill>
-          <a:ln w="19050">
-            <a:solidFill>
-              <a:srgbClr val="C084FC"/>
-            </a:solidFill>
-            <a:prstDash val="solid"/>
-          </a:ln>
-        </p:spPr>
-      </p:sp>
-      <p:sp>
-        <p:nvSpPr>
-          <p:cNvPr id="12" name="Text 10"/>
-          <p:cNvSpPr/>
-          <p:nvPr/>
-        </p:nvSpPr>
-        <p:spPr>
-          <a:xfrm>
-            <a:off x="3611880" y="2148840"/>
-            <a:ext cx="2240280" cy="548640"/>
-          </a:xfrm>
-          <a:prstGeom prst="rect">
-            <a:avLst/>
-          </a:prstGeom>
-          <a:noFill/>
-          <a:ln/>
-        </p:spPr>
-        <p:txBody>
-          <a:bodyPr wrap="square" rtlCol="0" anchor="ctr"/>
-          <a:lstStyle/>
-          <a:p>
-            <a:pPr indent="0" marL="0">
-              <a:buNone/>
-            </a:pPr>
-            <a:r>
-              <a:rPr lang="en-US" sz="1100" b="1" dirty="0">
-                <a:solidFill>
-                  <a:srgbClr val="C084FC"/>
-                </a:solidFill>
-                <a:latin typeface="Calibri" pitchFamily="34" charset="0"/>
-                <a:ea typeface="Calibri" pitchFamily="34" charset="-122"/>
-                <a:cs typeface="Calibri" pitchFamily="34" charset="-120"/>
-              </a:rPr>
-              <a:t>ASYNCHRONOUS AMQP</a:t>
-            </a:r>
-            <a:endParaRPr lang="en-US" sz="1100" dirty="0"/>
-          </a:p>
-          <a:p>
-            <a:pPr indent="0" marL="0">
-              <a:buNone/>
-            </a:pPr>
-            <a:r>
-              <a:rPr lang="en-US" sz="1100" b="1" dirty="0">
-                <a:solidFill>
-                  <a:srgbClr val="C084FC"/>
-                </a:solidFill>
-                <a:latin typeface="Calibri" pitchFamily="34" charset="0"/>
-                <a:ea typeface="Calibri" pitchFamily="34" charset="-122"/>
-                <a:cs typeface="Calibri" pitchFamily="34" charset="-120"/>
-              </a:rPr>
-              <a:t>EVENT STREAMING</a:t>
-            </a:r>
-            <a:endParaRPr lang="en-US" sz="1100" dirty="0"/>
-          </a:p>
-        </p:txBody>
-      </p:sp>
-      <p:sp>
-        <p:nvSpPr>
-          <p:cNvPr id="13" name="Text 11"/>
-          <p:cNvSpPr/>
-          <p:nvPr/>
-        </p:nvSpPr>
-        <p:spPr>
-          <a:xfrm>
-            <a:off x="3611880" y="2743200"/>
-            <a:ext cx="2240280" cy="3291840"/>
-          </a:xfrm>
-          <a:prstGeom prst="rect">
-            <a:avLst/>
-          </a:prstGeom>
-          <a:noFill/>
-          <a:ln/>
-        </p:spPr>
-        <p:txBody>
-          <a:bodyPr wrap="square" rtlCol="0" anchor="ctr"/>
-          <a:lstStyle/>
-          <a:p>
-            <a:pPr indent="0" marL="0">
-              <a:lnSpc>
-                <a:spcPct val="120000"/>
-              </a:lnSpc>
-              <a:buNone/>
-            </a:pPr>
-            <a:r>
-              <a:rPr lang="en-US" sz="850" dirty="0">
-                <a:solidFill>
-                  <a:srgbClr val="E4E4E7"/>
-                </a:solidFill>
-                <a:latin typeface="Calibri" pitchFamily="34" charset="0"/>
-                <a:ea typeface="Calibri" pitchFamily="34" charset="-122"/>
-                <a:cs typeface="Calibri" pitchFamily="34" charset="-120"/>
-              </a:rPr>
-              <a:t>• RabbitMQ Integration: Exchange aerobook.direct bound to queue booking.events.</a:t>
-            </a:r>
-            <a:endParaRPr lang="en-US" sz="850" dirty="0"/>
-          </a:p>
-          <a:p>
-            <a:pPr indent="0" marL="0">
-              <a:lnSpc>
-                <a:spcPct val="120000"/>
-              </a:lnSpc>
-              <a:buNone/>
-            </a:pPr>
-            <a:endParaRPr lang="en-US" sz="850" dirty="0"/>
-          </a:p>
-          <a:p>
-            <a:pPr indent="0" marL="0">
-              <a:lnSpc>
-                <a:spcPct val="120000"/>
-              </a:lnSpc>
-              <a:buNone/>
-            </a:pPr>
-            <a:r>
-              <a:rPr lang="en-US" sz="850" dirty="0">
-                <a:solidFill>
-                  <a:srgbClr val="E4E4E7"/>
-                </a:solidFill>
-                <a:latin typeface="Calibri" pitchFamily="34" charset="0"/>
-                <a:ea typeface="Calibri" pitchFamily="34" charset="-122"/>
-                <a:cs typeface="Calibri" pitchFamily="34" charset="-120"/>
-              </a:rPr>
-              <a:t>• Non-Blocking Checkout: Booking service publishes BookingConfirmedEvent in &lt;5ms and immediately returns.</a:t>
-            </a:r>
-            <a:endParaRPr lang="en-US" sz="850" dirty="0"/>
-          </a:p>
-          <a:p>
-            <a:pPr indent="0" marL="0">
-              <a:lnSpc>
-                <a:spcPct val="120000"/>
-              </a:lnSpc>
-              <a:buNone/>
-            </a:pPr>
-            <a:endParaRPr lang="en-US" sz="850" dirty="0"/>
-          </a:p>
-          <a:p>
-            <a:pPr indent="0" marL="0">
-              <a:lnSpc>
-                <a:spcPct val="120000"/>
-              </a:lnSpc>
-              <a:buNone/>
-            </a:pPr>
-            <a:r>
-              <a:rPr lang="en-US" sz="850" dirty="0">
-                <a:solidFill>
-                  <a:srgbClr val="E4E4E7"/>
-                </a:solidFill>
-                <a:latin typeface="Calibri" pitchFamily="34" charset="0"/>
-                <a:ea typeface="Calibri" pitchFamily="34" charset="-122"/>
-                <a:cs typeface="Calibri" pitchFamily="34" charset="-120"/>
-              </a:rPr>
-              <a:t>• Worker Consumer: Background worker consumes event, formats HTML tickets, and calls SendGrid/Twilio.</a:t>
-            </a:r>
-            <a:endParaRPr lang="en-US" sz="850" dirty="0"/>
-          </a:p>
-          <a:p>
-            <a:pPr indent="0" marL="0">
-              <a:lnSpc>
-                <a:spcPct val="120000"/>
-              </a:lnSpc>
-              <a:buNone/>
-            </a:pPr>
-            <a:endParaRPr lang="en-US" sz="850" dirty="0"/>
-          </a:p>
-          <a:p>
-            <a:pPr indent="0" marL="0">
-              <a:lnSpc>
-                <a:spcPct val="120000"/>
-              </a:lnSpc>
-              <a:buNone/>
-            </a:pPr>
-            <a:r>
-              <a:rPr lang="en-US" sz="850" dirty="0">
-                <a:solidFill>
-                  <a:srgbClr val="E4E4E7"/>
-                </a:solidFill>
-                <a:latin typeface="Calibri" pitchFamily="34" charset="0"/>
-                <a:ea typeface="Calibri" pitchFamily="34" charset="-122"/>
-                <a:cs typeface="Calibri" pitchFamily="34" charset="-120"/>
-              </a:rPr>
-              <a:t>• Fault Tolerance: Dead-Letter Exchange (DLX) &amp; automated retry backoffs.</a:t>
-            </a:r>
-            <a:endParaRPr lang="en-US" sz="850" dirty="0"/>
-          </a:p>
-        </p:txBody>
-      </p:sp>
-      <p:sp>
-        <p:nvSpPr>
-          <p:cNvPr id="14" name="Shape 12"/>
-          <p:cNvSpPr/>
-          <p:nvPr/>
-        </p:nvSpPr>
-        <p:spPr>
-          <a:xfrm>
-            <a:off x="6217920" y="1965960"/>
-            <a:ext cx="2514600" cy="4251960"/>
-          </a:xfrm>
-          <a:prstGeom prst="roundRect">
-            <a:avLst>
-              <a:gd name="adj" fmla="val 3636"/>
-            </a:avLst>
-          </a:prstGeom>
-          <a:solidFill>
-            <a:srgbClr val="18181B"/>
-          </a:solidFill>
-          <a:ln w="19050">
-            <a:solidFill>
-              <a:srgbClr val="4ADE80"/>
-            </a:solidFill>
-            <a:prstDash val="solid"/>
-          </a:ln>
-        </p:spPr>
-      </p:sp>
-      <p:sp>
-        <p:nvSpPr>
-          <p:cNvPr id="15" name="Text 13"/>
-          <p:cNvSpPr/>
-          <p:nvPr/>
-        </p:nvSpPr>
-        <p:spPr>
-          <a:xfrm>
-            <a:off x="6355080" y="2148840"/>
-            <a:ext cx="2240280" cy="548640"/>
-          </a:xfrm>
-          <a:prstGeom prst="rect">
-            <a:avLst/>
-          </a:prstGeom>
-          <a:noFill/>
-          <a:ln/>
-        </p:spPr>
-        <p:txBody>
-          <a:bodyPr wrap="square" rtlCol="0" anchor="ctr"/>
-          <a:lstStyle/>
-          <a:p>
-            <a:pPr indent="0" marL="0">
-              <a:buNone/>
-            </a:pPr>
-            <a:r>
-              <a:rPr lang="en-US" sz="1100" b="1" dirty="0">
-                <a:solidFill>
-                  <a:srgbClr val="4ADE80"/>
-                </a:solidFill>
-                <a:latin typeface="Calibri" pitchFamily="34" charset="0"/>
-                <a:ea typeface="Calibri" pitchFamily="34" charset="-122"/>
-                <a:cs typeface="Calibri" pitchFamily="34" charset="-120"/>
-              </a:rPr>
-              <a:t>PCI-DSS SCOPE &amp; ZERO</a:t>
-            </a:r>
-            <a:endParaRPr lang="en-US" sz="1100" dirty="0"/>
-          </a:p>
-          <a:p>
-            <a:pPr indent="0" marL="0">
-              <a:buNone/>
-            </a:pPr>
-            <a:r>
-              <a:rPr lang="en-US" sz="1100" b="1" dirty="0">
-                <a:solidFill>
-                  <a:srgbClr val="4ADE80"/>
-                </a:solidFill>
-                <a:latin typeface="Calibri" pitchFamily="34" charset="0"/>
-                <a:ea typeface="Calibri" pitchFamily="34" charset="-122"/>
-                <a:cs typeface="Calibri" pitchFamily="34" charset="-120"/>
-              </a:rPr>
-              <a:t>PAN CARD STORAGE</a:t>
-            </a:r>
-            <a:endParaRPr lang="en-US" sz="1100" dirty="0"/>
-          </a:p>
-        </p:txBody>
-      </p:sp>
-      <p:sp>
-        <p:nvSpPr>
-          <p:cNvPr id="16" name="Text 14"/>
-          <p:cNvSpPr/>
-          <p:nvPr/>
-        </p:nvSpPr>
-        <p:spPr>
-          <a:xfrm>
-            <a:off x="6355080" y="2743200"/>
-            <a:ext cx="2240280" cy="3291840"/>
-          </a:xfrm>
-          <a:prstGeom prst="rect">
-            <a:avLst/>
-          </a:prstGeom>
-          <a:noFill/>
-          <a:ln/>
-        </p:spPr>
-        <p:txBody>
-          <a:bodyPr wrap="square" rtlCol="0" anchor="ctr"/>
-          <a:lstStyle/>
-          <a:p>
-            <a:pPr indent="0" marL="0">
-              <a:lnSpc>
-                <a:spcPct val="120000"/>
-              </a:lnSpc>
-              <a:buNone/>
-            </a:pPr>
-            <a:r>
-              <a:rPr lang="en-US" sz="850" dirty="0">
-                <a:solidFill>
-                  <a:srgbClr val="E4E4E7"/>
-                </a:solidFill>
-                <a:latin typeface="Calibri" pitchFamily="34" charset="0"/>
-                <a:ea typeface="Calibri" pitchFamily="34" charset="-122"/>
-                <a:cs typeface="Calibri" pitchFamily="34" charset="-120"/>
-              </a:rPr>
-              <a:t>• Zero Sensitive Storage: Credit card numbers (PAN) and CVVs never touch AeroBook disks or memory.</a:t>
-            </a:r>
-            <a:endParaRPr lang="en-US" sz="850" dirty="0"/>
-          </a:p>
-          <a:p>
-            <a:pPr indent="0" marL="0">
-              <a:lnSpc>
-                <a:spcPct val="120000"/>
-              </a:lnSpc>
-              <a:buNone/>
-            </a:pPr>
-            <a:endParaRPr lang="en-US" sz="850" dirty="0"/>
-          </a:p>
-          <a:p>
-            <a:pPr indent="0" marL="0">
-              <a:lnSpc>
-                <a:spcPct val="120000"/>
-              </a:lnSpc>
-              <a:buNone/>
-            </a:pPr>
-            <a:r>
-              <a:rPr lang="en-US" sz="850" dirty="0">
-                <a:solidFill>
-                  <a:srgbClr val="E4E4E7"/>
-                </a:solidFill>
-                <a:latin typeface="Calibri" pitchFamily="34" charset="0"/>
-                <a:ea typeface="Calibri" pitchFamily="34" charset="-122"/>
-                <a:cs typeface="Calibri" pitchFamily="34" charset="-120"/>
-              </a:rPr>
-              <a:t>• Client Tokenization: Front-end tokenizes cards with Stripe/Razorpay directly.</a:t>
-            </a:r>
-            <a:endParaRPr lang="en-US" sz="850" dirty="0"/>
-          </a:p>
-          <a:p>
-            <a:pPr indent="0" marL="0">
-              <a:lnSpc>
-                <a:spcPct val="120000"/>
-              </a:lnSpc>
-              <a:buNone/>
-            </a:pPr>
-            <a:endParaRPr lang="en-US" sz="850" dirty="0"/>
-          </a:p>
-          <a:p>
-            <a:pPr indent="0" marL="0">
-              <a:lnSpc>
-                <a:spcPct val="120000"/>
-              </a:lnSpc>
-              <a:buNone/>
-            </a:pPr>
-            <a:r>
-              <a:rPr lang="en-US" sz="850" dirty="0">
-                <a:solidFill>
-                  <a:srgbClr val="E4E4E7"/>
-                </a:solidFill>
-                <a:latin typeface="Calibri" pitchFamily="34" charset="0"/>
-                <a:ea typeface="Calibri" pitchFamily="34" charset="-122"/>
-                <a:cs typeface="Calibri" pitchFamily="34" charset="-120"/>
-              </a:rPr>
-              <a:t>• Opaque Handshakes: Booking service only handles transient tokens and settlement txn_ids.</a:t>
-            </a:r>
-            <a:endParaRPr lang="en-US" sz="850" dirty="0"/>
-          </a:p>
-          <a:p>
-            <a:pPr indent="0" marL="0">
-              <a:lnSpc>
-                <a:spcPct val="120000"/>
-              </a:lnSpc>
-              <a:buNone/>
-            </a:pPr>
-            <a:endParaRPr lang="en-US" sz="850" dirty="0"/>
-          </a:p>
-          <a:p>
-            <a:pPr indent="0" marL="0">
-              <a:lnSpc>
-                <a:spcPct val="120000"/>
-              </a:lnSpc>
-              <a:buNone/>
-            </a:pPr>
-            <a:r>
-              <a:rPr lang="en-US" sz="850" dirty="0">
-                <a:solidFill>
-                  <a:srgbClr val="E4E4E7"/>
-                </a:solidFill>
-                <a:latin typeface="Calibri" pitchFamily="34" charset="0"/>
-                <a:ea typeface="Calibri" pitchFamily="34" charset="-122"/>
-                <a:cs typeface="Calibri" pitchFamily="34" charset="-120"/>
-              </a:rPr>
-              <a:t>• Audit Logging: Tamper-evident transaction logs without exposing financial credentials.</a:t>
-            </a:r>
-            <a:endParaRPr lang="en-US" sz="850" dirty="0"/>
-          </a:p>
-        </p:txBody>
-      </p:sp>
-      <p:sp>
-        <p:nvSpPr>
-          <p:cNvPr id="17" name="Shape 15"/>
-          <p:cNvSpPr/>
-          <p:nvPr/>
-        </p:nvSpPr>
-        <p:spPr>
-          <a:xfrm>
-            <a:off x="8961120" y="1965960"/>
-            <a:ext cx="2514600" cy="4251960"/>
-          </a:xfrm>
-          <a:prstGeom prst="roundRect">
-            <a:avLst>
-              <a:gd name="adj" fmla="val 3636"/>
-            </a:avLst>
-          </a:prstGeom>
-          <a:solidFill>
-            <a:srgbClr val="18181B"/>
-          </a:solidFill>
-          <a:ln w="19050">
-            <a:solidFill>
-              <a:srgbClr val="FACC15"/>
-            </a:solidFill>
-            <a:prstDash val="solid"/>
-          </a:ln>
-        </p:spPr>
-      </p:sp>
-      <p:sp>
-        <p:nvSpPr>
-          <p:cNvPr id="18" name="Text 16"/>
-          <p:cNvSpPr/>
-          <p:nvPr/>
-        </p:nvSpPr>
-        <p:spPr>
-          <a:xfrm>
-            <a:off x="9098280" y="2148840"/>
-            <a:ext cx="2240280" cy="548640"/>
-          </a:xfrm>
-          <a:prstGeom prst="rect">
-            <a:avLst/>
-          </a:prstGeom>
-          <a:noFill/>
-          <a:ln/>
-        </p:spPr>
-        <p:txBody>
-          <a:bodyPr wrap="square" rtlCol="0" anchor="ctr"/>
-          <a:lstStyle/>
-          <a:p>
-            <a:pPr indent="0" marL="0">
-              <a:buNone/>
-            </a:pPr>
-            <a:r>
-              <a:rPr lang="en-US" sz="1100" b="1" dirty="0">
-                <a:solidFill>
-                  <a:srgbClr val="FACC15"/>
-                </a:solidFill>
-                <a:latin typeface="Calibri" pitchFamily="34" charset="0"/>
-                <a:ea typeface="Calibri" pitchFamily="34" charset="-122"/>
-                <a:cs typeface="Calibri" pitchFamily="34" charset="-120"/>
-              </a:rPr>
-              <a:t>CONCURRENCY &amp; ATOMIC</a:t>
-            </a:r>
-            <a:endParaRPr lang="en-US" sz="1100" dirty="0"/>
-          </a:p>
-          <a:p>
-            <a:pPr indent="0" marL="0">
-              <a:buNone/>
-            </a:pPr>
-            <a:r>
-              <a:rPr lang="en-US" sz="1100" b="1" dirty="0">
-                <a:solidFill>
-                  <a:srgbClr val="FACC15"/>
-                </a:solidFill>
-                <a:latin typeface="Calibri" pitchFamily="34" charset="0"/>
-                <a:ea typeface="Calibri" pitchFamily="34" charset="-122"/>
-                <a:cs typeface="Calibri" pitchFamily="34" charset="-120"/>
-              </a:rPr>
-              <a:t>SEAT HOLD LOCKS</a:t>
-            </a:r>
-            <a:endParaRPr lang="en-US" sz="1100" dirty="0"/>
-          </a:p>
-        </p:txBody>
-      </p:sp>
-      <p:sp>
-        <p:nvSpPr>
-          <p:cNvPr id="19" name="Text 17"/>
-          <p:cNvSpPr/>
-          <p:nvPr/>
-        </p:nvSpPr>
-        <p:spPr>
-          <a:xfrm>
-            <a:off x="9098280" y="2743200"/>
-            <a:ext cx="2240280" cy="3291840"/>
-          </a:xfrm>
-          <a:prstGeom prst="rect">
-            <a:avLst/>
-          </a:prstGeom>
-          <a:noFill/>
-          <a:ln/>
-        </p:spPr>
-        <p:txBody>
-          <a:bodyPr wrap="square" rtlCol="0" anchor="ctr"/>
-          <a:lstStyle/>
-          <a:p>
-            <a:pPr indent="0" marL="0">
-              <a:lnSpc>
-                <a:spcPct val="120000"/>
-              </a:lnSpc>
-              <a:buNone/>
-            </a:pPr>
-            <a:r>
-              <a:rPr lang="en-US" sz="850" dirty="0">
-                <a:solidFill>
-                  <a:srgbClr val="E4E4E7"/>
-                </a:solidFill>
-                <a:latin typeface="Calibri" pitchFamily="34" charset="0"/>
-                <a:ea typeface="Calibri" pitchFamily="34" charset="-122"/>
-                <a:cs typeface="Calibri" pitchFamily="34" charset="-120"/>
-              </a:rPr>
-              <a:t>• High-Concurrency Defense: Prevents double-booking during flash fare ticket rushes.</a:t>
-            </a:r>
-            <a:endParaRPr lang="en-US" sz="850" dirty="0"/>
-          </a:p>
-          <a:p>
-            <a:pPr indent="0" marL="0">
-              <a:lnSpc>
-                <a:spcPct val="120000"/>
-              </a:lnSpc>
-              <a:buNone/>
-            </a:pPr>
-            <a:endParaRPr lang="en-US" sz="850" dirty="0"/>
-          </a:p>
-          <a:p>
-            <a:pPr indent="0" marL="0">
-              <a:lnSpc>
-                <a:spcPct val="120000"/>
-              </a:lnSpc>
-              <a:buNone/>
-            </a:pPr>
-            <a:r>
-              <a:rPr lang="en-US" sz="850" dirty="0">
-                <a:solidFill>
-                  <a:srgbClr val="E4E4E7"/>
-                </a:solidFill>
-                <a:latin typeface="Calibri" pitchFamily="34" charset="0"/>
-                <a:ea typeface="Calibri" pitchFamily="34" charset="-122"/>
-                <a:cs typeface="Calibri" pitchFamily="34" charset="-120"/>
-              </a:rPr>
-              <a:t>• Two-Phase Hold: Seats are marked as HELD with a 10-minute hold expiration timestamp.</a:t>
-            </a:r>
-            <a:endParaRPr lang="en-US" sz="850" dirty="0"/>
-          </a:p>
-          <a:p>
-            <a:pPr indent="0" marL="0">
-              <a:lnSpc>
-                <a:spcPct val="120000"/>
-              </a:lnSpc>
-              <a:buNone/>
-            </a:pPr>
-            <a:endParaRPr lang="en-US" sz="850" dirty="0"/>
-          </a:p>
-          <a:p>
-            <a:pPr indent="0" marL="0">
-              <a:lnSpc>
-                <a:spcPct val="120000"/>
-              </a:lnSpc>
-              <a:buNone/>
-            </a:pPr>
-            <a:r>
-              <a:rPr lang="en-US" sz="850" dirty="0">
-                <a:solidFill>
-                  <a:srgbClr val="E4E4E7"/>
-                </a:solidFill>
-                <a:latin typeface="Calibri" pitchFamily="34" charset="0"/>
-                <a:ea typeface="Calibri" pitchFamily="34" charset="-122"/>
-                <a:cs typeface="Calibri" pitchFamily="34" charset="-120"/>
-              </a:rPr>
-              <a:t>• Atomic Transitions: Row-level locks (SELECT ... FOR UPDATE) prevent simultaneous claims.</a:t>
-            </a:r>
-            <a:endParaRPr lang="en-US" sz="850" dirty="0"/>
-          </a:p>
-          <a:p>
-            <a:pPr indent="0" marL="0">
-              <a:lnSpc>
-                <a:spcPct val="120000"/>
-              </a:lnSpc>
-              <a:buNone/>
-            </a:pPr>
-            <a:endParaRPr lang="en-US" sz="850" dirty="0"/>
-          </a:p>
-          <a:p>
-            <a:pPr indent="0" marL="0">
-              <a:lnSpc>
-                <a:spcPct val="120000"/>
-              </a:lnSpc>
-              <a:buNone/>
-            </a:pPr>
-            <a:r>
-              <a:rPr lang="en-US" sz="850" dirty="0">
-                <a:solidFill>
-                  <a:srgbClr val="E4E4E7"/>
-                </a:solidFill>
-                <a:latin typeface="Calibri" pitchFamily="34" charset="0"/>
-                <a:ea typeface="Calibri" pitchFamily="34" charset="-122"/>
-                <a:cs typeface="Calibri" pitchFamily="34" charset="-120"/>
-              </a:rPr>
-              <a:t>• Auto-Release: If payment fails or times out, the held seat is immediately released back to inventory.</a:t>
-            </a:r>
-            <a:endParaRPr lang="en-US" sz="850" dirty="0"/>
+              <a:t>Check-In Service assigns the seat and immediately creates a digital boarding pass with a QR code ready for the airport gate.</a:t>
+            </a:r>
+            <a:endParaRPr lang="en-US" sz="900" dirty="0"/>
           </a:p>
         </p:txBody>
       </p:sp>
@@ -5065,7 +5768,7 @@
         <p:spPr>
           <a:xfrm>
             <a:off x="548640" y="411480"/>
-            <a:ext cx="2377440" cy="320040"/>
+            <a:ext cx="2286000" cy="320040"/>
           </a:xfrm>
           <a:prstGeom prst="roundRect">
             <a:avLst>
@@ -5092,7 +5795,7 @@
         <p:spPr>
           <a:xfrm>
             <a:off x="548640" y="411480"/>
-            <a:ext cx="2377440" cy="320040"/>
+            <a:ext cx="2286000" cy="320040"/>
           </a:xfrm>
           <a:prstGeom prst="rect">
             <a:avLst/>
@@ -5116,7 +5819,7 @@
                 <a:ea typeface="Calibri" pitchFamily="34" charset="-122"/>
                 <a:cs typeface="Calibri" pitchFamily="34" charset="-120"/>
               </a:rPr>
-              <a:t>RESULTS &amp; ROADMAP</a:t>
+              <a:t>PROJECT RESULTS</a:t>
             </a:r>
             <a:endParaRPr lang="en-US" sz="900" dirty="0"/>
           </a:p>
@@ -5131,7 +5834,7 @@
         <p:spPr>
           <a:xfrm>
             <a:off x="548640" y="822960"/>
-            <a:ext cx="10515600" cy="594360"/>
+            <a:ext cx="10515600" cy="548640"/>
           </a:xfrm>
           <a:prstGeom prst="rect">
             <a:avLst/>
@@ -5155,7 +5858,7 @@
                 <a:ea typeface="Calibri" pitchFamily="34" charset="-122"/>
                 <a:cs typeface="Calibri" pitchFamily="34" charset="-120"/>
               </a:rPr>
-              <a:t>Verification Results, Engineering Milestones &amp; Future Scope</a:t>
+              <a:t>Testing, Achievements &amp; Completed Work</a:t>
             </a:r>
             <a:endParaRPr lang="en-US" sz="2200" dirty="0"/>
           </a:p>
@@ -5188,13 +5891,13 @@
             <a:r>
               <a:rPr lang="en-US" sz="1100" dirty="0">
                 <a:solidFill>
-                  <a:srgbClr val="A1A1AA"/>
-                </a:solidFill>
-                <a:latin typeface="Calibri" pitchFamily="34" charset="0"/>
-                <a:ea typeface="Calibri" pitchFamily="34" charset="-122"/>
-                <a:cs typeface="Calibri" pitchFamily="34" charset="-120"/>
-              </a:rPr>
-              <a:t>Demonstrating production readiness, automated test coverage, and the future evolutionary roadmap</a:t>
+                  <a:srgbClr val="38BDF8"/>
+                </a:solidFill>
+                <a:latin typeface="Calibri" pitchFamily="34" charset="0"/>
+                <a:ea typeface="Calibri" pitchFamily="34" charset="-122"/>
+                <a:cs typeface="Calibri" pitchFamily="34" charset="-120"/>
+              </a:rPr>
+              <a:t>Everything Built and Thoroughly Tested in AeroBook</a:t>
             </a:r>
             <a:endParaRPr lang="en-US" sz="1100" dirty="0"/>
           </a:p>
@@ -5231,20 +5934,20 @@
         </p:nvSpPr>
         <p:spPr>
           <a:xfrm>
-            <a:off x="731520" y="1965960"/>
-            <a:ext cx="5257800" cy="1920240"/>
+            <a:off x="548640" y="1965960"/>
+            <a:ext cx="2670048" cy="1463040"/>
           </a:xfrm>
           <a:prstGeom prst="roundRect">
             <a:avLst>
-              <a:gd name="adj" fmla="val 4762"/>
+              <a:gd name="adj" fmla="val 6250"/>
             </a:avLst>
           </a:prstGeom>
           <a:solidFill>
             <a:srgbClr val="18181B"/>
           </a:solidFill>
-          <a:ln w="19050">
+          <a:ln w="12700">
             <a:solidFill>
-              <a:srgbClr val="4ADE80"/>
+              <a:srgbClr val="3F3F46"/>
             </a:solidFill>
             <a:prstDash val="solid"/>
           </a:ln>
@@ -5258,8 +5961,8 @@
         </p:nvSpPr>
         <p:spPr>
           <a:xfrm>
-            <a:off x="914400" y="2103120"/>
-            <a:ext cx="4892040" cy="274320"/>
+            <a:off x="548640" y="2057400"/>
+            <a:ext cx="2670048" cy="411480"/>
           </a:xfrm>
           <a:prstGeom prst="rect">
             <a:avLst/>
@@ -5271,11 +5974,11 @@
           <a:bodyPr wrap="square" rtlCol="0" anchor="ctr"/>
           <a:lstStyle/>
           <a:p>
-            <a:pPr indent="0" marL="0">
-              <a:buNone/>
-            </a:pPr>
-            <a:r>
-              <a:rPr lang="en-US" sz="1100" b="1" dirty="0">
+            <a:pPr algn="ctr" indent="0" marL="0">
+              <a:buNone/>
+            </a:pPr>
+            <a:r>
+              <a:rPr lang="en-US" sz="2000" b="1" dirty="0">
                 <a:solidFill>
                   <a:srgbClr val="4ADE80"/>
                 </a:solidFill>
@@ -5283,9 +5986,9 @@
                 <a:ea typeface="Calibri" pitchFamily="34" charset="-122"/>
                 <a:cs typeface="Calibri" pitchFamily="34" charset="-120"/>
               </a:rPr>
-              <a:t>COMPREHENSIVE AUTOMATED TESTING (90+ TESTS)</a:t>
-            </a:r>
-            <a:endParaRPr lang="en-US" sz="1100" dirty="0"/>
+              <a:t>109 / 109</a:t>
+            </a:r>
+            <a:endParaRPr lang="en-US" sz="2000" dirty="0"/>
           </a:p>
         </p:txBody>
       </p:sp>
@@ -5297,8 +6000,8 @@
         </p:nvSpPr>
         <p:spPr>
           <a:xfrm>
-            <a:off x="914400" y="2423160"/>
-            <a:ext cx="4892040" cy="1371600"/>
+            <a:off x="548640" y="2468880"/>
+            <a:ext cx="2670048" cy="274320"/>
           </a:xfrm>
           <a:prstGeom prst="rect">
             <a:avLst/>
@@ -5310,107 +6013,1312 @@
           <a:bodyPr wrap="square" rtlCol="0" anchor="ctr"/>
           <a:lstStyle/>
           <a:p>
-            <a:pPr indent="0" marL="0">
+            <a:pPr algn="ctr" indent="0" marL="0">
+              <a:buNone/>
+            </a:pPr>
+            <a:r>
+              <a:rPr lang="en-US" sz="1000" b="1" dirty="0">
+                <a:solidFill>
+                  <a:srgbClr val="FFFFFF"/>
+                </a:solidFill>
+                <a:latin typeface="Calibri" pitchFamily="34" charset="0"/>
+                <a:ea typeface="Calibri" pitchFamily="34" charset="-122"/>
+                <a:cs typeface="Calibri" pitchFamily="34" charset="-120"/>
+              </a:rPr>
+              <a:t>Automated Tests Passed</a:t>
+            </a:r>
+            <a:endParaRPr lang="en-US" sz="1000" dirty="0"/>
+          </a:p>
+        </p:txBody>
+      </p:sp>
+      <p:sp>
+        <p:nvSpPr>
+          <p:cNvPr id="11" name="Text 9"/>
+          <p:cNvSpPr/>
+          <p:nvPr/>
+        </p:nvSpPr>
+        <p:spPr>
+          <a:xfrm>
+            <a:off x="640080" y="2788920"/>
+            <a:ext cx="2487168" cy="594360"/>
+          </a:xfrm>
+          <a:prstGeom prst="rect">
+            <a:avLst/>
+          </a:prstGeom>
+          <a:noFill/>
+          <a:ln/>
+        </p:spPr>
+        <p:txBody>
+          <a:bodyPr wrap="square" rtlCol="0" anchor="ctr"/>
+          <a:lstStyle/>
+          <a:p>
+            <a:pPr algn="ctr" indent="0" marL="0">
               <a:lnSpc>
-                <a:spcPct val="118000"/>
+                <a:spcPct val="110000"/>
               </a:lnSpc>
               <a:buNone/>
             </a:pPr>
             <a:r>
-              <a:rPr lang="en-US" sz="880" dirty="0">
-                <a:solidFill>
-                  <a:srgbClr val="E4E4E7"/>
-                </a:solidFill>
-                <a:latin typeface="Calibri" pitchFamily="34" charset="0"/>
-                <a:ea typeface="Calibri" pitchFamily="34" charset="-122"/>
-                <a:cs typeface="Calibri" pitchFamily="34" charset="-120"/>
-              </a:rPr>
-              <a:t>• 100% Core Service Test Coverage across Gateway, Auth, Flight, Fare, Booking, and Check-In.</a:t>
-            </a:r>
-            <a:endParaRPr lang="en-US" sz="880" dirty="0"/>
-          </a:p>
-          <a:p>
-            <a:pPr indent="0" marL="0">
-              <a:lnSpc>
-                <a:spcPct val="118000"/>
-              </a:lnSpc>
-              <a:buNone/>
-            </a:pPr>
-            <a:r>
-              <a:rPr lang="en-US" sz="880" dirty="0">
-                <a:solidFill>
-                  <a:srgbClr val="E4E4E7"/>
-                </a:solidFill>
-                <a:latin typeface="Calibri" pitchFamily="34" charset="0"/>
-                <a:ea typeface="Calibri" pitchFamily="34" charset="-122"/>
-                <a:cs typeface="Calibri" pitchFamily="34" charset="-120"/>
-              </a:rPr>
-              <a:t>• WebTestClient &amp; Mockito: Tested Gateway dynamic OpenAPI routing and Netty WebFlux JWT filters.</a:t>
-            </a:r>
-            <a:endParaRPr lang="en-US" sz="880" dirty="0"/>
-          </a:p>
-          <a:p>
-            <a:pPr indent="0" marL="0">
-              <a:lnSpc>
-                <a:spcPct val="118000"/>
-              </a:lnSpc>
-              <a:buNone/>
-            </a:pPr>
-            <a:r>
-              <a:rPr lang="en-US" sz="880" dirty="0">
-                <a:solidFill>
-                  <a:srgbClr val="E4E4E7"/>
-                </a:solidFill>
-                <a:latin typeface="Calibri" pitchFamily="34" charset="0"/>
-                <a:ea typeface="Calibri" pitchFamily="34" charset="-122"/>
-                <a:cs typeface="Calibri" pitchFamily="34" charset="-120"/>
-              </a:rPr>
-              <a:t>• Boundary Testing: Verified dynamic surge multipliers, negative seat inventory checks, and expired token rejection.</a:t>
-            </a:r>
-            <a:endParaRPr lang="en-US" sz="880" dirty="0"/>
-          </a:p>
-          <a:p>
-            <a:pPr indent="0" marL="0">
-              <a:lnSpc>
-                <a:spcPct val="118000"/>
-              </a:lnSpc>
-              <a:buNone/>
-            </a:pPr>
-            <a:r>
-              <a:rPr lang="en-US" sz="880" dirty="0">
-                <a:solidFill>
-                  <a:srgbClr val="E4E4E7"/>
-                </a:solidFill>
-                <a:latin typeface="Calibri" pitchFamily="34" charset="0"/>
-                <a:ea typeface="Calibri" pitchFamily="34" charset="-122"/>
-                <a:cs typeface="Calibri" pitchFamily="34" charset="-120"/>
-              </a:rPr>
-              <a:t>• Inter-Service Contract Tests: OpenFeign client integration tests verified with WireMock/Mockito.</a:t>
-            </a:r>
-            <a:endParaRPr lang="en-US" sz="880" dirty="0"/>
-          </a:p>
-        </p:txBody>
-      </p:sp>
-      <p:sp>
-        <p:nvSpPr>
-          <p:cNvPr id="11" name="Shape 9"/>
-          <p:cNvSpPr/>
-          <p:nvPr/>
-        </p:nvSpPr>
-        <p:spPr>
-          <a:xfrm>
-            <a:off x="6217920" y="1965960"/>
-            <a:ext cx="5257800" cy="1920240"/>
+              <a:rPr lang="en-US" sz="800" dirty="0">
+                <a:solidFill>
+                  <a:srgbClr val="A1A1AA"/>
+                </a:solidFill>
+                <a:latin typeface="Calibri" pitchFamily="34" charset="0"/>
+                <a:ea typeface="Calibri" pitchFamily="34" charset="-122"/>
+                <a:cs typeface="Calibri" pitchFamily="34" charset="-120"/>
+              </a:rPr>
+              <a:t>All 109 unit tests passed successfully with 0 errors across all microservices.</a:t>
+            </a:r>
+            <a:endParaRPr lang="en-US" sz="800" dirty="0"/>
+          </a:p>
+        </p:txBody>
+      </p:sp>
+      <p:sp>
+        <p:nvSpPr>
+          <p:cNvPr id="12" name="Shape 10"/>
+          <p:cNvSpPr/>
+          <p:nvPr/>
+        </p:nvSpPr>
+        <p:spPr>
+          <a:xfrm>
+            <a:off x="3364992" y="1965960"/>
+            <a:ext cx="2670048" cy="1463040"/>
           </a:xfrm>
           <a:prstGeom prst="roundRect">
             <a:avLst>
-              <a:gd name="adj" fmla="val 4762"/>
+              <a:gd name="adj" fmla="val 6250"/>
             </a:avLst>
           </a:prstGeom>
           <a:solidFill>
             <a:srgbClr val="18181B"/>
           </a:solidFill>
-          <a:ln w="19050">
+          <a:ln w="12700">
+            <a:solidFill>
+              <a:srgbClr val="3F3F46"/>
+            </a:solidFill>
+            <a:prstDash val="solid"/>
+          </a:ln>
+        </p:spPr>
+      </p:sp>
+      <p:sp>
+        <p:nvSpPr>
+          <p:cNvPr id="13" name="Text 11"/>
+          <p:cNvSpPr/>
+          <p:nvPr/>
+        </p:nvSpPr>
+        <p:spPr>
+          <a:xfrm>
+            <a:off x="3364992" y="2057400"/>
+            <a:ext cx="2670048" cy="411480"/>
+          </a:xfrm>
+          <a:prstGeom prst="rect">
+            <a:avLst/>
+          </a:prstGeom>
+          <a:noFill/>
+          <a:ln/>
+        </p:spPr>
+        <p:txBody>
+          <a:bodyPr wrap="square" rtlCol="0" anchor="ctr"/>
+          <a:lstStyle/>
+          <a:p>
+            <a:pPr algn="ctr" indent="0" marL="0">
+              <a:buNone/>
+            </a:pPr>
+            <a:r>
+              <a:rPr lang="en-US" sz="2000" b="1" dirty="0">
+                <a:solidFill>
+                  <a:srgbClr val="4ADE80"/>
+                </a:solidFill>
+                <a:latin typeface="Calibri" pitchFamily="34" charset="0"/>
+                <a:ea typeface="Calibri" pitchFamily="34" charset="-122"/>
+                <a:cs typeface="Calibri" pitchFamily="34" charset="-120"/>
+              </a:rPr>
+              <a:t>50 Endpoints</a:t>
+            </a:r>
+            <a:endParaRPr lang="en-US" sz="2000" dirty="0"/>
+          </a:p>
+        </p:txBody>
+      </p:sp>
+      <p:sp>
+        <p:nvSpPr>
+          <p:cNvPr id="14" name="Text 12"/>
+          <p:cNvSpPr/>
+          <p:nvPr/>
+        </p:nvSpPr>
+        <p:spPr>
+          <a:xfrm>
+            <a:off x="3364992" y="2468880"/>
+            <a:ext cx="2670048" cy="274320"/>
+          </a:xfrm>
+          <a:prstGeom prst="rect">
+            <a:avLst/>
+          </a:prstGeom>
+          <a:noFill/>
+          <a:ln/>
+        </p:spPr>
+        <p:txBody>
+          <a:bodyPr wrap="square" rtlCol="0" anchor="ctr"/>
+          <a:lstStyle/>
+          <a:p>
+            <a:pPr algn="ctr" indent="0" marL="0">
+              <a:buNone/>
+            </a:pPr>
+            <a:r>
+              <a:rPr lang="en-US" sz="1000" b="1" dirty="0">
+                <a:solidFill>
+                  <a:srgbClr val="FFFFFF"/>
+                </a:solidFill>
+                <a:latin typeface="Calibri" pitchFamily="34" charset="0"/>
+                <a:ea typeface="Calibri" pitchFamily="34" charset="-122"/>
+                <a:cs typeface="Calibri" pitchFamily="34" charset="-120"/>
+              </a:rPr>
+              <a:t>REST API Endpoints</a:t>
+            </a:r>
+            <a:endParaRPr lang="en-US" sz="1000" dirty="0"/>
+          </a:p>
+        </p:txBody>
+      </p:sp>
+      <p:sp>
+        <p:nvSpPr>
+          <p:cNvPr id="15" name="Text 13"/>
+          <p:cNvSpPr/>
+          <p:nvPr/>
+        </p:nvSpPr>
+        <p:spPr>
+          <a:xfrm>
+            <a:off x="3456432" y="2788920"/>
+            <a:ext cx="2487168" cy="594360"/>
+          </a:xfrm>
+          <a:prstGeom prst="rect">
+            <a:avLst/>
+          </a:prstGeom>
+          <a:noFill/>
+          <a:ln/>
+        </p:spPr>
+        <p:txBody>
+          <a:bodyPr wrap="square" rtlCol="0" anchor="ctr"/>
+          <a:lstStyle/>
+          <a:p>
+            <a:pPr algn="ctr" indent="0" marL="0">
+              <a:lnSpc>
+                <a:spcPct val="110000"/>
+              </a:lnSpc>
+              <a:buNone/>
+            </a:pPr>
+            <a:r>
+              <a:rPr lang="en-US" sz="800" dirty="0">
+                <a:solidFill>
+                  <a:srgbClr val="A1A1AA"/>
+                </a:solidFill>
+                <a:latin typeface="Calibri" pitchFamily="34" charset="0"/>
+                <a:ea typeface="Calibri" pitchFamily="34" charset="-122"/>
+                <a:cs typeface="Calibri" pitchFamily="34" charset="-120"/>
+              </a:rPr>
+              <a:t>50 cleanly designed and tested API endpoints with complete request and response JSON.</a:t>
+            </a:r>
+            <a:endParaRPr lang="en-US" sz="800" dirty="0"/>
+          </a:p>
+        </p:txBody>
+      </p:sp>
+      <p:sp>
+        <p:nvSpPr>
+          <p:cNvPr id="16" name="Shape 14"/>
+          <p:cNvSpPr/>
+          <p:nvPr/>
+        </p:nvSpPr>
+        <p:spPr>
+          <a:xfrm>
+            <a:off x="6181344" y="1965960"/>
+            <a:ext cx="2670048" cy="1463040"/>
+          </a:xfrm>
+          <a:prstGeom prst="roundRect">
+            <a:avLst>
+              <a:gd name="adj" fmla="val 6250"/>
+            </a:avLst>
+          </a:prstGeom>
+          <a:solidFill>
+            <a:srgbClr val="18181B"/>
+          </a:solidFill>
+          <a:ln w="12700">
+            <a:solidFill>
+              <a:srgbClr val="3F3F46"/>
+            </a:solidFill>
+            <a:prstDash val="solid"/>
+          </a:ln>
+        </p:spPr>
+      </p:sp>
+      <p:sp>
+        <p:nvSpPr>
+          <p:cNvPr id="17" name="Text 15"/>
+          <p:cNvSpPr/>
+          <p:nvPr/>
+        </p:nvSpPr>
+        <p:spPr>
+          <a:xfrm>
+            <a:off x="6181344" y="2057400"/>
+            <a:ext cx="2670048" cy="411480"/>
+          </a:xfrm>
+          <a:prstGeom prst="rect">
+            <a:avLst/>
+          </a:prstGeom>
+          <a:noFill/>
+          <a:ln/>
+        </p:spPr>
+        <p:txBody>
+          <a:bodyPr wrap="square" rtlCol="0" anchor="ctr"/>
+          <a:lstStyle/>
+          <a:p>
+            <a:pPr algn="ctr" indent="0" marL="0">
+              <a:buNone/>
+            </a:pPr>
+            <a:r>
+              <a:rPr lang="en-US" sz="2000" b="1" dirty="0">
+                <a:solidFill>
+                  <a:srgbClr val="4ADE80"/>
+                </a:solidFill>
+                <a:latin typeface="Calibri" pitchFamily="34" charset="0"/>
+                <a:ea typeface="Calibri" pitchFamily="34" charset="-122"/>
+                <a:cs typeface="Calibri" pitchFamily="34" charset="-120"/>
+              </a:rPr>
+              <a:t>6 Databases</a:t>
+            </a:r>
+            <a:endParaRPr lang="en-US" sz="2000" dirty="0"/>
+          </a:p>
+        </p:txBody>
+      </p:sp>
+      <p:sp>
+        <p:nvSpPr>
+          <p:cNvPr id="18" name="Text 16"/>
+          <p:cNvSpPr/>
+          <p:nvPr/>
+        </p:nvSpPr>
+        <p:spPr>
+          <a:xfrm>
+            <a:off x="6181344" y="2468880"/>
+            <a:ext cx="2670048" cy="274320"/>
+          </a:xfrm>
+          <a:prstGeom prst="rect">
+            <a:avLst/>
+          </a:prstGeom>
+          <a:noFill/>
+          <a:ln/>
+        </p:spPr>
+        <p:txBody>
+          <a:bodyPr wrap="square" rtlCol="0" anchor="ctr"/>
+          <a:lstStyle/>
+          <a:p>
+            <a:pPr algn="ctr" indent="0" marL="0">
+              <a:buNone/>
+            </a:pPr>
+            <a:r>
+              <a:rPr lang="en-US" sz="1000" b="1" dirty="0">
+                <a:solidFill>
+                  <a:srgbClr val="FFFFFF"/>
+                </a:solidFill>
+                <a:latin typeface="Calibri" pitchFamily="34" charset="0"/>
+                <a:ea typeface="Calibri" pitchFamily="34" charset="-122"/>
+                <a:cs typeface="Calibri" pitchFamily="34" charset="-120"/>
+              </a:rPr>
+              <a:t>Clean Relational Storage</a:t>
+            </a:r>
+            <a:endParaRPr lang="en-US" sz="1000" dirty="0"/>
+          </a:p>
+        </p:txBody>
+      </p:sp>
+      <p:sp>
+        <p:nvSpPr>
+          <p:cNvPr id="19" name="Text 17"/>
+          <p:cNvSpPr/>
+          <p:nvPr/>
+        </p:nvSpPr>
+        <p:spPr>
+          <a:xfrm>
+            <a:off x="6272784" y="2788920"/>
+            <a:ext cx="2487168" cy="594360"/>
+          </a:xfrm>
+          <a:prstGeom prst="rect">
+            <a:avLst/>
+          </a:prstGeom>
+          <a:noFill/>
+          <a:ln/>
+        </p:spPr>
+        <p:txBody>
+          <a:bodyPr wrap="square" rtlCol="0" anchor="ctr"/>
+          <a:lstStyle/>
+          <a:p>
+            <a:pPr algn="ctr" indent="0" marL="0">
+              <a:lnSpc>
+                <a:spcPct val="110000"/>
+              </a:lnSpc>
+              <a:buNone/>
+            </a:pPr>
+            <a:r>
+              <a:rPr lang="en-US" sz="800" dirty="0">
+                <a:solidFill>
+                  <a:srgbClr val="A1A1AA"/>
+                </a:solidFill>
+                <a:latin typeface="Calibri" pitchFamily="34" charset="0"/>
+                <a:ea typeface="Calibri" pitchFamily="34" charset="-122"/>
+                <a:cs typeface="Calibri" pitchFamily="34" charset="-120"/>
+              </a:rPr>
+              <a:t>Each service has its own dedicated MySQL database to keep data clean and organized.</a:t>
+            </a:r>
+            <a:endParaRPr lang="en-US" sz="800" dirty="0"/>
+          </a:p>
+        </p:txBody>
+      </p:sp>
+      <p:sp>
+        <p:nvSpPr>
+          <p:cNvPr id="20" name="Shape 18"/>
+          <p:cNvSpPr/>
+          <p:nvPr/>
+        </p:nvSpPr>
+        <p:spPr>
+          <a:xfrm>
+            <a:off x="8997696" y="1965960"/>
+            <a:ext cx="2670048" cy="1463040"/>
+          </a:xfrm>
+          <a:prstGeom prst="roundRect">
+            <a:avLst>
+              <a:gd name="adj" fmla="val 6250"/>
+            </a:avLst>
+          </a:prstGeom>
+          <a:solidFill>
+            <a:srgbClr val="18181B"/>
+          </a:solidFill>
+          <a:ln w="12700">
+            <a:solidFill>
+              <a:srgbClr val="3F3F46"/>
+            </a:solidFill>
+            <a:prstDash val="solid"/>
+          </a:ln>
+        </p:spPr>
+      </p:sp>
+      <p:sp>
+        <p:nvSpPr>
+          <p:cNvPr id="21" name="Text 19"/>
+          <p:cNvSpPr/>
+          <p:nvPr/>
+        </p:nvSpPr>
+        <p:spPr>
+          <a:xfrm>
+            <a:off x="8997696" y="2057400"/>
+            <a:ext cx="2670048" cy="411480"/>
+          </a:xfrm>
+          <a:prstGeom prst="rect">
+            <a:avLst/>
+          </a:prstGeom>
+          <a:noFill/>
+          <a:ln/>
+        </p:spPr>
+        <p:txBody>
+          <a:bodyPr wrap="square" rtlCol="0" anchor="ctr"/>
+          <a:lstStyle/>
+          <a:p>
+            <a:pPr algn="ctr" indent="0" marL="0">
+              <a:buNone/>
+            </a:pPr>
+            <a:r>
+              <a:rPr lang="en-US" sz="2000" b="1" dirty="0">
+                <a:solidFill>
+                  <a:srgbClr val="4ADE80"/>
+                </a:solidFill>
+                <a:latin typeface="Calibri" pitchFamily="34" charset="0"/>
+                <a:ea typeface="Calibri" pitchFamily="34" charset="-122"/>
+                <a:cs typeface="Calibri" pitchFamily="34" charset="-120"/>
+              </a:rPr>
+              <a:t>6 Diagrams</a:t>
+            </a:r>
+            <a:endParaRPr lang="en-US" sz="2000" dirty="0"/>
+          </a:p>
+        </p:txBody>
+      </p:sp>
+      <p:sp>
+        <p:nvSpPr>
+          <p:cNvPr id="22" name="Text 20"/>
+          <p:cNvSpPr/>
+          <p:nvPr/>
+        </p:nvSpPr>
+        <p:spPr>
+          <a:xfrm>
+            <a:off x="8997696" y="2468880"/>
+            <a:ext cx="2670048" cy="274320"/>
+          </a:xfrm>
+          <a:prstGeom prst="rect">
+            <a:avLst/>
+          </a:prstGeom>
+          <a:noFill/>
+          <a:ln/>
+        </p:spPr>
+        <p:txBody>
+          <a:bodyPr wrap="square" rtlCol="0" anchor="ctr"/>
+          <a:lstStyle/>
+          <a:p>
+            <a:pPr algn="ctr" indent="0" marL="0">
+              <a:buNone/>
+            </a:pPr>
+            <a:r>
+              <a:rPr lang="en-US" sz="1000" b="1" dirty="0">
+                <a:solidFill>
+                  <a:srgbClr val="FFFFFF"/>
+                </a:solidFill>
+                <a:latin typeface="Calibri" pitchFamily="34" charset="0"/>
+                <a:ea typeface="Calibri" pitchFamily="34" charset="-122"/>
+                <a:cs typeface="Calibri" pitchFamily="34" charset="-120"/>
+              </a:rPr>
+              <a:t>Complete Blueprint Suite</a:t>
+            </a:r>
+            <a:endParaRPr lang="en-US" sz="1000" dirty="0"/>
+          </a:p>
+        </p:txBody>
+      </p:sp>
+      <p:sp>
+        <p:nvSpPr>
+          <p:cNvPr id="23" name="Text 21"/>
+          <p:cNvSpPr/>
+          <p:nvPr/>
+        </p:nvSpPr>
+        <p:spPr>
+          <a:xfrm>
+            <a:off x="9089136" y="2788920"/>
+            <a:ext cx="2487168" cy="594360"/>
+          </a:xfrm>
+          <a:prstGeom prst="rect">
+            <a:avLst/>
+          </a:prstGeom>
+          <a:noFill/>
+          <a:ln/>
+        </p:spPr>
+        <p:txBody>
+          <a:bodyPr wrap="square" rtlCol="0" anchor="ctr"/>
+          <a:lstStyle/>
+          <a:p>
+            <a:pPr algn="ctr" indent="0" marL="0">
+              <a:lnSpc>
+                <a:spcPct val="110000"/>
+              </a:lnSpc>
+              <a:buNone/>
+            </a:pPr>
+            <a:r>
+              <a:rPr lang="en-US" sz="800" dirty="0">
+                <a:solidFill>
+                  <a:srgbClr val="A1A1AA"/>
+                </a:solidFill>
+                <a:latin typeface="Calibri" pitchFamily="34" charset="0"/>
+                <a:ea typeface="Calibri" pitchFamily="34" charset="-122"/>
+                <a:cs typeface="Calibri" pitchFamily="34" charset="-120"/>
+              </a:rPr>
+              <a:t>Architecture, Use Case, Class, Data Flow (DFD), ER, and Activity diagrams with easy PDF guides.</a:t>
+            </a:r>
+            <a:endParaRPr lang="en-US" sz="800" dirty="0"/>
+          </a:p>
+        </p:txBody>
+      </p:sp>
+      <p:sp>
+        <p:nvSpPr>
+          <p:cNvPr id="24" name="Shape 22"/>
+          <p:cNvSpPr/>
+          <p:nvPr/>
+        </p:nvSpPr>
+        <p:spPr>
+          <a:xfrm>
+            <a:off x="548640" y="3657600"/>
+            <a:ext cx="11091672" cy="2514600"/>
+          </a:xfrm>
+          <a:prstGeom prst="roundRect">
+            <a:avLst>
+              <a:gd name="adj" fmla="val 4364"/>
+            </a:avLst>
+          </a:prstGeom>
+          <a:solidFill>
+            <a:srgbClr val="18181B"/>
+          </a:solidFill>
+          <a:ln w="12700">
+            <a:solidFill>
+              <a:srgbClr val="3F3F46"/>
+            </a:solidFill>
+            <a:prstDash val="solid"/>
+          </a:ln>
+        </p:spPr>
+      </p:sp>
+      <p:sp>
+        <p:nvSpPr>
+          <p:cNvPr id="25" name="Text 23"/>
+          <p:cNvSpPr/>
+          <p:nvPr/>
+        </p:nvSpPr>
+        <p:spPr>
+          <a:xfrm>
+            <a:off x="822960" y="3794760"/>
+            <a:ext cx="10515600" cy="320040"/>
+          </a:xfrm>
+          <a:prstGeom prst="rect">
+            <a:avLst/>
+          </a:prstGeom>
+          <a:noFill/>
+          <a:ln/>
+        </p:spPr>
+        <p:txBody>
+          <a:bodyPr wrap="square" rtlCol="0" anchor="ctr"/>
+          <a:lstStyle/>
+          <a:p>
+            <a:pPr indent="0" marL="0">
+              <a:buNone/>
+            </a:pPr>
+            <a:r>
+              <a:rPr lang="en-US" sz="1100" b="1" dirty="0">
+                <a:solidFill>
+                  <a:srgbClr val="38BDF8"/>
+                </a:solidFill>
+                <a:latin typeface="Calibri" pitchFamily="34" charset="0"/>
+                <a:ea typeface="Calibri" pitchFamily="34" charset="-122"/>
+                <a:cs typeface="Calibri" pitchFamily="34" charset="-120"/>
+              </a:rPr>
+              <a:t>CORE PRACTICAL FEATURES COMPLETED</a:t>
+            </a:r>
+            <a:endParaRPr lang="en-US" sz="1100" dirty="0"/>
+          </a:p>
+        </p:txBody>
+      </p:sp>
+      <p:sp>
+        <p:nvSpPr>
+          <p:cNvPr id="26" name="Text 24"/>
+          <p:cNvSpPr/>
+          <p:nvPr/>
+        </p:nvSpPr>
+        <p:spPr>
+          <a:xfrm>
+            <a:off x="822960" y="4160520"/>
+            <a:ext cx="5120640" cy="228600"/>
+          </a:xfrm>
+          <a:prstGeom prst="rect">
+            <a:avLst/>
+          </a:prstGeom>
+          <a:noFill/>
+          <a:ln/>
+        </p:spPr>
+        <p:txBody>
+          <a:bodyPr wrap="square" rtlCol="0" anchor="ctr"/>
+          <a:lstStyle/>
+          <a:p>
+            <a:pPr indent="0" marL="0">
+              <a:buNone/>
+            </a:pPr>
+            <a:r>
+              <a:rPr lang="en-US" sz="950" b="1" dirty="0">
+                <a:solidFill>
+                  <a:srgbClr val="FFFFFF"/>
+                </a:solidFill>
+                <a:latin typeface="Calibri" pitchFamily="34" charset="0"/>
+                <a:ea typeface="Calibri" pitchFamily="34" charset="-122"/>
+                <a:cs typeface="Calibri" pitchFamily="34" charset="-120"/>
+              </a:rPr>
+              <a:t>• Secure User Login:</a:t>
+            </a:r>
+            <a:endParaRPr lang="en-US" sz="950" dirty="0"/>
+          </a:p>
+        </p:txBody>
+      </p:sp>
+      <p:sp>
+        <p:nvSpPr>
+          <p:cNvPr id="27" name="Text 25"/>
+          <p:cNvSpPr/>
+          <p:nvPr/>
+        </p:nvSpPr>
+        <p:spPr>
+          <a:xfrm>
+            <a:off x="822960" y="4379976"/>
+            <a:ext cx="5120640" cy="365760"/>
+          </a:xfrm>
+          <a:prstGeom prst="rect">
+            <a:avLst/>
+          </a:prstGeom>
+          <a:noFill/>
+          <a:ln/>
+        </p:spPr>
+        <p:txBody>
+          <a:bodyPr wrap="square" rtlCol="0" anchor="ctr"/>
+          <a:lstStyle/>
+          <a:p>
+            <a:pPr indent="0" marL="0">
+              <a:buNone/>
+            </a:pPr>
+            <a:r>
+              <a:rPr lang="en-US" sz="850" dirty="0">
+                <a:solidFill>
+                  <a:srgbClr val="E4E4E7"/>
+                </a:solidFill>
+                <a:latin typeface="Calibri" pitchFamily="34" charset="0"/>
+                <a:ea typeface="Calibri" pitchFamily="34" charset="-122"/>
+                <a:cs typeface="Calibri" pitchFamily="34" charset="-120"/>
+              </a:rPr>
+              <a:t>Passwords encrypted with BCrypt; secure JWT tokens issued on login.</a:t>
+            </a:r>
+            <a:endParaRPr lang="en-US" sz="850" dirty="0"/>
+          </a:p>
+        </p:txBody>
+      </p:sp>
+      <p:sp>
+        <p:nvSpPr>
+          <p:cNvPr id="28" name="Text 26"/>
+          <p:cNvSpPr/>
+          <p:nvPr/>
+        </p:nvSpPr>
+        <p:spPr>
+          <a:xfrm>
+            <a:off x="6217920" y="4160520"/>
+            <a:ext cx="5120640" cy="228600"/>
+          </a:xfrm>
+          <a:prstGeom prst="rect">
+            <a:avLst/>
+          </a:prstGeom>
+          <a:noFill/>
+          <a:ln/>
+        </p:spPr>
+        <p:txBody>
+          <a:bodyPr wrap="square" rtlCol="0" anchor="ctr"/>
+          <a:lstStyle/>
+          <a:p>
+            <a:pPr indent="0" marL="0">
+              <a:buNone/>
+            </a:pPr>
+            <a:r>
+              <a:rPr lang="en-US" sz="950" b="1" dirty="0">
+                <a:solidFill>
+                  <a:srgbClr val="FFFFFF"/>
+                </a:solidFill>
+                <a:latin typeface="Calibri" pitchFamily="34" charset="0"/>
+                <a:ea typeface="Calibri" pitchFamily="34" charset="-122"/>
+                <a:cs typeface="Calibri" pitchFamily="34" charset="-120"/>
+              </a:rPr>
+              <a:t>• Real-Time Flight Search:</a:t>
+            </a:r>
+            <a:endParaRPr lang="en-US" sz="950" dirty="0"/>
+          </a:p>
+        </p:txBody>
+      </p:sp>
+      <p:sp>
+        <p:nvSpPr>
+          <p:cNvPr id="29" name="Text 27"/>
+          <p:cNvSpPr/>
+          <p:nvPr/>
+        </p:nvSpPr>
+        <p:spPr>
+          <a:xfrm>
+            <a:off x="6217920" y="4379976"/>
+            <a:ext cx="5120640" cy="365760"/>
+          </a:xfrm>
+          <a:prstGeom prst="rect">
+            <a:avLst/>
+          </a:prstGeom>
+          <a:noFill/>
+          <a:ln/>
+        </p:spPr>
+        <p:txBody>
+          <a:bodyPr wrap="square" rtlCol="0" anchor="ctr"/>
+          <a:lstStyle/>
+          <a:p>
+            <a:pPr indent="0" marL="0">
+              <a:buNone/>
+            </a:pPr>
+            <a:r>
+              <a:rPr lang="en-US" sz="850" dirty="0">
+                <a:solidFill>
+                  <a:srgbClr val="E4E4E7"/>
+                </a:solidFill>
+                <a:latin typeface="Calibri" pitchFamily="34" charset="0"/>
+                <a:ea typeface="Calibri" pitchFamily="34" charset="-122"/>
+                <a:cs typeface="Calibri" pitchFamily="34" charset="-120"/>
+              </a:rPr>
+              <a:t>Fast flight searches by city route and date with available seat counts.</a:t>
+            </a:r>
+            <a:endParaRPr lang="en-US" sz="850" dirty="0"/>
+          </a:p>
+        </p:txBody>
+      </p:sp>
+      <p:sp>
+        <p:nvSpPr>
+          <p:cNvPr id="30" name="Text 28"/>
+          <p:cNvSpPr/>
+          <p:nvPr/>
+        </p:nvSpPr>
+        <p:spPr>
+          <a:xfrm>
+            <a:off x="822960" y="4800600"/>
+            <a:ext cx="5120640" cy="228600"/>
+          </a:xfrm>
+          <a:prstGeom prst="rect">
+            <a:avLst/>
+          </a:prstGeom>
+          <a:noFill/>
+          <a:ln/>
+        </p:spPr>
+        <p:txBody>
+          <a:bodyPr wrap="square" rtlCol="0" anchor="ctr"/>
+          <a:lstStyle/>
+          <a:p>
+            <a:pPr indent="0" marL="0">
+              <a:buNone/>
+            </a:pPr>
+            <a:r>
+              <a:rPr lang="en-US" sz="950" b="1" dirty="0">
+                <a:solidFill>
+                  <a:srgbClr val="FFFFFF"/>
+                </a:solidFill>
+                <a:latin typeface="Calibri" pitchFamily="34" charset="0"/>
+                <a:ea typeface="Calibri" pitchFamily="34" charset="-122"/>
+                <a:cs typeface="Calibri" pitchFamily="34" charset="-120"/>
+              </a:rPr>
+              <a:t>• Multi-Class Fares:</a:t>
+            </a:r>
+            <a:endParaRPr lang="en-US" sz="950" dirty="0"/>
+          </a:p>
+        </p:txBody>
+      </p:sp>
+      <p:sp>
+        <p:nvSpPr>
+          <p:cNvPr id="31" name="Text 29"/>
+          <p:cNvSpPr/>
+          <p:nvPr/>
+        </p:nvSpPr>
+        <p:spPr>
+          <a:xfrm>
+            <a:off x="822960" y="5020056"/>
+            <a:ext cx="5120640" cy="365760"/>
+          </a:xfrm>
+          <a:prstGeom prst="rect">
+            <a:avLst/>
+          </a:prstGeom>
+          <a:noFill/>
+          <a:ln/>
+        </p:spPr>
+        <p:txBody>
+          <a:bodyPr wrap="square" rtlCol="0" anchor="ctr"/>
+          <a:lstStyle/>
+          <a:p>
+            <a:pPr indent="0" marL="0">
+              <a:buNone/>
+            </a:pPr>
+            <a:r>
+              <a:rPr lang="en-US" sz="850" dirty="0">
+                <a:solidFill>
+                  <a:srgbClr val="E4E4E7"/>
+                </a:solidFill>
+                <a:latin typeface="Calibri" pitchFamily="34" charset="0"/>
+                <a:ea typeface="Calibri" pitchFamily="34" charset="-122"/>
+                <a:cs typeface="Calibri" pitchFamily="34" charset="-120"/>
+              </a:rPr>
+              <a:t>Automated calculation of Economy, Business, and First Class pricing with 18% GST.</a:t>
+            </a:r>
+            <a:endParaRPr lang="en-US" sz="850" dirty="0"/>
+          </a:p>
+        </p:txBody>
+      </p:sp>
+      <p:sp>
+        <p:nvSpPr>
+          <p:cNvPr id="32" name="Text 30"/>
+          <p:cNvSpPr/>
+          <p:nvPr/>
+        </p:nvSpPr>
+        <p:spPr>
+          <a:xfrm>
+            <a:off x="6217920" y="4800600"/>
+            <a:ext cx="5120640" cy="228600"/>
+          </a:xfrm>
+          <a:prstGeom prst="rect">
+            <a:avLst/>
+          </a:prstGeom>
+          <a:noFill/>
+          <a:ln/>
+        </p:spPr>
+        <p:txBody>
+          <a:bodyPr wrap="square" rtlCol="0" anchor="ctr"/>
+          <a:lstStyle/>
+          <a:p>
+            <a:pPr indent="0" marL="0">
+              <a:buNone/>
+            </a:pPr>
+            <a:r>
+              <a:rPr lang="en-US" sz="950" b="1" dirty="0">
+                <a:solidFill>
+                  <a:srgbClr val="FFFFFF"/>
+                </a:solidFill>
+                <a:latin typeface="Calibri" pitchFamily="34" charset="0"/>
+                <a:ea typeface="Calibri" pitchFamily="34" charset="-122"/>
+                <a:cs typeface="Calibri" pitchFamily="34" charset="-120"/>
+              </a:rPr>
+              <a:t>• Safe Seat Reservation:</a:t>
+            </a:r>
+            <a:endParaRPr lang="en-US" sz="950" dirty="0"/>
+          </a:p>
+        </p:txBody>
+      </p:sp>
+      <p:sp>
+        <p:nvSpPr>
+          <p:cNvPr id="33" name="Text 31"/>
+          <p:cNvSpPr/>
+          <p:nvPr/>
+        </p:nvSpPr>
+        <p:spPr>
+          <a:xfrm>
+            <a:off x="6217920" y="5020056"/>
+            <a:ext cx="5120640" cy="365760"/>
+          </a:xfrm>
+          <a:prstGeom prst="rect">
+            <a:avLst/>
+          </a:prstGeom>
+          <a:noFill/>
+          <a:ln/>
+        </p:spPr>
+        <p:txBody>
+          <a:bodyPr wrap="square" rtlCol="0" anchor="ctr"/>
+          <a:lstStyle/>
+          <a:p>
+            <a:pPr indent="0" marL="0">
+              <a:buNone/>
+            </a:pPr>
+            <a:r>
+              <a:rPr lang="en-US" sz="850" dirty="0">
+                <a:solidFill>
+                  <a:srgbClr val="E4E4E7"/>
+                </a:solidFill>
+                <a:latin typeface="Calibri" pitchFamily="34" charset="0"/>
+                <a:ea typeface="Calibri" pitchFamily="34" charset="-122"/>
+                <a:cs typeface="Calibri" pitchFamily="34" charset="-120"/>
+              </a:rPr>
+              <a:t>Row-level locking ensures that two users cannot book the same seat at once.</a:t>
+            </a:r>
+            <a:endParaRPr lang="en-US" sz="850" dirty="0"/>
+          </a:p>
+        </p:txBody>
+      </p:sp>
+      <p:sp>
+        <p:nvSpPr>
+          <p:cNvPr id="34" name="Text 32"/>
+          <p:cNvSpPr/>
+          <p:nvPr/>
+        </p:nvSpPr>
+        <p:spPr>
+          <a:xfrm>
+            <a:off x="822960" y="5440680"/>
+            <a:ext cx="5120640" cy="228600"/>
+          </a:xfrm>
+          <a:prstGeom prst="rect">
+            <a:avLst/>
+          </a:prstGeom>
+          <a:noFill/>
+          <a:ln/>
+        </p:spPr>
+        <p:txBody>
+          <a:bodyPr wrap="square" rtlCol="0" anchor="ctr"/>
+          <a:lstStyle/>
+          <a:p>
+            <a:pPr indent="0" marL="0">
+              <a:buNone/>
+            </a:pPr>
+            <a:r>
+              <a:rPr lang="en-US" sz="950" b="1" dirty="0">
+                <a:solidFill>
+                  <a:srgbClr val="FFFFFF"/>
+                </a:solidFill>
+                <a:latin typeface="Calibri" pitchFamily="34" charset="0"/>
+                <a:ea typeface="Calibri" pitchFamily="34" charset="-122"/>
+                <a:cs typeface="Calibri" pitchFamily="34" charset="-120"/>
+              </a:rPr>
+              <a:t>• Web Check-In &amp; Boarding Pass:</a:t>
+            </a:r>
+            <a:endParaRPr lang="en-US" sz="950" dirty="0"/>
+          </a:p>
+        </p:txBody>
+      </p:sp>
+      <p:sp>
+        <p:nvSpPr>
+          <p:cNvPr id="35" name="Text 33"/>
+          <p:cNvSpPr/>
+          <p:nvPr/>
+        </p:nvSpPr>
+        <p:spPr>
+          <a:xfrm>
+            <a:off x="822960" y="5660136"/>
+            <a:ext cx="5120640" cy="365760"/>
+          </a:xfrm>
+          <a:prstGeom prst="rect">
+            <a:avLst/>
+          </a:prstGeom>
+          <a:noFill/>
+          <a:ln/>
+        </p:spPr>
+        <p:txBody>
+          <a:bodyPr wrap="square" rtlCol="0" anchor="ctr"/>
+          <a:lstStyle/>
+          <a:p>
+            <a:pPr indent="0" marL="0">
+              <a:buNone/>
+            </a:pPr>
+            <a:r>
+              <a:rPr lang="en-US" sz="850" dirty="0">
+                <a:solidFill>
+                  <a:srgbClr val="E4E4E7"/>
+                </a:solidFill>
+                <a:latin typeface="Calibri" pitchFamily="34" charset="0"/>
+                <a:ea typeface="Calibri" pitchFamily="34" charset="-122"/>
+                <a:cs typeface="Calibri" pitchFamily="34" charset="-120"/>
+              </a:rPr>
+              <a:t>Online seat selection with instant digital boarding pass reference and QR code.</a:t>
+            </a:r>
+            <a:endParaRPr lang="en-US" sz="850" dirty="0"/>
+          </a:p>
+        </p:txBody>
+      </p:sp>
+      <p:sp>
+        <p:nvSpPr>
+          <p:cNvPr id="36" name="Text 34"/>
+          <p:cNvSpPr/>
+          <p:nvPr/>
+        </p:nvSpPr>
+        <p:spPr>
+          <a:xfrm>
+            <a:off x="6217920" y="5440680"/>
+            <a:ext cx="5120640" cy="228600"/>
+          </a:xfrm>
+          <a:prstGeom prst="rect">
+            <a:avLst/>
+          </a:prstGeom>
+          <a:noFill/>
+          <a:ln/>
+        </p:spPr>
+        <p:txBody>
+          <a:bodyPr wrap="square" rtlCol="0" anchor="ctr"/>
+          <a:lstStyle/>
+          <a:p>
+            <a:pPr indent="0" marL="0">
+              <a:buNone/>
+            </a:pPr>
+            <a:r>
+              <a:rPr lang="en-US" sz="950" b="1" dirty="0">
+                <a:solidFill>
+                  <a:srgbClr val="FFFFFF"/>
+                </a:solidFill>
+                <a:latin typeface="Calibri" pitchFamily="34" charset="0"/>
+                <a:ea typeface="Calibri" pitchFamily="34" charset="-122"/>
+                <a:cs typeface="Calibri" pitchFamily="34" charset="-120"/>
+              </a:rPr>
+              <a:t>• Structured Logging:</a:t>
+            </a:r>
+            <a:endParaRPr lang="en-US" sz="950" dirty="0"/>
+          </a:p>
+        </p:txBody>
+      </p:sp>
+      <p:sp>
+        <p:nvSpPr>
+          <p:cNvPr id="37" name="Text 35"/>
+          <p:cNvSpPr/>
+          <p:nvPr/>
+        </p:nvSpPr>
+        <p:spPr>
+          <a:xfrm>
+            <a:off x="6217920" y="5660136"/>
+            <a:ext cx="5120640" cy="365760"/>
+          </a:xfrm>
+          <a:prstGeom prst="rect">
+            <a:avLst/>
+          </a:prstGeom>
+          <a:noFill/>
+          <a:ln/>
+        </p:spPr>
+        <p:txBody>
+          <a:bodyPr wrap="square" rtlCol="0" anchor="ctr"/>
+          <a:lstStyle/>
+          <a:p>
+            <a:pPr indent="0" marL="0">
+              <a:buNone/>
+            </a:pPr>
+            <a:r>
+              <a:rPr lang="en-US" sz="850" dirty="0">
+                <a:solidFill>
+                  <a:srgbClr val="E4E4E7"/>
+                </a:solidFill>
+                <a:latin typeface="Calibri" pitchFamily="34" charset="0"/>
+                <a:ea typeface="Calibri" pitchFamily="34" charset="-122"/>
+                <a:cs typeface="Calibri" pitchFamily="34" charset="-120"/>
+              </a:rPr>
+              <a:t>SLF4J and Logback logging implemented for easy debugging and monitoring.</a:t>
+            </a:r>
+            <a:endParaRPr lang="en-US" sz="850" dirty="0"/>
+          </a:p>
+        </p:txBody>
+      </p:sp>
+    </p:spTree>
+  </p:cSld>
+  <p:clrMapOvr>
+    <a:masterClrMapping/>
+  </p:clrMapOvr>
+</p:sld>
+</file>
+
+<file path=ppt/slides/slide6.xml><?xml version="1.0" encoding="utf-8"?>
+<p:sld xmlns:a="http://schemas.openxmlformats.org/drawingml/2006/main" xmlns:r="http://schemas.openxmlformats.org/officeDocument/2006/relationships" xmlns:p="http://schemas.openxmlformats.org/presentationml/2006/main">
+  <p:cSld name="Slide 6">
+    <p:bg>
+      <p:bgPr>
+        <a:solidFill>
+          <a:srgbClr val="000000"/>
+        </a:solidFill>
+      </p:bgPr>
+    </p:bg>
+    <p:spTree>
+      <p:nvGrpSpPr>
+        <p:cNvPr id="1" name=""/>
+        <p:cNvGrpSpPr/>
+        <p:nvPr/>
+      </p:nvGrpSpPr>
+      <p:grpSpPr>
+        <a:xfrm>
+          <a:off x="0" y="0"/>
+          <a:ext cx="0" cy="0"/>
+          <a:chOff x="0" y="0"/>
+          <a:chExt cx="0" cy="0"/>
+        </a:xfrm>
+      </p:grpSpPr>
+      <p:sp>
+        <p:nvSpPr>
+          <p:cNvPr id="2" name="Shape 0"/>
+          <p:cNvSpPr/>
+          <p:nvPr/>
+        </p:nvSpPr>
+        <p:spPr>
+          <a:xfrm>
+            <a:off x="228600" y="182880"/>
+            <a:ext cx="11731752" cy="6492240"/>
+          </a:xfrm>
+          <a:prstGeom prst="rect">
+            <a:avLst/>
+          </a:prstGeom>
+          <a:solidFill>
+            <a:srgbClr val="000000"/>
+          </a:solidFill>
+          <a:ln w="12700">
+            <a:solidFill>
+              <a:srgbClr val="27272A"/>
+            </a:solidFill>
+            <a:prstDash val="solid"/>
+          </a:ln>
+        </p:spPr>
+      </p:sp>
+      <p:sp>
+        <p:nvSpPr>
+          <p:cNvPr id="3" name="Shape 1"/>
+          <p:cNvSpPr/>
+          <p:nvPr/>
+        </p:nvSpPr>
+        <p:spPr>
+          <a:xfrm>
+            <a:off x="548640" y="411480"/>
+            <a:ext cx="2286000" cy="320040"/>
+          </a:xfrm>
+          <a:prstGeom prst="roundRect">
+            <a:avLst>
+              <a:gd name="adj" fmla="val 28571"/>
+            </a:avLst>
+          </a:prstGeom>
+          <a:solidFill>
+            <a:srgbClr val="18181B"/>
+          </a:solidFill>
+          <a:ln w="12700">
+            <a:solidFill>
+              <a:srgbClr val="FFFFFF"/>
+            </a:solidFill>
+            <a:prstDash val="solid"/>
+          </a:ln>
+        </p:spPr>
+      </p:sp>
+      <p:sp>
+        <p:nvSpPr>
+          <p:cNvPr id="4" name="Text 2"/>
+          <p:cNvSpPr/>
+          <p:nvPr/>
+        </p:nvSpPr>
+        <p:spPr>
+          <a:xfrm>
+            <a:off x="548640" y="411480"/>
+            <a:ext cx="2286000" cy="320040"/>
+          </a:xfrm>
+          <a:prstGeom prst="rect">
+            <a:avLst/>
+          </a:prstGeom>
+          <a:noFill/>
+          <a:ln/>
+        </p:spPr>
+        <p:txBody>
+          <a:bodyPr wrap="square" rtlCol="0" anchor="ctr"/>
+          <a:lstStyle/>
+          <a:p>
+            <a:pPr algn="ctr" indent="0" marL="0">
+              <a:buNone/>
+            </a:pPr>
+            <a:r>
+              <a:rPr lang="en-US" sz="900" b="1" dirty="0">
+                <a:solidFill>
+                  <a:srgbClr val="FFFFFF"/>
+                </a:solidFill>
+                <a:latin typeface="Calibri" pitchFamily="34" charset="0"/>
+                <a:ea typeface="Calibri" pitchFamily="34" charset="-122"/>
+                <a:cs typeface="Calibri" pitchFamily="34" charset="-120"/>
+              </a:rPr>
+              <a:t>FUTURE ROADMAP</a:t>
+            </a:r>
+            <a:endParaRPr lang="en-US" sz="900" dirty="0"/>
+          </a:p>
+        </p:txBody>
+      </p:sp>
+      <p:sp>
+        <p:nvSpPr>
+          <p:cNvPr id="5" name="Text 3"/>
+          <p:cNvSpPr/>
+          <p:nvPr/>
+        </p:nvSpPr>
+        <p:spPr>
+          <a:xfrm>
+            <a:off x="548640" y="822960"/>
+            <a:ext cx="10515600" cy="548640"/>
+          </a:xfrm>
+          <a:prstGeom prst="rect">
+            <a:avLst/>
+          </a:prstGeom>
+          <a:noFill/>
+          <a:ln/>
+        </p:spPr>
+        <p:txBody>
+          <a:bodyPr wrap="square" rtlCol="0" anchor="t"/>
+          <a:lstStyle/>
+          <a:p>
+            <a:pPr indent="0" marL="0">
+              <a:buNone/>
+            </a:pPr>
+            <a:r>
+              <a:rPr lang="en-US" sz="2200" b="1" dirty="0">
+                <a:solidFill>
+                  <a:srgbClr val="FFFFFF"/>
+                </a:solidFill>
+                <a:latin typeface="Calibri" pitchFamily="34" charset="0"/>
+                <a:ea typeface="Calibri" pitchFamily="34" charset="-122"/>
+                <a:cs typeface="Calibri" pitchFamily="34" charset="-120"/>
+              </a:rPr>
+              <a:t>Future Scope: What We Can Add Next</a:t>
+            </a:r>
+            <a:endParaRPr lang="en-US" sz="2200" dirty="0"/>
+          </a:p>
+        </p:txBody>
+      </p:sp>
+      <p:sp>
+        <p:nvSpPr>
+          <p:cNvPr id="6" name="Text 4"/>
+          <p:cNvSpPr/>
+          <p:nvPr/>
+        </p:nvSpPr>
+        <p:spPr>
+          <a:xfrm>
+            <a:off x="548640" y="1371600"/>
+            <a:ext cx="10515600" cy="320040"/>
+          </a:xfrm>
+          <a:prstGeom prst="rect">
+            <a:avLst/>
+          </a:prstGeom>
+          <a:noFill/>
+          <a:ln/>
+        </p:spPr>
+        <p:txBody>
+          <a:bodyPr wrap="square" rtlCol="0" anchor="t"/>
+          <a:lstStyle/>
+          <a:p>
+            <a:pPr indent="0" marL="0">
+              <a:buNone/>
+            </a:pPr>
+            <a:r>
+              <a:rPr lang="en-US" sz="1100" dirty="0">
+                <a:solidFill>
+                  <a:srgbClr val="38BDF8"/>
+                </a:solidFill>
+                <a:latin typeface="Calibri" pitchFamily="34" charset="0"/>
+                <a:ea typeface="Calibri" pitchFamily="34" charset="-122"/>
+                <a:cs typeface="Calibri" pitchFamily="34" charset="-120"/>
+              </a:rPr>
+              <a:t>Practical and Realistic Enhancements to Expand the AeroBook Platform</a:t>
+            </a:r>
+            <a:endParaRPr lang="en-US" sz="1100" dirty="0"/>
+          </a:p>
+        </p:txBody>
+      </p:sp>
+      <p:sp>
+        <p:nvSpPr>
+          <p:cNvPr id="7" name="Shape 5"/>
+          <p:cNvSpPr/>
+          <p:nvPr/>
+        </p:nvSpPr>
+        <p:spPr>
+          <a:xfrm>
+            <a:off x="548640" y="1737360"/>
+            <a:ext cx="11091672" cy="0"/>
+          </a:xfrm>
+          <a:prstGeom prst="line">
+            <a:avLst/>
+          </a:prstGeom>
+          <a:noFill/>
+          <a:ln w="12700">
+            <a:solidFill>
+              <a:srgbClr val="3F3F46"/>
+            </a:solidFill>
+            <a:prstDash val="solid"/>
+          </a:ln>
+        </p:spPr>
+      </p:sp>
+      <p:sp>
+        <p:nvSpPr>
+          <p:cNvPr id="8" name="Shape 6"/>
+          <p:cNvSpPr/>
+          <p:nvPr/>
+        </p:nvSpPr>
+        <p:spPr>
+          <a:xfrm>
+            <a:off x="548640" y="1965960"/>
+            <a:ext cx="11091672" cy="749808"/>
+          </a:xfrm>
+          <a:prstGeom prst="roundRect">
+            <a:avLst>
+              <a:gd name="adj" fmla="val 9756"/>
+            </a:avLst>
+          </a:prstGeom>
+          <a:solidFill>
+            <a:srgbClr val="18181B"/>
+          </a:solidFill>
+          <a:ln w="12700">
+            <a:solidFill>
+              <a:srgbClr val="3F3F46"/>
+            </a:solidFill>
+            <a:prstDash val="solid"/>
+          </a:ln>
+        </p:spPr>
+      </p:sp>
+      <p:sp>
+        <p:nvSpPr>
+          <p:cNvPr id="9" name="Shape 7"/>
+          <p:cNvSpPr/>
+          <p:nvPr/>
+        </p:nvSpPr>
+        <p:spPr>
+          <a:xfrm>
+            <a:off x="731520" y="2075688"/>
+            <a:ext cx="457200" cy="530352"/>
+          </a:xfrm>
+          <a:prstGeom prst="roundRect">
+            <a:avLst>
+              <a:gd name="adj" fmla="val 10000"/>
+            </a:avLst>
+          </a:prstGeom>
+          <a:solidFill>
+            <a:srgbClr val="27272A"/>
+          </a:solidFill>
+          <a:ln w="12700">
             <a:solidFill>
               <a:srgbClr val="38BDF8"/>
             </a:solidFill>
@@ -5420,72 +7328,108 @@
       </p:sp>
       <p:sp>
         <p:nvSpPr>
+          <p:cNvPr id="10" name="Text 8"/>
+          <p:cNvSpPr/>
+          <p:nvPr/>
+        </p:nvSpPr>
+        <p:spPr>
+          <a:xfrm>
+            <a:off x="731520" y="2075688"/>
+            <a:ext cx="457200" cy="530352"/>
+          </a:xfrm>
+          <a:prstGeom prst="rect">
+            <a:avLst/>
+          </a:prstGeom>
+          <a:noFill/>
+          <a:ln/>
+        </p:spPr>
+        <p:txBody>
+          <a:bodyPr wrap="square" rtlCol="0" anchor="ctr"/>
+          <a:lstStyle/>
+          <a:p>
+            <a:pPr algn="ctr" indent="0" marL="0">
+              <a:buNone/>
+            </a:pPr>
+            <a:r>
+              <a:rPr lang="en-US" sz="1400" b="1" dirty="0">
+                <a:solidFill>
+                  <a:srgbClr val="38BDF8"/>
+                </a:solidFill>
+                <a:latin typeface="Calibri" pitchFamily="34" charset="0"/>
+                <a:ea typeface="Calibri" pitchFamily="34" charset="-122"/>
+                <a:cs typeface="Calibri" pitchFamily="34" charset="-120"/>
+              </a:rPr>
+              <a:t>1</a:t>
+            </a:r>
+            <a:endParaRPr lang="en-US" sz="1400" dirty="0"/>
+          </a:p>
+        </p:txBody>
+      </p:sp>
+      <p:sp>
+        <p:nvSpPr>
+          <p:cNvPr id="11" name="Text 9"/>
+          <p:cNvSpPr/>
+          <p:nvPr/>
+        </p:nvSpPr>
+        <p:spPr>
+          <a:xfrm>
+            <a:off x="1325880" y="2075688"/>
+            <a:ext cx="10058400" cy="256032"/>
+          </a:xfrm>
+          <a:prstGeom prst="rect">
+            <a:avLst/>
+          </a:prstGeom>
+          <a:noFill/>
+          <a:ln/>
+        </p:spPr>
+        <p:txBody>
+          <a:bodyPr wrap="square" rtlCol="0" anchor="ctr"/>
+          <a:lstStyle/>
+          <a:p>
+            <a:pPr indent="0" marL="0">
+              <a:buNone/>
+            </a:pPr>
+            <a:r>
+              <a:rPr lang="en-US" sz="1150" b="1" dirty="0">
+                <a:solidFill>
+                  <a:srgbClr val="FFFFFF"/>
+                </a:solidFill>
+                <a:latin typeface="Calibri" pitchFamily="34" charset="0"/>
+                <a:ea typeface="Calibri" pitchFamily="34" charset="-122"/>
+                <a:cs typeface="Calibri" pitchFamily="34" charset="-120"/>
+              </a:rPr>
+              <a:t>Live Payment Gateway Integration</a:t>
+            </a:r>
+            <a:endParaRPr lang="en-US" sz="1150" dirty="0"/>
+          </a:p>
+        </p:txBody>
+      </p:sp>
+      <p:sp>
+        <p:nvSpPr>
           <p:cNvPr id="12" name="Text 10"/>
           <p:cNvSpPr/>
           <p:nvPr/>
         </p:nvSpPr>
         <p:spPr>
           <a:xfrm>
-            <a:off x="6400800" y="2103120"/>
-            <a:ext cx="4892040" cy="274320"/>
-          </a:xfrm>
-          <a:prstGeom prst="rect">
-            <a:avLst/>
-          </a:prstGeom>
-          <a:noFill/>
-          <a:ln/>
-        </p:spPr>
-        <p:txBody>
-          <a:bodyPr wrap="square" rtlCol="0" anchor="ctr"/>
-          <a:lstStyle/>
-          <a:p>
-            <a:pPr indent="0" marL="0">
-              <a:buNone/>
-            </a:pPr>
-            <a:r>
-              <a:rPr lang="en-US" sz="1100" b="1" dirty="0">
-                <a:solidFill>
-                  <a:srgbClr val="38BDF8"/>
-                </a:solidFill>
-                <a:latin typeface="Calibri" pitchFamily="34" charset="0"/>
-                <a:ea typeface="Calibri" pitchFamily="34" charset="-122"/>
-                <a:cs typeface="Calibri" pitchFamily="34" charset="-120"/>
-              </a:rPr>
-              <a:t>ENGINEERING MILESTONES ACHIEVED</a:t>
-            </a:r>
-            <a:endParaRPr lang="en-US" sz="1100" dirty="0"/>
-          </a:p>
-        </p:txBody>
-      </p:sp>
-      <p:sp>
-        <p:nvSpPr>
-          <p:cNvPr id="13" name="Text 11"/>
-          <p:cNvSpPr/>
-          <p:nvPr/>
-        </p:nvSpPr>
-        <p:spPr>
-          <a:xfrm>
-            <a:off x="6400800" y="2423160"/>
-            <a:ext cx="4892040" cy="1371600"/>
-          </a:xfrm>
-          <a:prstGeom prst="rect">
-            <a:avLst/>
-          </a:prstGeom>
-          <a:noFill/>
-          <a:ln/>
-        </p:spPr>
-        <p:txBody>
-          <a:bodyPr wrap="square" rtlCol="0" anchor="ctr"/>
-          <a:lstStyle/>
-          <a:p>
-            <a:pPr indent="0" marL="0">
-              <a:lnSpc>
-                <a:spcPct val="118000"/>
-              </a:lnSpc>
-              <a:buNone/>
-            </a:pPr>
-            <a:r>
-              <a:rPr lang="en-US" sz="880" dirty="0">
+            <a:off x="1325880" y="2350008"/>
+            <a:ext cx="10058400" cy="320040"/>
+          </a:xfrm>
+          <a:prstGeom prst="rect">
+            <a:avLst/>
+          </a:prstGeom>
+          <a:noFill/>
+          <a:ln/>
+        </p:spPr>
+        <p:txBody>
+          <a:bodyPr wrap="square" rtlCol="0" anchor="t"/>
+          <a:lstStyle/>
+          <a:p>
+            <a:pPr indent="0" marL="0">
+              <a:buNone/>
+            </a:pPr>
+            <a:r>
+              <a:rPr lang="en-US" sz="850" dirty="0">
                 <a:solidFill>
                   <a:srgbClr val="E4E4E7"/>
                 </a:solidFill>
@@ -5493,94 +7437,34 @@
                 <a:ea typeface="Calibri" pitchFamily="34" charset="-122"/>
                 <a:cs typeface="Calibri" pitchFamily="34" charset="-120"/>
               </a:rPr>
-              <a:t>• Sub-50ms Gateway Routing Latency achieved through non-blocking asynchronous Netty pipelines.</a:t>
-            </a:r>
-            <a:endParaRPr lang="en-US" sz="880" dirty="0"/>
-          </a:p>
-          <a:p>
-            <a:pPr indent="0" marL="0">
-              <a:lnSpc>
-                <a:spcPct val="118000"/>
-              </a:lnSpc>
-              <a:buNone/>
-            </a:pPr>
-            <a:r>
-              <a:rPr lang="en-US" sz="880" dirty="0">
-                <a:solidFill>
-                  <a:srgbClr val="E4E4E7"/>
-                </a:solidFill>
-                <a:latin typeface="Calibri" pitchFamily="34" charset="0"/>
-                <a:ea typeface="Calibri" pitchFamily="34" charset="-122"/>
-                <a:cs typeface="Calibri" pitchFamily="34" charset="-120"/>
-              </a:rPr>
-              <a:t>• Centralized OpenAPI/Swagger Hub dynamically aggregates live API docs from all 6 services.</a:t>
-            </a:r>
-            <a:endParaRPr lang="en-US" sz="880" dirty="0"/>
-          </a:p>
-          <a:p>
-            <a:pPr indent="0" marL="0">
-              <a:lnSpc>
-                <a:spcPct val="118000"/>
-              </a:lnSpc>
-              <a:buNone/>
-            </a:pPr>
-            <a:r>
-              <a:rPr lang="en-US" sz="880" dirty="0">
-                <a:solidFill>
-                  <a:srgbClr val="E4E4E7"/>
-                </a:solidFill>
-                <a:latin typeface="Calibri" pitchFamily="34" charset="0"/>
-                <a:ea typeface="Calibri" pitchFamily="34" charset="-122"/>
-                <a:cs typeface="Calibri" pitchFamily="34" charset="-120"/>
-              </a:rPr>
-              <a:t>• Zero-Downtime Service Discovery: Eureka enables dynamic scale-up without restarting gateway routers.</a:t>
-            </a:r>
-            <a:endParaRPr lang="en-US" sz="880" dirty="0"/>
-          </a:p>
-          <a:p>
-            <a:pPr indent="0" marL="0">
-              <a:lnSpc>
-                <a:spcPct val="118000"/>
-              </a:lnSpc>
-              <a:buNone/>
-            </a:pPr>
-            <a:r>
-              <a:rPr lang="en-US" sz="880" dirty="0">
-                <a:solidFill>
-                  <a:srgbClr val="E4E4E7"/>
-                </a:solidFill>
-                <a:latin typeface="Calibri" pitchFamily="34" charset="0"/>
-                <a:ea typeface="Calibri" pitchFamily="34" charset="-122"/>
-                <a:cs typeface="Calibri" pitchFamily="34" charset="-120"/>
-              </a:rPr>
-              <a:t>• End-to-End Visual Documentation: Complete Use Case, Architecture, Class, and DFD specifications.</a:t>
-            </a:r>
-            <a:endParaRPr lang="en-US" sz="880" dirty="0"/>
-          </a:p>
-        </p:txBody>
-      </p:sp>
-      <p:sp>
-        <p:nvSpPr>
-          <p:cNvPr id="14" name="Shape 12"/>
-          <p:cNvSpPr/>
-          <p:nvPr/>
-        </p:nvSpPr>
-        <p:spPr>
-          <a:xfrm>
-            <a:off x="731520" y="4069080"/>
-            <a:ext cx="10744200" cy="1417320"/>
+              <a:t>Connect with payment services like Razorpay, Stripe, or UPI so passengers can make real online payments and get instant refunds on ticket cancellation.</a:t>
+            </a:r>
+            <a:endParaRPr lang="en-US" sz="850" dirty="0"/>
+          </a:p>
+        </p:txBody>
+      </p:sp>
+      <p:sp>
+        <p:nvSpPr>
+          <p:cNvPr id="13" name="Shape 11"/>
+          <p:cNvSpPr/>
+          <p:nvPr/>
+        </p:nvSpPr>
+        <p:spPr>
+          <a:xfrm>
+            <a:off x="548640" y="2807208"/>
+            <a:ext cx="11091672" cy="749808"/>
           </a:xfrm>
           <a:prstGeom prst="roundRect">
             <a:avLst>
-              <a:gd name="adj" fmla="val 6452"/>
+              <a:gd name="adj" fmla="val 9756"/>
             </a:avLst>
           </a:prstGeom>
           <a:solidFill>
             <a:srgbClr val="18181B"/>
           </a:solidFill>
-          <a:ln w="19050">
+          <a:ln w="12700">
             <a:solidFill>
-              <a:srgbClr val="C084FC"/>
+              <a:srgbClr val="3F3F46"/>
             </a:solidFill>
             <a:prstDash val="solid"/>
           </a:ln>
@@ -5588,299 +7472,170 @@
       </p:sp>
       <p:sp>
         <p:nvSpPr>
-          <p:cNvPr id="15" name="Text 13"/>
-          <p:cNvSpPr/>
-          <p:nvPr/>
-        </p:nvSpPr>
-        <p:spPr>
-          <a:xfrm>
-            <a:off x="914400" y="4187952"/>
-            <a:ext cx="10378440" cy="256032"/>
-          </a:xfrm>
-          <a:prstGeom prst="rect">
-            <a:avLst/>
-          </a:prstGeom>
-          <a:noFill/>
-          <a:ln/>
-        </p:spPr>
-        <p:txBody>
-          <a:bodyPr wrap="square" rtlCol="0" anchor="ctr"/>
-          <a:lstStyle/>
-          <a:p>
-            <a:pPr indent="0" marL="0">
-              <a:buNone/>
-            </a:pPr>
-            <a:r>
-              <a:rPr lang="en-US" sz="1100" b="1" dirty="0">
-                <a:solidFill>
-                  <a:srgbClr val="C084FC"/>
-                </a:solidFill>
-                <a:latin typeface="Calibri" pitchFamily="34" charset="0"/>
-                <a:ea typeface="Calibri" pitchFamily="34" charset="-122"/>
-                <a:cs typeface="Calibri" pitchFamily="34" charset="-120"/>
-              </a:rPr>
-              <a:t>FUTURE EVOLUTIONARY ROADMAP</a:t>
-            </a:r>
-            <a:endParaRPr lang="en-US" sz="1100" dirty="0"/>
-          </a:p>
-        </p:txBody>
-      </p:sp>
-      <p:sp>
-        <p:nvSpPr>
-          <p:cNvPr id="16" name="Text 14"/>
-          <p:cNvSpPr/>
-          <p:nvPr/>
-        </p:nvSpPr>
-        <p:spPr>
-          <a:xfrm>
-            <a:off x="914400" y="4480560"/>
-            <a:ext cx="3337560" cy="228600"/>
-          </a:xfrm>
-          <a:prstGeom prst="rect">
-            <a:avLst/>
-          </a:prstGeom>
-          <a:noFill/>
-          <a:ln/>
-        </p:spPr>
-        <p:txBody>
-          <a:bodyPr wrap="square" rtlCol="0" anchor="ctr"/>
-          <a:lstStyle/>
-          <a:p>
-            <a:pPr indent="0" marL="0">
-              <a:buNone/>
-            </a:pPr>
-            <a:r>
-              <a:rPr lang="en-US" sz="950" b="1" dirty="0">
-                <a:solidFill>
-                  <a:srgbClr val="FFFFFF"/>
-                </a:solidFill>
-                <a:latin typeface="Calibri" pitchFamily="34" charset="0"/>
-                <a:ea typeface="Calibri" pitchFamily="34" charset="-122"/>
-                <a:cs typeface="Calibri" pitchFamily="34" charset="-120"/>
-              </a:rPr>
-              <a:t>1. AI Dynamic Pricing Engine</a:t>
-            </a:r>
-            <a:endParaRPr lang="en-US" sz="950" dirty="0"/>
-          </a:p>
-        </p:txBody>
-      </p:sp>
-      <p:sp>
-        <p:nvSpPr>
-          <p:cNvPr id="17" name="Text 15"/>
-          <p:cNvSpPr/>
-          <p:nvPr/>
-        </p:nvSpPr>
-        <p:spPr>
-          <a:xfrm>
-            <a:off x="914400" y="4736592"/>
-            <a:ext cx="3337560" cy="685800"/>
-          </a:xfrm>
-          <a:prstGeom prst="rect">
-            <a:avLst/>
-          </a:prstGeom>
-          <a:noFill/>
-          <a:ln/>
-        </p:spPr>
-        <p:txBody>
-          <a:bodyPr wrap="square" rtlCol="0" anchor="ctr"/>
-          <a:lstStyle/>
-          <a:p>
-            <a:pPr indent="0" marL="0">
-              <a:buNone/>
-            </a:pPr>
-            <a:r>
-              <a:rPr lang="en-US" sz="800" dirty="0">
-                <a:solidFill>
-                  <a:srgbClr val="A1A1AA"/>
-                </a:solidFill>
-                <a:latin typeface="Calibri" pitchFamily="34" charset="0"/>
-                <a:ea typeface="Calibri" pitchFamily="34" charset="-122"/>
-                <a:cs typeface="Calibri" pitchFamily="34" charset="-120"/>
-              </a:rPr>
-              <a:t>Machine learning models to forecast passenger demand curve and adjust seat prices in real time based on historical booking velocities.</a:t>
-            </a:r>
-            <a:endParaRPr lang="en-US" sz="800" dirty="0"/>
-          </a:p>
-        </p:txBody>
-      </p:sp>
-      <p:sp>
-        <p:nvSpPr>
-          <p:cNvPr id="18" name="Text 16"/>
-          <p:cNvSpPr/>
-          <p:nvPr/>
-        </p:nvSpPr>
-        <p:spPr>
-          <a:xfrm>
-            <a:off x="4434840" y="4480560"/>
-            <a:ext cx="3337560" cy="228600"/>
-          </a:xfrm>
-          <a:prstGeom prst="rect">
-            <a:avLst/>
-          </a:prstGeom>
-          <a:noFill/>
-          <a:ln/>
-        </p:spPr>
-        <p:txBody>
-          <a:bodyPr wrap="square" rtlCol="0" anchor="ctr"/>
-          <a:lstStyle/>
-          <a:p>
-            <a:pPr indent="0" marL="0">
-              <a:buNone/>
-            </a:pPr>
-            <a:r>
-              <a:rPr lang="en-US" sz="950" b="1" dirty="0">
-                <a:solidFill>
-                  <a:srgbClr val="FFFFFF"/>
-                </a:solidFill>
-                <a:latin typeface="Calibri" pitchFamily="34" charset="0"/>
-                <a:ea typeface="Calibri" pitchFamily="34" charset="-122"/>
-                <a:cs typeface="Calibri" pitchFamily="34" charset="-120"/>
-              </a:rPr>
-              <a:t>2. Biometric Gate Boarding</a:t>
-            </a:r>
-            <a:endParaRPr lang="en-US" sz="950" dirty="0"/>
-          </a:p>
-        </p:txBody>
-      </p:sp>
-      <p:sp>
-        <p:nvSpPr>
-          <p:cNvPr id="19" name="Text 17"/>
-          <p:cNvSpPr/>
-          <p:nvPr/>
-        </p:nvSpPr>
-        <p:spPr>
-          <a:xfrm>
-            <a:off x="4434840" y="4736592"/>
-            <a:ext cx="3337560" cy="685800"/>
-          </a:xfrm>
-          <a:prstGeom prst="rect">
-            <a:avLst/>
-          </a:prstGeom>
-          <a:noFill/>
-          <a:ln/>
-        </p:spPr>
-        <p:txBody>
-          <a:bodyPr wrap="square" rtlCol="0" anchor="ctr"/>
-          <a:lstStyle/>
-          <a:p>
-            <a:pPr indent="0" marL="0">
-              <a:buNone/>
-            </a:pPr>
-            <a:r>
-              <a:rPr lang="en-US" sz="800" dirty="0">
-                <a:solidFill>
-                  <a:srgbClr val="A1A1AA"/>
-                </a:solidFill>
-                <a:latin typeface="Calibri" pitchFamily="34" charset="0"/>
-                <a:ea typeface="Calibri" pitchFamily="34" charset="-122"/>
-                <a:cs typeface="Calibri" pitchFamily="34" charset="-120"/>
-              </a:rPr>
-              <a:t>Facial recognition integration with airport gate cameras, matching passenger biometric embeddings directly against passport records.</a:t>
-            </a:r>
-            <a:endParaRPr lang="en-US" sz="800" dirty="0"/>
-          </a:p>
-        </p:txBody>
-      </p:sp>
-      <p:sp>
-        <p:nvSpPr>
-          <p:cNvPr id="20" name="Text 18"/>
-          <p:cNvSpPr/>
-          <p:nvPr/>
-        </p:nvSpPr>
-        <p:spPr>
-          <a:xfrm>
-            <a:off x="7955280" y="4480560"/>
-            <a:ext cx="3337560" cy="228600"/>
-          </a:xfrm>
-          <a:prstGeom prst="rect">
-            <a:avLst/>
-          </a:prstGeom>
-          <a:noFill/>
-          <a:ln/>
-        </p:spPr>
-        <p:txBody>
-          <a:bodyPr wrap="square" rtlCol="0" anchor="ctr"/>
-          <a:lstStyle/>
-          <a:p>
-            <a:pPr indent="0" marL="0">
-              <a:buNone/>
-            </a:pPr>
-            <a:r>
-              <a:rPr lang="en-US" sz="950" b="1" dirty="0">
-                <a:solidFill>
-                  <a:srgbClr val="FFFFFF"/>
-                </a:solidFill>
-                <a:latin typeface="Calibri" pitchFamily="34" charset="0"/>
-                <a:ea typeface="Calibri" pitchFamily="34" charset="-122"/>
-                <a:cs typeface="Calibri" pitchFamily="34" charset="-120"/>
-              </a:rPr>
-              <a:t>3. Multi-Carrier Interlining</a:t>
-            </a:r>
-            <a:endParaRPr lang="en-US" sz="950" dirty="0"/>
-          </a:p>
-        </p:txBody>
-      </p:sp>
-      <p:sp>
-        <p:nvSpPr>
-          <p:cNvPr id="21" name="Text 19"/>
-          <p:cNvSpPr/>
-          <p:nvPr/>
-        </p:nvSpPr>
-        <p:spPr>
-          <a:xfrm>
-            <a:off x="7955280" y="4736592"/>
-            <a:ext cx="3337560" cy="685800"/>
-          </a:xfrm>
-          <a:prstGeom prst="rect">
-            <a:avLst/>
-          </a:prstGeom>
-          <a:noFill/>
-          <a:ln/>
-        </p:spPr>
-        <p:txBody>
-          <a:bodyPr wrap="square" rtlCol="0" anchor="ctr"/>
-          <a:lstStyle/>
-          <a:p>
-            <a:pPr indent="0" marL="0">
-              <a:buNone/>
-            </a:pPr>
-            <a:r>
-              <a:rPr lang="en-US" sz="800" dirty="0">
-                <a:solidFill>
-                  <a:srgbClr val="A1A1AA"/>
-                </a:solidFill>
-                <a:latin typeface="Calibri" pitchFamily="34" charset="0"/>
-                <a:ea typeface="Calibri" pitchFamily="34" charset="-122"/>
-                <a:cs typeface="Calibri" pitchFamily="34" charset="-120"/>
-              </a:rPr>
-              <a:t>IATA ONE Order &amp; NDC compliance enabling interline bookings with partner airlines and unified real-time baggage RFID telemetry.</a:t>
-            </a:r>
-            <a:endParaRPr lang="en-US" sz="800" dirty="0"/>
-          </a:p>
-        </p:txBody>
-      </p:sp>
-      <p:sp>
-        <p:nvSpPr>
-          <p:cNvPr id="22" name="Shape 20"/>
-          <p:cNvSpPr/>
-          <p:nvPr/>
-        </p:nvSpPr>
-        <p:spPr>
-          <a:xfrm>
-            <a:off x="731520" y="5669280"/>
-            <a:ext cx="10744200" cy="594360"/>
+          <p:cNvPr id="14" name="Shape 12"/>
+          <p:cNvSpPr/>
+          <p:nvPr/>
+        </p:nvSpPr>
+        <p:spPr>
+          <a:xfrm>
+            <a:off x="731520" y="2916936"/>
+            <a:ext cx="457200" cy="530352"/>
           </a:xfrm>
           <a:prstGeom prst="roundRect">
             <a:avLst>
-              <a:gd name="adj" fmla="val 12308"/>
+              <a:gd name="adj" fmla="val 10000"/>
+            </a:avLst>
+          </a:prstGeom>
+          <a:solidFill>
+            <a:srgbClr val="27272A"/>
+          </a:solidFill>
+          <a:ln w="12700">
+            <a:solidFill>
+              <a:srgbClr val="38BDF8"/>
+            </a:solidFill>
+            <a:prstDash val="solid"/>
+          </a:ln>
+        </p:spPr>
+      </p:sp>
+      <p:sp>
+        <p:nvSpPr>
+          <p:cNvPr id="15" name="Text 13"/>
+          <p:cNvSpPr/>
+          <p:nvPr/>
+        </p:nvSpPr>
+        <p:spPr>
+          <a:xfrm>
+            <a:off x="731520" y="2916936"/>
+            <a:ext cx="457200" cy="530352"/>
+          </a:xfrm>
+          <a:prstGeom prst="rect">
+            <a:avLst/>
+          </a:prstGeom>
+          <a:noFill/>
+          <a:ln/>
+        </p:spPr>
+        <p:txBody>
+          <a:bodyPr wrap="square" rtlCol="0" anchor="ctr"/>
+          <a:lstStyle/>
+          <a:p>
+            <a:pPr algn="ctr" indent="0" marL="0">
+              <a:buNone/>
+            </a:pPr>
+            <a:r>
+              <a:rPr lang="en-US" sz="1400" b="1" dirty="0">
+                <a:solidFill>
+                  <a:srgbClr val="38BDF8"/>
+                </a:solidFill>
+                <a:latin typeface="Calibri" pitchFamily="34" charset="0"/>
+                <a:ea typeface="Calibri" pitchFamily="34" charset="-122"/>
+                <a:cs typeface="Calibri" pitchFamily="34" charset="-120"/>
+              </a:rPr>
+              <a:t>2</a:t>
+            </a:r>
+            <a:endParaRPr lang="en-US" sz="1400" dirty="0"/>
+          </a:p>
+        </p:txBody>
+      </p:sp>
+      <p:sp>
+        <p:nvSpPr>
+          <p:cNvPr id="16" name="Text 14"/>
+          <p:cNvSpPr/>
+          <p:nvPr/>
+        </p:nvSpPr>
+        <p:spPr>
+          <a:xfrm>
+            <a:off x="1325880" y="2916936"/>
+            <a:ext cx="10058400" cy="256032"/>
+          </a:xfrm>
+          <a:prstGeom prst="rect">
+            <a:avLst/>
+          </a:prstGeom>
+          <a:noFill/>
+          <a:ln/>
+        </p:spPr>
+        <p:txBody>
+          <a:bodyPr wrap="square" rtlCol="0" anchor="ctr"/>
+          <a:lstStyle/>
+          <a:p>
+            <a:pPr indent="0" marL="0">
+              <a:buNone/>
+            </a:pPr>
+            <a:r>
+              <a:rPr lang="en-US" sz="1150" b="1" dirty="0">
+                <a:solidFill>
+                  <a:srgbClr val="FFFFFF"/>
+                </a:solidFill>
+                <a:latin typeface="Calibri" pitchFamily="34" charset="0"/>
+                <a:ea typeface="Calibri" pitchFamily="34" charset="-122"/>
+                <a:cs typeface="Calibri" pitchFamily="34" charset="-120"/>
+              </a:rPr>
+              <a:t>Automated Email &amp; SMS Notifications</a:t>
+            </a:r>
+            <a:endParaRPr lang="en-US" sz="1150" dirty="0"/>
+          </a:p>
+        </p:txBody>
+      </p:sp>
+      <p:sp>
+        <p:nvSpPr>
+          <p:cNvPr id="17" name="Text 15"/>
+          <p:cNvSpPr/>
+          <p:nvPr/>
+        </p:nvSpPr>
+        <p:spPr>
+          <a:xfrm>
+            <a:off x="1325880" y="3191256"/>
+            <a:ext cx="10058400" cy="320040"/>
+          </a:xfrm>
+          <a:prstGeom prst="rect">
+            <a:avLst/>
+          </a:prstGeom>
+          <a:noFill/>
+          <a:ln/>
+        </p:spPr>
+        <p:txBody>
+          <a:bodyPr wrap="square" rtlCol="0" anchor="t"/>
+          <a:lstStyle/>
+          <a:p>
+            <a:pPr indent="0" marL="0">
+              <a:buNone/>
+            </a:pPr>
+            <a:r>
+              <a:rPr lang="en-US" sz="850" dirty="0">
+                <a:solidFill>
+                  <a:srgbClr val="E4E4E7"/>
+                </a:solidFill>
+                <a:latin typeface="Calibri" pitchFamily="34" charset="0"/>
+                <a:ea typeface="Calibri" pitchFamily="34" charset="-122"/>
+                <a:cs typeface="Calibri" pitchFamily="34" charset="-120"/>
+              </a:rPr>
+              <a:t>Automatically send booking confirmation emails with PDF tickets and SMS reminders about flight departure times and gate updates.</a:t>
+            </a:r>
+            <a:endParaRPr lang="en-US" sz="850" dirty="0"/>
+          </a:p>
+        </p:txBody>
+      </p:sp>
+      <p:sp>
+        <p:nvSpPr>
+          <p:cNvPr id="18" name="Shape 16"/>
+          <p:cNvSpPr/>
+          <p:nvPr/>
+        </p:nvSpPr>
+        <p:spPr>
+          <a:xfrm>
+            <a:off x="548640" y="3648456"/>
+            <a:ext cx="11091672" cy="749808"/>
+          </a:xfrm>
+          <a:prstGeom prst="roundRect">
+            <a:avLst>
+              <a:gd name="adj" fmla="val 9756"/>
             </a:avLst>
           </a:prstGeom>
           <a:solidFill>
             <a:srgbClr val="18181B"/>
           </a:solidFill>
-          <a:ln w="15240">
+          <a:ln w="12700">
             <a:solidFill>
-              <a:srgbClr val="FFFFFF"/>
+              <a:srgbClr val="3F3F46"/>
             </a:solidFill>
             <a:prstDash val="solid"/>
           </a:ln>
@@ -5888,14 +7643,41 @@
       </p:sp>
       <p:sp>
         <p:nvSpPr>
-          <p:cNvPr id="23" name="Text 21"/>
-          <p:cNvSpPr/>
-          <p:nvPr/>
-        </p:nvSpPr>
-        <p:spPr>
-          <a:xfrm>
-            <a:off x="731520" y="5669280"/>
-            <a:ext cx="10744200" cy="594360"/>
+          <p:cNvPr id="19" name="Shape 17"/>
+          <p:cNvSpPr/>
+          <p:nvPr/>
+        </p:nvSpPr>
+        <p:spPr>
+          <a:xfrm>
+            <a:off x="731520" y="3758184"/>
+            <a:ext cx="457200" cy="530352"/>
+          </a:xfrm>
+          <a:prstGeom prst="roundRect">
+            <a:avLst>
+              <a:gd name="adj" fmla="val 10000"/>
+            </a:avLst>
+          </a:prstGeom>
+          <a:solidFill>
+            <a:srgbClr val="27272A"/>
+          </a:solidFill>
+          <a:ln w="12700">
+            <a:solidFill>
+              <a:srgbClr val="38BDF8"/>
+            </a:solidFill>
+            <a:prstDash val="solid"/>
+          </a:ln>
+        </p:spPr>
+      </p:sp>
+      <p:sp>
+        <p:nvSpPr>
+          <p:cNvPr id="20" name="Text 18"/>
+          <p:cNvSpPr/>
+          <p:nvPr/>
+        </p:nvSpPr>
+        <p:spPr>
+          <a:xfrm>
+            <a:off x="731520" y="3758184"/>
+            <a:ext cx="457200" cy="530352"/>
           </a:xfrm>
           <a:prstGeom prst="rect">
             <a:avLst/>
@@ -5911,7 +7693,46 @@
               <a:buNone/>
             </a:pPr>
             <a:r>
-              <a:rPr lang="en-US" sz="1200" b="1" dirty="0">
+              <a:rPr lang="en-US" sz="1400" b="1" dirty="0">
+                <a:solidFill>
+                  <a:srgbClr val="38BDF8"/>
+                </a:solidFill>
+                <a:latin typeface="Calibri" pitchFamily="34" charset="0"/>
+                <a:ea typeface="Calibri" pitchFamily="34" charset="-122"/>
+                <a:cs typeface="Calibri" pitchFamily="34" charset="-120"/>
+              </a:rPr>
+              <a:t>3</a:t>
+            </a:r>
+            <a:endParaRPr lang="en-US" sz="1400" dirty="0"/>
+          </a:p>
+        </p:txBody>
+      </p:sp>
+      <p:sp>
+        <p:nvSpPr>
+          <p:cNvPr id="21" name="Text 19"/>
+          <p:cNvSpPr/>
+          <p:nvPr/>
+        </p:nvSpPr>
+        <p:spPr>
+          <a:xfrm>
+            <a:off x="1325880" y="3758184"/>
+            <a:ext cx="10058400" cy="256032"/>
+          </a:xfrm>
+          <a:prstGeom prst="rect">
+            <a:avLst/>
+          </a:prstGeom>
+          <a:noFill/>
+          <a:ln/>
+        </p:spPr>
+        <p:txBody>
+          <a:bodyPr wrap="square" rtlCol="0" anchor="ctr"/>
+          <a:lstStyle/>
+          <a:p>
+            <a:pPr indent="0" marL="0">
+              <a:buNone/>
+            </a:pPr>
+            <a:r>
+              <a:rPr lang="en-US" sz="1150" b="1" dirty="0">
                 <a:solidFill>
                   <a:srgbClr val="FFFFFF"/>
                 </a:solidFill>
@@ -5919,9 +7740,390 @@
                 <a:ea typeface="Calibri" pitchFamily="34" charset="-122"/>
                 <a:cs typeface="Calibri" pitchFamily="34" charset="-120"/>
               </a:rPr>
-              <a:t>THANK YOU!  *  QUESTIONS, DEFENSE &amp; DISCUSSION ARE WELCOMED</a:t>
-            </a:r>
-            <a:endParaRPr lang="en-US" sz="1200" dirty="0"/>
+              <a:t>Interactive Airplane Seat Map in UI</a:t>
+            </a:r>
+            <a:endParaRPr lang="en-US" sz="1150" dirty="0"/>
+          </a:p>
+        </p:txBody>
+      </p:sp>
+      <p:sp>
+        <p:nvSpPr>
+          <p:cNvPr id="22" name="Text 20"/>
+          <p:cNvSpPr/>
+          <p:nvPr/>
+        </p:nvSpPr>
+        <p:spPr>
+          <a:xfrm>
+            <a:off x="1325880" y="4032504"/>
+            <a:ext cx="10058400" cy="320040"/>
+          </a:xfrm>
+          <a:prstGeom prst="rect">
+            <a:avLst/>
+          </a:prstGeom>
+          <a:noFill/>
+          <a:ln/>
+        </p:spPr>
+        <p:txBody>
+          <a:bodyPr wrap="square" rtlCol="0" anchor="t"/>
+          <a:lstStyle/>
+          <a:p>
+            <a:pPr indent="0" marL="0">
+              <a:buNone/>
+            </a:pPr>
+            <a:r>
+              <a:rPr lang="en-US" sz="850" dirty="0">
+                <a:solidFill>
+                  <a:srgbClr val="E4E4E7"/>
+                </a:solidFill>
+                <a:latin typeface="Calibri" pitchFamily="34" charset="0"/>
+                <a:ea typeface="Calibri" pitchFamily="34" charset="-122"/>
+                <a:cs typeface="Calibri" pitchFamily="34" charset="-120"/>
+              </a:rPr>
+              <a:t>Add an interactive graphic visual map of the airplane cabin where passengers can see available seats in green and taken seats in red.</a:t>
+            </a:r>
+            <a:endParaRPr lang="en-US" sz="850" dirty="0"/>
+          </a:p>
+        </p:txBody>
+      </p:sp>
+      <p:sp>
+        <p:nvSpPr>
+          <p:cNvPr id="23" name="Shape 21"/>
+          <p:cNvSpPr/>
+          <p:nvPr/>
+        </p:nvSpPr>
+        <p:spPr>
+          <a:xfrm>
+            <a:off x="548640" y="4489704"/>
+            <a:ext cx="11091672" cy="749808"/>
+          </a:xfrm>
+          <a:prstGeom prst="roundRect">
+            <a:avLst>
+              <a:gd name="adj" fmla="val 9756"/>
+            </a:avLst>
+          </a:prstGeom>
+          <a:solidFill>
+            <a:srgbClr val="18181B"/>
+          </a:solidFill>
+          <a:ln w="12700">
+            <a:solidFill>
+              <a:srgbClr val="3F3F46"/>
+            </a:solidFill>
+            <a:prstDash val="solid"/>
+          </a:ln>
+        </p:spPr>
+      </p:sp>
+      <p:sp>
+        <p:nvSpPr>
+          <p:cNvPr id="24" name="Shape 22"/>
+          <p:cNvSpPr/>
+          <p:nvPr/>
+        </p:nvSpPr>
+        <p:spPr>
+          <a:xfrm>
+            <a:off x="731520" y="4599432"/>
+            <a:ext cx="457200" cy="530352"/>
+          </a:xfrm>
+          <a:prstGeom prst="roundRect">
+            <a:avLst>
+              <a:gd name="adj" fmla="val 10000"/>
+            </a:avLst>
+          </a:prstGeom>
+          <a:solidFill>
+            <a:srgbClr val="27272A"/>
+          </a:solidFill>
+          <a:ln w="12700">
+            <a:solidFill>
+              <a:srgbClr val="38BDF8"/>
+            </a:solidFill>
+            <a:prstDash val="solid"/>
+          </a:ln>
+        </p:spPr>
+      </p:sp>
+      <p:sp>
+        <p:nvSpPr>
+          <p:cNvPr id="25" name="Text 23"/>
+          <p:cNvSpPr/>
+          <p:nvPr/>
+        </p:nvSpPr>
+        <p:spPr>
+          <a:xfrm>
+            <a:off x="731520" y="4599432"/>
+            <a:ext cx="457200" cy="530352"/>
+          </a:xfrm>
+          <a:prstGeom prst="rect">
+            <a:avLst/>
+          </a:prstGeom>
+          <a:noFill/>
+          <a:ln/>
+        </p:spPr>
+        <p:txBody>
+          <a:bodyPr wrap="square" rtlCol="0" anchor="ctr"/>
+          <a:lstStyle/>
+          <a:p>
+            <a:pPr algn="ctr" indent="0" marL="0">
+              <a:buNone/>
+            </a:pPr>
+            <a:r>
+              <a:rPr lang="en-US" sz="1400" b="1" dirty="0">
+                <a:solidFill>
+                  <a:srgbClr val="38BDF8"/>
+                </a:solidFill>
+                <a:latin typeface="Calibri" pitchFamily="34" charset="0"/>
+                <a:ea typeface="Calibri" pitchFamily="34" charset="-122"/>
+                <a:cs typeface="Calibri" pitchFamily="34" charset="-120"/>
+              </a:rPr>
+              <a:t>4</a:t>
+            </a:r>
+            <a:endParaRPr lang="en-US" sz="1400" dirty="0"/>
+          </a:p>
+        </p:txBody>
+      </p:sp>
+      <p:sp>
+        <p:nvSpPr>
+          <p:cNvPr id="26" name="Text 24"/>
+          <p:cNvSpPr/>
+          <p:nvPr/>
+        </p:nvSpPr>
+        <p:spPr>
+          <a:xfrm>
+            <a:off x="1325880" y="4599432"/>
+            <a:ext cx="10058400" cy="256032"/>
+          </a:xfrm>
+          <a:prstGeom prst="rect">
+            <a:avLst/>
+          </a:prstGeom>
+          <a:noFill/>
+          <a:ln/>
+        </p:spPr>
+        <p:txBody>
+          <a:bodyPr wrap="square" rtlCol="0" anchor="ctr"/>
+          <a:lstStyle/>
+          <a:p>
+            <a:pPr indent="0" marL="0">
+              <a:buNone/>
+            </a:pPr>
+            <a:r>
+              <a:rPr lang="en-US" sz="1150" b="1" dirty="0">
+                <a:solidFill>
+                  <a:srgbClr val="FFFFFF"/>
+                </a:solidFill>
+                <a:latin typeface="Calibri" pitchFamily="34" charset="0"/>
+                <a:ea typeface="Calibri" pitchFamily="34" charset="-122"/>
+                <a:cs typeface="Calibri" pitchFamily="34" charset="-120"/>
+              </a:rPr>
+              <a:t>Live Flight Status &amp; Delay Tracking</a:t>
+            </a:r>
+            <a:endParaRPr lang="en-US" sz="1150" dirty="0"/>
+          </a:p>
+        </p:txBody>
+      </p:sp>
+      <p:sp>
+        <p:nvSpPr>
+          <p:cNvPr id="27" name="Text 25"/>
+          <p:cNvSpPr/>
+          <p:nvPr/>
+        </p:nvSpPr>
+        <p:spPr>
+          <a:xfrm>
+            <a:off x="1325880" y="4873752"/>
+            <a:ext cx="10058400" cy="320040"/>
+          </a:xfrm>
+          <a:prstGeom prst="rect">
+            <a:avLst/>
+          </a:prstGeom>
+          <a:noFill/>
+          <a:ln/>
+        </p:spPr>
+        <p:txBody>
+          <a:bodyPr wrap="square" rtlCol="0" anchor="t"/>
+          <a:lstStyle/>
+          <a:p>
+            <a:pPr indent="0" marL="0">
+              <a:buNone/>
+            </a:pPr>
+            <a:r>
+              <a:rPr lang="en-US" sz="850" dirty="0">
+                <a:solidFill>
+                  <a:srgbClr val="E4E4E7"/>
+                </a:solidFill>
+                <a:latin typeface="Calibri" pitchFamily="34" charset="0"/>
+                <a:ea typeface="Calibri" pitchFamily="34" charset="-122"/>
+                <a:cs typeface="Calibri" pitchFamily="34" charset="-120"/>
+              </a:rPr>
+              <a:t>Add live flight status updates (On Time, Delayed, Gate Changed) and airport weather notifications for passengers.</a:t>
+            </a:r>
+            <a:endParaRPr lang="en-US" sz="850" dirty="0"/>
+          </a:p>
+        </p:txBody>
+      </p:sp>
+      <p:sp>
+        <p:nvSpPr>
+          <p:cNvPr id="28" name="Shape 26"/>
+          <p:cNvSpPr/>
+          <p:nvPr/>
+        </p:nvSpPr>
+        <p:spPr>
+          <a:xfrm>
+            <a:off x="548640" y="5330952"/>
+            <a:ext cx="11091672" cy="749808"/>
+          </a:xfrm>
+          <a:prstGeom prst="roundRect">
+            <a:avLst>
+              <a:gd name="adj" fmla="val 9756"/>
+            </a:avLst>
+          </a:prstGeom>
+          <a:solidFill>
+            <a:srgbClr val="18181B"/>
+          </a:solidFill>
+          <a:ln w="12700">
+            <a:solidFill>
+              <a:srgbClr val="3F3F46"/>
+            </a:solidFill>
+            <a:prstDash val="solid"/>
+          </a:ln>
+        </p:spPr>
+      </p:sp>
+      <p:sp>
+        <p:nvSpPr>
+          <p:cNvPr id="29" name="Shape 27"/>
+          <p:cNvSpPr/>
+          <p:nvPr/>
+        </p:nvSpPr>
+        <p:spPr>
+          <a:xfrm>
+            <a:off x="731520" y="5440680"/>
+            <a:ext cx="457200" cy="530352"/>
+          </a:xfrm>
+          <a:prstGeom prst="roundRect">
+            <a:avLst>
+              <a:gd name="adj" fmla="val 10000"/>
+            </a:avLst>
+          </a:prstGeom>
+          <a:solidFill>
+            <a:srgbClr val="27272A"/>
+          </a:solidFill>
+          <a:ln w="12700">
+            <a:solidFill>
+              <a:srgbClr val="38BDF8"/>
+            </a:solidFill>
+            <a:prstDash val="solid"/>
+          </a:ln>
+        </p:spPr>
+      </p:sp>
+      <p:sp>
+        <p:nvSpPr>
+          <p:cNvPr id="30" name="Text 28"/>
+          <p:cNvSpPr/>
+          <p:nvPr/>
+        </p:nvSpPr>
+        <p:spPr>
+          <a:xfrm>
+            <a:off x="731520" y="5440680"/>
+            <a:ext cx="457200" cy="530352"/>
+          </a:xfrm>
+          <a:prstGeom prst="rect">
+            <a:avLst/>
+          </a:prstGeom>
+          <a:noFill/>
+          <a:ln/>
+        </p:spPr>
+        <p:txBody>
+          <a:bodyPr wrap="square" rtlCol="0" anchor="ctr"/>
+          <a:lstStyle/>
+          <a:p>
+            <a:pPr algn="ctr" indent="0" marL="0">
+              <a:buNone/>
+            </a:pPr>
+            <a:r>
+              <a:rPr lang="en-US" sz="1400" b="1" dirty="0">
+                <a:solidFill>
+                  <a:srgbClr val="38BDF8"/>
+                </a:solidFill>
+                <a:latin typeface="Calibri" pitchFamily="34" charset="0"/>
+                <a:ea typeface="Calibri" pitchFamily="34" charset="-122"/>
+                <a:cs typeface="Calibri" pitchFamily="34" charset="-120"/>
+              </a:rPr>
+              <a:t>5</a:t>
+            </a:r>
+            <a:endParaRPr lang="en-US" sz="1400" dirty="0"/>
+          </a:p>
+        </p:txBody>
+      </p:sp>
+      <p:sp>
+        <p:nvSpPr>
+          <p:cNvPr id="31" name="Text 29"/>
+          <p:cNvSpPr/>
+          <p:nvPr/>
+        </p:nvSpPr>
+        <p:spPr>
+          <a:xfrm>
+            <a:off x="1325880" y="5440680"/>
+            <a:ext cx="10058400" cy="256032"/>
+          </a:xfrm>
+          <a:prstGeom prst="rect">
+            <a:avLst/>
+          </a:prstGeom>
+          <a:noFill/>
+          <a:ln/>
+        </p:spPr>
+        <p:txBody>
+          <a:bodyPr wrap="square" rtlCol="0" anchor="ctr"/>
+          <a:lstStyle/>
+          <a:p>
+            <a:pPr indent="0" marL="0">
+              <a:buNone/>
+            </a:pPr>
+            <a:r>
+              <a:rPr lang="en-US" sz="1150" b="1" dirty="0">
+                <a:solidFill>
+                  <a:srgbClr val="FFFFFF"/>
+                </a:solidFill>
+                <a:latin typeface="Calibri" pitchFamily="34" charset="0"/>
+                <a:ea typeface="Calibri" pitchFamily="34" charset="-122"/>
+                <a:cs typeface="Calibri" pitchFamily="34" charset="-120"/>
+              </a:rPr>
+              <a:t>Mobile App for Android &amp; iOS</a:t>
+            </a:r>
+            <a:endParaRPr lang="en-US" sz="1150" dirty="0"/>
+          </a:p>
+        </p:txBody>
+      </p:sp>
+      <p:sp>
+        <p:nvSpPr>
+          <p:cNvPr id="32" name="Text 30"/>
+          <p:cNvSpPr/>
+          <p:nvPr/>
+        </p:nvSpPr>
+        <p:spPr>
+          <a:xfrm>
+            <a:off x="1325880" y="5715000"/>
+            <a:ext cx="10058400" cy="320040"/>
+          </a:xfrm>
+          <a:prstGeom prst="rect">
+            <a:avLst/>
+          </a:prstGeom>
+          <a:noFill/>
+          <a:ln/>
+        </p:spPr>
+        <p:txBody>
+          <a:bodyPr wrap="square" rtlCol="0" anchor="t"/>
+          <a:lstStyle/>
+          <a:p>
+            <a:pPr indent="0" marL="0">
+              <a:buNone/>
+            </a:pPr>
+            <a:r>
+              <a:rPr lang="en-US" sz="850" dirty="0">
+                <a:solidFill>
+                  <a:srgbClr val="E4E4E7"/>
+                </a:solidFill>
+                <a:latin typeface="Calibri" pitchFamily="34" charset="0"/>
+                <a:ea typeface="Calibri" pitchFamily="34" charset="-122"/>
+                <a:cs typeface="Calibri" pitchFamily="34" charset="-120"/>
+              </a:rPr>
+              <a:t>Build a lightweight mobile app using Flutter or React Native so passengers can book flights and show boarding passes right from their phones.</a:t>
+            </a:r>
+            <a:endParaRPr lang="en-US" sz="850" dirty="0"/>
           </a:p>
         </p:txBody>
       </p:sp>
